--- a/courseware/202610_ADS_W08_Recursion.pptx
+++ b/courseware/202610_ADS_W08_Recursion.pptx
@@ -31,6 +31,9 @@
     <p:sldId id="279" r:id="rId30"/>
     <p:sldId id="280" r:id="rId31"/>
     <p:sldId id="281" r:id="rId32"/>
+    <p:sldId id="282" r:id="rId33"/>
+    <p:sldId id="283" r:id="rId34"/>
+    <p:sldId id="284" r:id="rId35"/>
   </p:sldIdLst>
   <p:sldSz cx="12191695" cy="6858000" type="screen4x3"/>
   <p:notesSz cx="6858000" cy="9144000"/>
@@ -3383,7 +3386,7 @@
                 <a:latin typeface="Segoe UI"/>
                 <a:ea typeface="微软雅黑"/>
               </a:rPr>
-              <a:t>进程的虚拟地址空间</a:t>
+              <a:t>3.11 之后两道墙的位置变了（本机实测）</a:t>
             </a:r>
           </a:p>
         </p:txBody>
@@ -3432,397 +3435,425 @@
           </a:p>
         </p:txBody>
       </p:sp>
-      <p:sp>
-        <p:nvSpPr>
-          <p:cNvPr id="4" name="TextBox 3"/>
-          <p:cNvSpPr txBox="1"/>
+      <p:graphicFrame>
+        <p:nvGraphicFramePr>
+          <p:cNvPr id="4" name="Table 3"/>
+          <p:cNvGraphicFramePr>
+            <a:graphicFrameLocks noGrp="1"/>
+          </p:cNvGraphicFramePr>
           <p:nvPr/>
-        </p:nvSpPr>
-        <p:spPr>
-          <a:xfrm>
-            <a:off x="566928" y="1298448"/>
-            <a:ext cx="11057839" cy="4443984"/>
-          </a:xfrm>
-          <a:prstGeom prst="rect">
-            <a:avLst/>
-          </a:prstGeom>
-          <a:noFill/>
-        </p:spPr>
-        <p:txBody>
-          <a:bodyPr wrap="square" lIns="0" rIns="0" tIns="0" bIns="0">
-            <a:noAutofit/>
-          </a:bodyPr>
-          <a:lstStyle/>
-          <a:p>
-            <a:pPr algn="l">
-              <a:lnSpc>
-                <a:spcPts val="2187"/>
-              </a:lnSpc>
-              <a:spcBef>
-                <a:spcPts val="0"/>
-              </a:spcBef>
-              <a:spcAft>
-                <a:spcPts val="0"/>
-              </a:spcAft>
-            </a:pPr>
-            <a:r>
-              <a:rPr sz="1682" b="0" i="0">
-                <a:solidFill>
-                  <a:srgbClr val="12395B"/>
-                </a:solidFill>
-                <a:latin typeface="Consolas"/>
-                <a:ea typeface="Consolas"/>
-              </a:rPr>
-              <a:t> </a:t>
-            </a:r>
-          </a:p>
-          <a:p>
-            <a:pPr algn="l">
-              <a:lnSpc>
-                <a:spcPts val="2187"/>
-              </a:lnSpc>
-              <a:spcBef>
-                <a:spcPts val="0"/>
-              </a:spcBef>
-              <a:spcAft>
-                <a:spcPts val="0"/>
-              </a:spcAft>
-            </a:pPr>
-            <a:r>
-              <a:rPr sz="1682" b="0" i="0">
-                <a:solidFill>
-                  <a:srgbClr val="12395B"/>
-                </a:solidFill>
-                <a:latin typeface="Consolas"/>
-                <a:ea typeface="Consolas"/>
-              </a:rPr>
-              <a:t>   高地址</a:t>
-            </a:r>
-          </a:p>
-          <a:p>
-            <a:pPr algn="l">
-              <a:lnSpc>
-                <a:spcPts val="2187"/>
-              </a:lnSpc>
-              <a:spcBef>
-                <a:spcPts val="0"/>
-              </a:spcBef>
-              <a:spcAft>
-                <a:spcPts val="0"/>
-              </a:spcAft>
-            </a:pPr>
-            <a:r>
-              <a:rPr sz="1682" b="0" i="0">
-                <a:solidFill>
-                  <a:srgbClr val="12395B"/>
-                </a:solidFill>
-                <a:latin typeface="Consolas"/>
-                <a:ea typeface="Consolas"/>
-              </a:rPr>
-              <a:t>   +-------------------+</a:t>
-            </a:r>
-          </a:p>
-          <a:p>
-            <a:pPr algn="l">
-              <a:lnSpc>
-                <a:spcPts val="2187"/>
-              </a:lnSpc>
-              <a:spcBef>
-                <a:spcPts val="0"/>
-              </a:spcBef>
-              <a:spcAft>
-                <a:spcPts val="0"/>
-              </a:spcAft>
-            </a:pPr>
-            <a:r>
-              <a:rPr sz="1682" b="0" i="0">
-                <a:solidFill>
-                  <a:srgbClr val="12395B"/>
-                </a:solidFill>
-                <a:latin typeface="Consolas"/>
-                <a:ea typeface="Consolas"/>
-              </a:rPr>
-              <a:t>   |       内核区       |</a:t>
-            </a:r>
-          </a:p>
-          <a:p>
-            <a:pPr algn="l">
-              <a:lnSpc>
-                <a:spcPts val="2187"/>
-              </a:lnSpc>
-              <a:spcBef>
-                <a:spcPts val="0"/>
-              </a:spcBef>
-              <a:spcAft>
-                <a:spcPts val="0"/>
-              </a:spcAft>
-            </a:pPr>
-            <a:r>
-              <a:rPr sz="1682" b="0" i="0">
-                <a:solidFill>
-                  <a:srgbClr val="12395B"/>
-                </a:solidFill>
-                <a:latin typeface="Consolas"/>
-                <a:ea typeface="Consolas"/>
-              </a:rPr>
-              <a:t>   +-------------------+</a:t>
-            </a:r>
-          </a:p>
-          <a:p>
-            <a:pPr algn="l">
-              <a:lnSpc>
-                <a:spcPts val="2187"/>
-              </a:lnSpc>
-              <a:spcBef>
-                <a:spcPts val="0"/>
-              </a:spcBef>
-              <a:spcAft>
-                <a:spcPts val="0"/>
-              </a:spcAft>
-            </a:pPr>
-            <a:r>
-              <a:rPr sz="1682" b="0" i="0">
-                <a:solidFill>
-                  <a:srgbClr val="12395B"/>
-                </a:solidFill>
-                <a:latin typeface="Consolas"/>
-                <a:ea typeface="Consolas"/>
-              </a:rPr>
-              <a:t>   |       栈 Stack     |  &lt;- 函数调用帧，向下增长，通常 8 MB</a:t>
-            </a:r>
-          </a:p>
-          <a:p>
-            <a:pPr algn="l">
-              <a:lnSpc>
-                <a:spcPts val="2187"/>
-              </a:lnSpc>
-              <a:spcBef>
-                <a:spcPts val="0"/>
-              </a:spcBef>
-              <a:spcAft>
-                <a:spcPts val="0"/>
-              </a:spcAft>
-            </a:pPr>
-            <a:r>
-              <a:rPr sz="1682" b="0" i="0">
-                <a:solidFill>
-                  <a:srgbClr val="12395B"/>
-                </a:solidFill>
-                <a:latin typeface="Consolas"/>
-                <a:ea typeface="Consolas"/>
-              </a:rPr>
-              <a:t>   |         v          |</a:t>
-            </a:r>
-          </a:p>
-          <a:p>
-            <a:pPr algn="l">
-              <a:lnSpc>
-                <a:spcPts val="2187"/>
-              </a:lnSpc>
-              <a:spcBef>
-                <a:spcPts val="0"/>
-              </a:spcBef>
-              <a:spcAft>
-                <a:spcPts val="0"/>
-              </a:spcAft>
-            </a:pPr>
-            <a:r>
-              <a:rPr sz="1682" b="0" i="0">
-                <a:solidFill>
-                  <a:srgbClr val="12395B"/>
-                </a:solidFill>
-                <a:latin typeface="Consolas"/>
-                <a:ea typeface="Consolas"/>
-              </a:rPr>
-              <a:t>   |                    |</a:t>
-            </a:r>
-          </a:p>
-          <a:p>
-            <a:pPr algn="l">
-              <a:lnSpc>
-                <a:spcPts val="2187"/>
-              </a:lnSpc>
-              <a:spcBef>
-                <a:spcPts val="0"/>
-              </a:spcBef>
-              <a:spcAft>
-                <a:spcPts val="0"/>
-              </a:spcAft>
-            </a:pPr>
-            <a:r>
-              <a:rPr sz="1682" b="0" i="0">
-                <a:solidFill>
-                  <a:srgbClr val="12395B"/>
-                </a:solidFill>
-                <a:latin typeface="Consolas"/>
-                <a:ea typeface="Consolas"/>
-              </a:rPr>
-              <a:t>   |         ^          |</a:t>
-            </a:r>
-          </a:p>
-          <a:p>
-            <a:pPr algn="l">
-              <a:lnSpc>
-                <a:spcPts val="2187"/>
-              </a:lnSpc>
-              <a:spcBef>
-                <a:spcPts val="0"/>
-              </a:spcBef>
-              <a:spcAft>
-                <a:spcPts val="0"/>
-              </a:spcAft>
-            </a:pPr>
-            <a:r>
-              <a:rPr sz="1682" b="0" i="0">
-                <a:solidFill>
-                  <a:srgbClr val="12395B"/>
-                </a:solidFill>
-                <a:latin typeface="Consolas"/>
-                <a:ea typeface="Consolas"/>
-              </a:rPr>
-              <a:t>   |       堆 Heap      |  &lt;- 动态分配的对象，向上增长</a:t>
-            </a:r>
-          </a:p>
-          <a:p>
-            <a:pPr algn="l">
-              <a:lnSpc>
-                <a:spcPts val="2187"/>
-              </a:lnSpc>
-              <a:spcBef>
-                <a:spcPts val="0"/>
-              </a:spcBef>
-              <a:spcAft>
-                <a:spcPts val="0"/>
-              </a:spcAft>
-            </a:pPr>
-            <a:r>
-              <a:rPr sz="1682" b="0" i="0">
-                <a:solidFill>
-                  <a:srgbClr val="12395B"/>
-                </a:solidFill>
-                <a:latin typeface="Consolas"/>
-                <a:ea typeface="Consolas"/>
-              </a:rPr>
-              <a:t>   +-------------------+</a:t>
-            </a:r>
-          </a:p>
-          <a:p>
-            <a:pPr algn="l">
-              <a:lnSpc>
-                <a:spcPts val="2187"/>
-              </a:lnSpc>
-              <a:spcBef>
-                <a:spcPts val="0"/>
-              </a:spcBef>
-              <a:spcAft>
-                <a:spcPts val="0"/>
-              </a:spcAft>
-            </a:pPr>
-            <a:r>
-              <a:rPr sz="1682" b="0" i="0">
-                <a:solidFill>
-                  <a:srgbClr val="12395B"/>
-                </a:solidFill>
-                <a:latin typeface="Consolas"/>
-                <a:ea typeface="Consolas"/>
-              </a:rPr>
-              <a:t>   |   全局 / 静态数据   |</a:t>
-            </a:r>
-          </a:p>
-          <a:p>
-            <a:pPr algn="l">
-              <a:lnSpc>
-                <a:spcPts val="2187"/>
-              </a:lnSpc>
-              <a:spcBef>
-                <a:spcPts val="0"/>
-              </a:spcBef>
-              <a:spcAft>
-                <a:spcPts val="0"/>
-              </a:spcAft>
-            </a:pPr>
-            <a:r>
-              <a:rPr sz="1682" b="0" i="0">
-                <a:solidFill>
-                  <a:srgbClr val="12395B"/>
-                </a:solidFill>
-                <a:latin typeface="Consolas"/>
-                <a:ea typeface="Consolas"/>
-              </a:rPr>
-              <a:t>   +-------------------+</a:t>
-            </a:r>
-          </a:p>
-          <a:p>
-            <a:pPr algn="l">
-              <a:lnSpc>
-                <a:spcPts val="2187"/>
-              </a:lnSpc>
-              <a:spcBef>
-                <a:spcPts val="0"/>
-              </a:spcBef>
-              <a:spcAft>
-                <a:spcPts val="0"/>
-              </a:spcAft>
-            </a:pPr>
-            <a:r>
-              <a:rPr sz="1682" b="0" i="0">
-                <a:solidFill>
-                  <a:srgbClr val="12395B"/>
-                </a:solidFill>
-                <a:latin typeface="Consolas"/>
-                <a:ea typeface="Consolas"/>
-              </a:rPr>
-              <a:t>   |     代码段 Text     |</a:t>
-            </a:r>
-          </a:p>
-          <a:p>
-            <a:pPr algn="l">
-              <a:lnSpc>
-                <a:spcPts val="2187"/>
-              </a:lnSpc>
-              <a:spcBef>
-                <a:spcPts val="0"/>
-              </a:spcBef>
-              <a:spcAft>
-                <a:spcPts val="0"/>
-              </a:spcAft>
-            </a:pPr>
-            <a:r>
-              <a:rPr sz="1682" b="0" i="0">
-                <a:solidFill>
-                  <a:srgbClr val="12395B"/>
-                </a:solidFill>
-                <a:latin typeface="Consolas"/>
-                <a:ea typeface="Consolas"/>
-              </a:rPr>
-              <a:t>   +-------------------+</a:t>
-            </a:r>
-          </a:p>
-          <a:p>
-            <a:pPr algn="l">
-              <a:lnSpc>
-                <a:spcPts val="2187"/>
-              </a:lnSpc>
-              <a:spcBef>
-                <a:spcPts val="0"/>
-              </a:spcBef>
-              <a:spcAft>
-                <a:spcPts val="0"/>
-              </a:spcAft>
-            </a:pPr>
-            <a:r>
-              <a:rPr sz="1682" b="0" i="0">
-                <a:solidFill>
-                  <a:srgbClr val="12395B"/>
-                </a:solidFill>
-                <a:latin typeface="Consolas"/>
-                <a:ea typeface="Consolas"/>
-              </a:rPr>
-              <a:t>   低地址</a:t>
-            </a:r>
-          </a:p>
-        </p:txBody>
-      </p:sp>
+        </p:nvGraphicFramePr>
+        <p:xfrm>
+          <a:off x="566928" y="1298448"/>
+          <a:ext cx="11057837" cy="1318260"/>
+        </p:xfrm>
+        <a:graphic>
+          <a:graphicData uri="http://schemas.openxmlformats.org/drawingml/2006/table">
+            <a:tbl>
+              <a:tblPr firstRow="1" bandRow="1">
+                <a:tableStyleId>{5C22544A-7EE6-4342-B048-85BDC9FD1C3A}</a:tableStyleId>
+              </a:tblPr>
+              <a:tblGrid>
+                <a:gridCol w="3895959"/>
+                <a:gridCol w="4114544"/>
+                <a:gridCol w="3047334"/>
+              </a:tblGrid>
+              <a:tr h="439420">
+                <a:tc>
+                  <a:txBody>
+                    <a:bodyPr wrap="square"/>
+                    <a:lstStyle/>
+                    <a:p>
+                      <a:pPr algn="l">
+                        <a:lnSpc>
+                          <a:spcPct val="122000"/>
+                        </a:lnSpc>
+                        <a:spcBef>
+                          <a:spcPts val="0"/>
+                        </a:spcBef>
+                        <a:spcAft>
+                          <a:spcPts val="0"/>
+                        </a:spcAft>
+                      </a:pPr>
+                      <a:r>
+                        <a:rPr sz="1700" b="1" i="0">
+                          <a:solidFill>
+                            <a:srgbClr val="FFFFFF"/>
+                          </a:solidFill>
+                          <a:latin typeface="Segoe UI"/>
+                          <a:ea typeface="微软雅黑"/>
+                        </a:rPr>
+                        <a:t>递归形状</a:t>
+                      </a:r>
+                    </a:p>
+                  </a:txBody>
+                  <a:tcPr marL="100584" marR="100584" marT="27432" marB="27432" anchor="ctr">
+                    <a:solidFill>
+                      <a:srgbClr val="12395B"/>
+                    </a:solidFill>
+                  </a:tcPr>
+                </a:tc>
+                <a:tc>
+                  <a:txBody>
+                    <a:bodyPr wrap="square"/>
+                    <a:lstStyle/>
+                    <a:p>
+                      <a:pPr algn="l">
+                        <a:lnSpc>
+                          <a:spcPct val="122000"/>
+                        </a:lnSpc>
+                        <a:spcBef>
+                          <a:spcPts val="0"/>
+                        </a:spcBef>
+                        <a:spcAft>
+                          <a:spcPts val="0"/>
+                        </a:spcAft>
+                      </a:pPr>
+                      <a:r>
+                        <a:rPr sz="1700" b="1" i="0">
+                          <a:solidFill>
+                            <a:srgbClr val="FFFFFF"/>
+                          </a:solidFill>
+                          <a:latin typeface="Segoe UI"/>
+                          <a:ea typeface="微软雅黑"/>
+                        </a:rPr>
+                        <a:t>最深能到</a:t>
+                      </a:r>
+                    </a:p>
+                  </a:txBody>
+                  <a:tcPr marL="100584" marR="100584" marT="27432" marB="27432" anchor="ctr">
+                    <a:solidFill>
+                      <a:srgbClr val="12395B"/>
+                    </a:solidFill>
+                  </a:tcPr>
+                </a:tc>
+                <a:tc>
+                  <a:txBody>
+                    <a:bodyPr wrap="square"/>
+                    <a:lstStyle/>
+                    <a:p>
+                      <a:pPr algn="l">
+                        <a:lnSpc>
+                          <a:spcPct val="122000"/>
+                        </a:lnSpc>
+                        <a:spcBef>
+                          <a:spcPts val="0"/>
+                        </a:spcBef>
+                        <a:spcAft>
+                          <a:spcPts val="0"/>
+                        </a:spcAft>
+                      </a:pPr>
+                      <a:r>
+                        <a:rPr sz="1700" b="1" i="0">
+                          <a:solidFill>
+                            <a:srgbClr val="FFFFFF"/>
+                          </a:solidFill>
+                          <a:latin typeface="Segoe UI"/>
+                          <a:ea typeface="微软雅黑"/>
+                        </a:rPr>
+                        <a:t>线程栈加到 64 MB 有用吗</a:t>
+                      </a:r>
+                    </a:p>
+                  </a:txBody>
+                  <a:tcPr marL="100584" marR="100584" marT="27432" marB="27432" anchor="ctr">
+                    <a:solidFill>
+                      <a:srgbClr val="12395B"/>
+                    </a:solidFill>
+                  </a:tcPr>
+                </a:tc>
+              </a:tr>
+              <a:tr h="439420">
+                <a:tc>
+                  <a:txBody>
+                    <a:bodyPr wrap="square"/>
+                    <a:lstStyle/>
+                    <a:p>
+                      <a:pPr algn="l">
+                        <a:lnSpc>
+                          <a:spcPct val="122000"/>
+                        </a:lnSpc>
+                        <a:spcBef>
+                          <a:spcPts val="0"/>
+                        </a:spcBef>
+                        <a:spcAft>
+                          <a:spcPts val="0"/>
+                        </a:spcAft>
+                      </a:pPr>
+                      <a:r>
+                        <a:rPr sz="1700" b="0" i="0">
+                          <a:solidFill>
+                            <a:srgbClr val="242A33"/>
+                          </a:solidFill>
+                          <a:latin typeface="Segoe UI"/>
+                          <a:ea typeface="微软雅黑"/>
+                        </a:rPr>
+                        <a:t>纯 Python 递归</a:t>
+                      </a:r>
+                    </a:p>
+                  </a:txBody>
+                  <a:tcPr marL="100584" marR="100584" marT="27432" marB="27432" anchor="ctr">
+                    <a:solidFill>
+                      <a:srgbClr val="FFFFFF"/>
+                    </a:solidFill>
+                  </a:tcPr>
+                </a:tc>
+                <a:tc>
+                  <a:txBody>
+                    <a:bodyPr wrap="square"/>
+                    <a:lstStyle/>
+                    <a:p>
+                      <a:pPr algn="l">
+                        <a:lnSpc>
+                          <a:spcPct val="122000"/>
+                        </a:lnSpc>
+                        <a:spcBef>
+                          <a:spcPts val="0"/>
+                        </a:spcBef>
+                        <a:spcAft>
+                          <a:spcPts val="0"/>
+                        </a:spcAft>
+                      </a:pPr>
+                      <a:r>
+                        <a:rPr sz="1700" b="1" i="0">
+                          <a:solidFill>
+                            <a:srgbClr val="12395B"/>
+                          </a:solidFill>
+                          <a:latin typeface="Segoe UI"/>
+                          <a:ea typeface="微软雅黑"/>
+                        </a:rPr>
+                        <a:t>30 万层照跑</a:t>
+                      </a:r>
+                      <a:r>
+                        <a:rPr sz="1700" b="0" i="0">
+                          <a:solidFill>
+                            <a:srgbClr val="242A33"/>
+                          </a:solidFill>
+                          <a:latin typeface="Segoe UI"/>
+                          <a:ea typeface="微软雅黑"/>
+                        </a:rPr>
+                        <a:t>（32 KB 栈也够）</a:t>
+                      </a:r>
+                    </a:p>
+                  </a:txBody>
+                  <a:tcPr marL="100584" marR="100584" marT="27432" marB="27432" anchor="ctr">
+                    <a:solidFill>
+                      <a:srgbClr val="FFFFFF"/>
+                    </a:solidFill>
+                  </a:tcPr>
+                </a:tc>
+                <a:tc>
+                  <a:txBody>
+                    <a:bodyPr wrap="square"/>
+                    <a:lstStyle/>
+                    <a:p>
+                      <a:pPr algn="l">
+                        <a:lnSpc>
+                          <a:spcPct val="122000"/>
+                        </a:lnSpc>
+                        <a:spcBef>
+                          <a:spcPts val="0"/>
+                        </a:spcBef>
+                        <a:spcAft>
+                          <a:spcPts val="0"/>
+                        </a:spcAft>
+                      </a:pPr>
+                      <a:r>
+                        <a:rPr sz="1700" b="0" i="0">
+                          <a:solidFill>
+                            <a:srgbClr val="242A33"/>
+                          </a:solidFill>
+                          <a:latin typeface="Segoe UI"/>
+                          <a:ea typeface="微软雅黑"/>
+                        </a:rPr>
+                        <a:t>没有区别</a:t>
+                      </a:r>
+                    </a:p>
+                  </a:txBody>
+                  <a:tcPr marL="100584" marR="100584" marT="27432" marB="27432" anchor="ctr">
+                    <a:solidFill>
+                      <a:srgbClr val="FFFFFF"/>
+                    </a:solidFill>
+                  </a:tcPr>
+                </a:tc>
+              </a:tr>
+              <a:tr h="439420">
+                <a:tc>
+                  <a:txBody>
+                    <a:bodyPr wrap="square"/>
+                    <a:lstStyle/>
+                    <a:p>
+                      <a:pPr algn="l">
+                        <a:lnSpc>
+                          <a:spcPct val="122000"/>
+                        </a:lnSpc>
+                        <a:spcBef>
+                          <a:spcPts val="0"/>
+                        </a:spcBef>
+                        <a:spcAft>
+                          <a:spcPts val="0"/>
+                        </a:spcAft>
+                      </a:pPr>
+                      <a:r>
+                        <a:rPr sz="1700" b="0" i="0">
+                          <a:solidFill>
+                            <a:srgbClr val="242A33"/>
+                          </a:solidFill>
+                          <a:latin typeface="Segoe UI"/>
+                          <a:ea typeface="微软雅黑"/>
+                        </a:rPr>
+                        <a:t>递归</a:t>
+                      </a:r>
+                      <a:r>
+                        <a:rPr sz="1700" b="1" i="0">
+                          <a:solidFill>
+                            <a:srgbClr val="12395B"/>
+                          </a:solidFill>
+                          <a:latin typeface="Segoe UI"/>
+                          <a:ea typeface="微软雅黑"/>
+                        </a:rPr>
+                        <a:t>穿过 C 代码</a:t>
+                      </a:r>
+                      <a:r>
+                        <a:rPr sz="1700" b="0" i="0">
+                          <a:solidFill>
+                            <a:srgbClr val="242A33"/>
+                          </a:solidFill>
+                          <a:latin typeface="Segoe UI"/>
+                          <a:ea typeface="微软雅黑"/>
+                        </a:rPr>
+                        <a:t>（</a:t>
+                      </a:r>
+                      <a:r>
+                        <a:rPr sz="1597" b="0" i="0">
+                          <a:solidFill>
+                            <a:srgbClr val="242A33"/>
+                          </a:solidFill>
+                          <a:latin typeface="Consolas"/>
+                          <a:ea typeface="Consolas"/>
+                        </a:rPr>
+                        <a:t>@lru_cache</a:t>
+                      </a:r>
+                      <a:r>
+                        <a:rPr sz="1700" b="0" i="0">
+                          <a:solidFill>
+                            <a:srgbClr val="242A33"/>
+                          </a:solidFill>
+                          <a:latin typeface="Segoe UI"/>
+                          <a:ea typeface="微软雅黑"/>
+                        </a:rPr>
+                        <a:t>）</a:t>
+                      </a:r>
+                    </a:p>
+                  </a:txBody>
+                  <a:tcPr marL="100584" marR="100584" marT="27432" marB="27432" anchor="ctr">
+                    <a:solidFill>
+                      <a:srgbClr val="F2F4F7"/>
+                    </a:solidFill>
+                  </a:tcPr>
+                </a:tc>
+                <a:tc>
+                  <a:txBody>
+                    <a:bodyPr wrap="square"/>
+                    <a:lstStyle/>
+                    <a:p>
+                      <a:pPr algn="l">
+                        <a:lnSpc>
+                          <a:spcPct val="122000"/>
+                        </a:lnSpc>
+                        <a:spcBef>
+                          <a:spcPts val="0"/>
+                        </a:spcBef>
+                        <a:spcAft>
+                          <a:spcPts val="0"/>
+                        </a:spcAft>
+                      </a:pPr>
+                      <a:r>
+                        <a:rPr sz="1700" b="1" i="0">
+                          <a:solidFill>
+                            <a:srgbClr val="12395B"/>
+                          </a:solidFill>
+                          <a:latin typeface="Segoe UI"/>
+                          <a:ea typeface="微软雅黑"/>
+                        </a:rPr>
+                        <a:t>3331 层封顶</a:t>
+                      </a:r>
+                      <a:r>
+                        <a:rPr sz="1700" b="0" i="0">
+                          <a:solidFill>
+                            <a:srgbClr val="242A33"/>
+                          </a:solidFill>
+                          <a:latin typeface="Segoe UI"/>
+                          <a:ea typeface="微软雅黑"/>
+                        </a:rPr>
+                        <a:t>，抛 </a:t>
+                      </a:r>
+                      <a:r>
+                        <a:rPr sz="1597" b="0" i="0">
+                          <a:solidFill>
+                            <a:srgbClr val="242A33"/>
+                          </a:solidFill>
+                          <a:latin typeface="Consolas"/>
+                          <a:ea typeface="Consolas"/>
+                        </a:rPr>
+                        <a:t>RecursionError</a:t>
+                      </a:r>
+                    </a:p>
+                  </a:txBody>
+                  <a:tcPr marL="100584" marR="100584" marT="27432" marB="27432" anchor="ctr">
+                    <a:solidFill>
+                      <a:srgbClr val="F2F4F7"/>
+                    </a:solidFill>
+                  </a:tcPr>
+                </a:tc>
+                <a:tc>
+                  <a:txBody>
+                    <a:bodyPr wrap="square"/>
+                    <a:lstStyle/>
+                    <a:p>
+                      <a:pPr algn="l">
+                        <a:lnSpc>
+                          <a:spcPct val="122000"/>
+                        </a:lnSpc>
+                        <a:spcBef>
+                          <a:spcPts val="0"/>
+                        </a:spcBef>
+                        <a:spcAft>
+                          <a:spcPts val="0"/>
+                        </a:spcAft>
+                      </a:pPr>
+                      <a:r>
+                        <a:rPr sz="1700" b="1" i="0">
+                          <a:solidFill>
+                            <a:srgbClr val="12395B"/>
+                          </a:solidFill>
+                          <a:latin typeface="Segoe UI"/>
+                          <a:ea typeface="微软雅黑"/>
+                        </a:rPr>
+                        <a:t>没用</a:t>
+                      </a:r>
+                      <a:r>
+                        <a:rPr sz="1700" b="0" i="0">
+                          <a:solidFill>
+                            <a:srgbClr val="242A33"/>
+                          </a:solidFill>
+                          <a:latin typeface="Segoe UI"/>
+                          <a:ea typeface="微软雅黑"/>
+                        </a:rPr>
+                        <a:t>，还是 3331</a:t>
+                      </a:r>
+                    </a:p>
+                  </a:txBody>
+                  <a:tcPr marL="100584" marR="100584" marT="27432" marB="27432" anchor="ctr">
+                    <a:solidFill>
+                      <a:srgbClr val="F2F4F7"/>
+                    </a:solidFill>
+                  </a:tcPr>
+                </a:tc>
+              </a:tr>
+            </a:tbl>
+          </a:graphicData>
+        </a:graphic>
+      </p:graphicFrame>
       <p:sp>
         <p:nvSpPr>
           <p:cNvPr id="5" name="TextBox 4"/>
@@ -3831,7 +3862,7 @@
         </p:nvSpPr>
         <p:spPr>
           <a:xfrm>
-            <a:off x="566928" y="5888736"/>
+            <a:off x="566928" y="2763012"/>
             <a:ext cx="11057839" cy="329184"/>
           </a:xfrm>
           <a:prstGeom prst="rect">
@@ -3861,7 +3892,7 @@
                 <a:latin typeface="Segoe UI"/>
                 <a:ea typeface="微软雅黑"/>
               </a:rPr>
-              <a:t>"虚拟"：每个进程都以为自己独占整个地址空间，由 OS + MMU 映射到物理内存</a:t>
+              <a:t>CPython 3.12.3 / Linux，已 setrecursionlimit(1&lt;&lt;20)。请当成某个环境下的实测值，不是语言规范 —— 这恰恰是不该依赖它的理由</a:t>
             </a:r>
           </a:p>
         </p:txBody>
@@ -3972,175 +4003,6 @@
       <p:grpSpPr/>
       <p:sp>
         <p:nvSpPr>
-          <p:cNvPr id="2" name="Rectangle 1"/>
-          <p:cNvSpPr/>
-          <p:nvPr/>
-        </p:nvSpPr>
-        <p:spPr>
-          <a:xfrm>
-            <a:off x="0" y="0"/>
-            <a:ext cx="12191695" cy="6858000"/>
-          </a:xfrm>
-          <a:prstGeom prst="rect">
-            <a:avLst/>
-          </a:prstGeom>
-          <a:solidFill>
-            <a:srgbClr val="F2F4F7"/>
-          </a:solidFill>
-          <a:ln>
-            <a:noFill/>
-          </a:ln>
-          <a:effectLst/>
-        </p:spPr>
-        <p:style>
-          <a:lnRef idx="1">
-            <a:schemeClr val="accent1"/>
-          </a:lnRef>
-          <a:fillRef idx="3">
-            <a:schemeClr val="accent1"/>
-          </a:fillRef>
-          <a:effectRef idx="2">
-            <a:schemeClr val="accent1"/>
-          </a:effectRef>
-          <a:fontRef idx="minor">
-            <a:schemeClr val="lt1"/>
-          </a:fontRef>
-        </p:style>
-        <p:txBody>
-          <a:bodyPr rtlCol="0" anchor="ctr"/>
-          <a:lstStyle/>
-          <a:p>
-            <a:pPr algn="ctr"/>
-          </a:p>
-        </p:txBody>
-      </p:sp>
-      <p:sp>
-        <p:nvSpPr>
-          <p:cNvPr id="3" name="Rectangle 2"/>
-          <p:cNvSpPr/>
-          <p:nvPr/>
-        </p:nvSpPr>
-        <p:spPr>
-          <a:xfrm>
-            <a:off x="0" y="2331720"/>
-            <a:ext cx="274320" cy="1737360"/>
-          </a:xfrm>
-          <a:prstGeom prst="rect">
-            <a:avLst/>
-          </a:prstGeom>
-          <a:solidFill>
-            <a:srgbClr val="E07B39"/>
-          </a:solidFill>
-          <a:ln>
-            <a:noFill/>
-          </a:ln>
-          <a:effectLst/>
-        </p:spPr>
-        <p:style>
-          <a:lnRef idx="1">
-            <a:schemeClr val="accent1"/>
-          </a:lnRef>
-          <a:fillRef idx="3">
-            <a:schemeClr val="accent1"/>
-          </a:fillRef>
-          <a:effectRef idx="2">
-            <a:schemeClr val="accent1"/>
-          </a:effectRef>
-          <a:fontRef idx="minor">
-            <a:schemeClr val="lt1"/>
-          </a:fontRef>
-        </p:style>
-        <p:txBody>
-          <a:bodyPr rtlCol="0" anchor="ctr"/>
-          <a:lstStyle/>
-          <a:p>
-            <a:pPr algn="ctr"/>
-          </a:p>
-        </p:txBody>
-      </p:sp>
-      <p:sp>
-        <p:nvSpPr>
-          <p:cNvPr id="4" name="TextBox 3"/>
-          <p:cNvSpPr txBox="1"/>
-          <p:nvPr/>
-        </p:nvSpPr>
-        <p:spPr>
-          <a:xfrm>
-            <a:off x="868680" y="2395728"/>
-            <a:ext cx="10424160" cy="1737360"/>
-          </a:xfrm>
-          <a:prstGeom prst="rect">
-            <a:avLst/>
-          </a:prstGeom>
-          <a:noFill/>
-        </p:spPr>
-        <p:txBody>
-          <a:bodyPr wrap="square" lIns="0" rIns="0" tIns="0" bIns="0">
-            <a:noAutofit/>
-          </a:bodyPr>
-          <a:lstStyle/>
-          <a:p>
-            <a:pPr algn="l">
-              <a:spcBef>
-                <a:spcPts val="0"/>
-              </a:spcBef>
-              <a:spcAft>
-                <a:spcPts val="800"/>
-              </a:spcAft>
-            </a:pPr>
-            <a:r>
-              <a:rPr sz="1500" b="1" i="0">
-                <a:solidFill>
-                  <a:srgbClr val="E07B39"/>
-                </a:solidFill>
-                <a:latin typeface="Segoe UI"/>
-                <a:ea typeface="微软雅黑"/>
-              </a:rPr>
-              <a:t>第 2 节</a:t>
-            </a:r>
-          </a:p>
-          <a:p>
-            <a:pPr algn="l">
-              <a:spcBef>
-                <a:spcPts val="0"/>
-              </a:spcBef>
-              <a:spcAft>
-                <a:spcPts val="800"/>
-              </a:spcAft>
-            </a:pPr>
-            <a:r>
-              <a:rPr sz="3400" b="1" i="0">
-                <a:solidFill>
-                  <a:srgbClr val="12395B"/>
-                </a:solidFill>
-                <a:latin typeface="Segoe UI"/>
-                <a:ea typeface="微软雅黑"/>
-              </a:rPr>
-              <a:t>递归三部曲</a:t>
-            </a:r>
-          </a:p>
-        </p:txBody>
-      </p:sp>
-    </p:spTree>
-  </p:cSld>
-  <p:clrMapOvr>
-    <a:masterClrMapping/>
-  </p:clrMapOvr>
-</p:sld>
-</file>
-
-<file path=ppt/slides/slide12.xml><?xml version="1.0" encoding="utf-8"?>
-<p:sld xmlns:a="http://schemas.openxmlformats.org/drawingml/2006/main" xmlns:p="http://schemas.openxmlformats.org/presentationml/2006/main" xmlns:r="http://schemas.openxmlformats.org/officeDocument/2006/relationships">
-  <p:cSld>
-    <p:spTree>
-      <p:nvGrpSpPr>
-        <p:cNvPr id="1" name=""/>
-        <p:cNvGrpSpPr/>
-        <p:nvPr/>
-      </p:nvGrpSpPr>
-      <p:grpSpPr/>
-      <p:sp>
-        <p:nvSpPr>
           <p:cNvPr id="2" name="TextBox 1"/>
           <p:cNvSpPr txBox="1"/>
           <p:nvPr/>
@@ -4177,7 +4039,7 @@
                 <a:latin typeface="Segoe UI"/>
                 <a:ea typeface="微软雅黑"/>
               </a:rPr>
-              <a:t>序曲：朴素斐波那契是 O(2^n)</a:t>
+              <a:t>什么叫「递归穿过 C 代码」</a:t>
             </a:r>
           </a:p>
         </p:txBody>
@@ -4234,8 +4096,8 @@
         </p:nvSpPr>
         <p:spPr>
           <a:xfrm>
-            <a:off x="566928" y="2397760"/>
-            <a:ext cx="11057839" cy="2245360"/>
+            <a:off x="566928" y="1298448"/>
+            <a:ext cx="11057839" cy="4864608"/>
           </a:xfrm>
           <a:prstGeom prst="rect">
             <a:avLst/>
@@ -4250,235 +4112,386 @@
           <a:p>
             <a:pPr algn="l">
               <a:lnSpc>
-                <a:spcPts val="2210"/>
-              </a:lnSpc>
-              <a:spcBef>
-                <a:spcPts val="0"/>
-              </a:spcBef>
-              <a:spcAft>
-                <a:spcPts val="0"/>
-              </a:spcAft>
-            </a:pPr>
-            <a:r>
-              <a:rPr sz="1700" b="0" i="0">
-                <a:solidFill>
-                  <a:srgbClr val="12395B"/>
-                </a:solidFill>
-                <a:latin typeface="Consolas"/>
-                <a:ea typeface="Consolas"/>
-              </a:rPr>
-              <a:t> </a:t>
-            </a:r>
-          </a:p>
-          <a:p>
-            <a:pPr algn="l">
-              <a:lnSpc>
-                <a:spcPts val="2210"/>
-              </a:lnSpc>
-              <a:spcBef>
-                <a:spcPts val="0"/>
-              </a:spcBef>
-              <a:spcAft>
-                <a:spcPts val="0"/>
-              </a:spcAft>
-            </a:pPr>
-            <a:r>
-              <a:rPr sz="1700" b="0" i="0">
-                <a:solidFill>
-                  <a:srgbClr val="12395B"/>
-                </a:solidFill>
-                <a:latin typeface="Consolas"/>
-                <a:ea typeface="Consolas"/>
-              </a:rPr>
-              <a:t>                 fib(5)</a:t>
-            </a:r>
-          </a:p>
-          <a:p>
-            <a:pPr algn="l">
-              <a:lnSpc>
-                <a:spcPts val="2210"/>
-              </a:lnSpc>
-              <a:spcBef>
-                <a:spcPts val="0"/>
-              </a:spcBef>
-              <a:spcAft>
-                <a:spcPts val="0"/>
-              </a:spcAft>
-            </a:pPr>
-            <a:r>
-              <a:rPr sz="1700" b="0" i="0">
-                <a:solidFill>
-                  <a:srgbClr val="12395B"/>
-                </a:solidFill>
-                <a:latin typeface="Consolas"/>
-                <a:ea typeface="Consolas"/>
-              </a:rPr>
-              <a:t>            /            \</a:t>
-            </a:r>
-          </a:p>
-          <a:p>
-            <a:pPr algn="l">
-              <a:lnSpc>
-                <a:spcPts val="2210"/>
-              </a:lnSpc>
-              <a:spcBef>
-                <a:spcPts val="0"/>
-              </a:spcBef>
-              <a:spcAft>
-                <a:spcPts val="0"/>
-              </a:spcAft>
-            </a:pPr>
-            <a:r>
-              <a:rPr sz="1700" b="0" i="0">
-                <a:solidFill>
-                  <a:srgbClr val="12395B"/>
-                </a:solidFill>
-                <a:latin typeface="Consolas"/>
-                <a:ea typeface="Consolas"/>
-              </a:rPr>
-              <a:t>        fib(4)          fib(3)      &lt;- fib(3) 算了两次</a:t>
-            </a:r>
-          </a:p>
-          <a:p>
-            <a:pPr algn="l">
-              <a:lnSpc>
-                <a:spcPts val="2210"/>
-              </a:lnSpc>
-              <a:spcBef>
-                <a:spcPts val="0"/>
-              </a:spcBef>
-              <a:spcAft>
-                <a:spcPts val="0"/>
-              </a:spcAft>
-            </a:pPr>
-            <a:r>
-              <a:rPr sz="1700" b="0" i="0">
-                <a:solidFill>
-                  <a:srgbClr val="12395B"/>
-                </a:solidFill>
-                <a:latin typeface="Consolas"/>
-                <a:ea typeface="Consolas"/>
-              </a:rPr>
-              <a:t>      /      \         /     \</a:t>
-            </a:r>
-          </a:p>
-          <a:p>
-            <a:pPr algn="l">
-              <a:lnSpc>
-                <a:spcPts val="2210"/>
-              </a:lnSpc>
-              <a:spcBef>
-                <a:spcPts val="0"/>
-              </a:spcBef>
-              <a:spcAft>
-                <a:spcPts val="0"/>
-              </a:spcAft>
-            </a:pPr>
-            <a:r>
-              <a:rPr sz="1700" b="0" i="0">
-                <a:solidFill>
-                  <a:srgbClr val="12395B"/>
-                </a:solidFill>
-                <a:latin typeface="Consolas"/>
-                <a:ea typeface="Consolas"/>
-              </a:rPr>
-              <a:t>   fib(3)  fib(2)   fib(2) fib(1)   &lt;- fib(2) 算了三次</a:t>
-            </a:r>
-          </a:p>
-          <a:p>
-            <a:pPr algn="l">
-              <a:lnSpc>
-                <a:spcPts val="2210"/>
-              </a:lnSpc>
-              <a:spcBef>
-                <a:spcPts val="0"/>
-              </a:spcBef>
-              <a:spcAft>
-                <a:spcPts val="0"/>
-              </a:spcAft>
-            </a:pPr>
-            <a:r>
-              <a:rPr sz="1700" b="0" i="0">
-                <a:solidFill>
-                  <a:srgbClr val="12395B"/>
-                </a:solidFill>
-                <a:latin typeface="Consolas"/>
-                <a:ea typeface="Consolas"/>
-              </a:rPr>
-              <a:t>   /    \</a:t>
-            </a:r>
-          </a:p>
-          <a:p>
-            <a:pPr algn="l">
-              <a:lnSpc>
-                <a:spcPts val="2210"/>
-              </a:lnSpc>
-              <a:spcBef>
-                <a:spcPts val="0"/>
-              </a:spcBef>
-              <a:spcAft>
-                <a:spcPts val="0"/>
-              </a:spcAft>
-            </a:pPr>
-            <a:r>
-              <a:rPr sz="1700" b="0" i="0">
-                <a:solidFill>
-                  <a:srgbClr val="12395B"/>
-                </a:solidFill>
-                <a:latin typeface="Consolas"/>
-                <a:ea typeface="Consolas"/>
-              </a:rPr>
-              <a:t>fib(2) fib(1)</a:t>
-            </a:r>
-          </a:p>
-        </p:txBody>
-      </p:sp>
-      <p:sp>
-        <p:nvSpPr>
-          <p:cNvPr id="5" name="TextBox 4"/>
-          <p:cNvSpPr txBox="1"/>
-          <p:nvPr/>
-        </p:nvSpPr>
-        <p:spPr>
-          <a:xfrm>
-            <a:off x="566928" y="5888736"/>
-            <a:ext cx="11057839" cy="329184"/>
-          </a:xfrm>
-          <a:prstGeom prst="rect">
-            <a:avLst/>
-          </a:prstGeom>
-          <a:noFill/>
-        </p:spPr>
-        <p:txBody>
-          <a:bodyPr wrap="square" lIns="0" rIns="0" tIns="0" bIns="0">
-            <a:noAutofit/>
-          </a:bodyPr>
-          <a:lstStyle/>
-          <a:p>
-            <a:pPr algn="l">
-              <a:spcBef>
-                <a:spcPts val="0"/>
-              </a:spcBef>
-              <a:spcAft>
-                <a:spcPts val="0"/>
-              </a:spcAft>
-            </a:pPr>
-            <a:r>
-              <a:rPr sz="1300" b="0" i="0">
-                <a:solidFill>
-                  <a:srgbClr val="6B7582"/>
+                <a:spcPct val="132000"/>
+              </a:lnSpc>
+              <a:spcBef>
+                <a:spcPts val="0"/>
+              </a:spcBef>
+              <a:spcAft>
+                <a:spcPts val="1240"/>
+              </a:spcAft>
+            </a:pPr>
+            <a:r>
+              <a:rPr sz="2000" b="0" i="0">
+                <a:solidFill>
+                  <a:srgbClr val="242A33"/>
                 </a:solidFill>
                 <a:latin typeface="Segoe UI"/>
                 <a:ea typeface="微软雅黑"/>
               </a:rPr>
-              <a:t>同一个子问题被重复计算无数次 —— 这就是"重叠子问题"</a:t>
-            </a:r>
-          </a:p>
-        </p:txBody>
-      </p:sp>
-      <p:sp>
-        <p:nvSpPr>
-          <p:cNvPr id="6" name="TextBox 5"/>
+              <a:t>•  调用链中间夹了一层 C 实现的东西，就会掉进墙二：</a:t>
+            </a:r>
+          </a:p>
+          <a:p>
+            <a:pPr algn="l">
+              <a:lnSpc>
+                <a:spcPct val="132000"/>
+              </a:lnSpc>
+              <a:spcBef>
+                <a:spcPts val="0"/>
+              </a:spcBef>
+              <a:spcAft>
+                <a:spcPts val="1240"/>
+              </a:spcAft>
+            </a:pPr>
+            <a:r>
+              <a:rPr sz="2000" b="0" i="0">
+                <a:solidFill>
+                  <a:srgbClr val="242A33"/>
+                </a:solidFill>
+                <a:latin typeface="Segoe UI"/>
+                <a:ea typeface="微软雅黑"/>
+              </a:rPr>
+              <a:t>•  </a:t>
+            </a:r>
+            <a:r>
+              <a:rPr sz="1879" b="1" i="0">
+                <a:solidFill>
+                  <a:srgbClr val="12395B"/>
+                </a:solidFill>
+                <a:latin typeface="Consolas"/>
+                <a:ea typeface="Consolas"/>
+              </a:rPr>
+              <a:t>@lru_cache</a:t>
+            </a:r>
+            <a:r>
+              <a:rPr sz="2000" b="1" i="0">
+                <a:solidFill>
+                  <a:srgbClr val="12395B"/>
+                </a:solidFill>
+                <a:latin typeface="Segoe UI"/>
+                <a:ea typeface="微软雅黑"/>
+              </a:rPr>
+              <a:t> / </a:t>
+            </a:r>
+            <a:r>
+              <a:rPr sz="1879" b="1" i="0">
+                <a:solidFill>
+                  <a:srgbClr val="12395B"/>
+                </a:solidFill>
+                <a:latin typeface="Consolas"/>
+                <a:ea typeface="Consolas"/>
+              </a:rPr>
+              <a:t>@cache</a:t>
+            </a:r>
+            <a:r>
+              <a:rPr sz="2000" b="1" i="0">
+                <a:solidFill>
+                  <a:srgbClr val="12395B"/>
+                </a:solidFill>
+                <a:latin typeface="Segoe UI"/>
+                <a:ea typeface="微软雅黑"/>
+              </a:rPr>
+              <a:t> 的记忆化搜索</a:t>
+            </a:r>
+            <a:r>
+              <a:rPr sz="2000" b="0" i="0">
+                <a:solidFill>
+                  <a:srgbClr val="242A33"/>
+                </a:solidFill>
+                <a:latin typeface="Segoe UI"/>
+                <a:ea typeface="微软雅黑"/>
+              </a:rPr>
+              <a:t> —— 本周就在教，也是最常踩的</a:t>
+            </a:r>
+          </a:p>
+          <a:p>
+            <a:pPr algn="l">
+              <a:lnSpc>
+                <a:spcPct val="132000"/>
+              </a:lnSpc>
+              <a:spcBef>
+                <a:spcPts val="0"/>
+              </a:spcBef>
+              <a:spcAft>
+                <a:spcPts val="1240"/>
+              </a:spcAft>
+            </a:pPr>
+            <a:r>
+              <a:rPr sz="2000" b="0" i="0">
+                <a:solidFill>
+                  <a:srgbClr val="242A33"/>
+                </a:solidFill>
+                <a:latin typeface="Segoe UI"/>
+                <a:ea typeface="微软雅黑"/>
+              </a:rPr>
+              <a:t>•  </a:t>
+            </a:r>
+            <a:r>
+              <a:rPr sz="1879" b="0" i="0">
+                <a:solidFill>
+                  <a:srgbClr val="242A33"/>
+                </a:solidFill>
+                <a:latin typeface="Consolas"/>
+                <a:ea typeface="Consolas"/>
+              </a:rPr>
+              <a:t>repr()</a:t>
+            </a:r>
+            <a:r>
+              <a:rPr sz="2000" b="0" i="0">
+                <a:solidFill>
+                  <a:srgbClr val="242A33"/>
+                </a:solidFill>
+                <a:latin typeface="Segoe UI"/>
+                <a:ea typeface="微软雅黑"/>
+              </a:rPr>
+              <a:t> / </a:t>
+            </a:r>
+            <a:r>
+              <a:rPr sz="1879" b="0" i="0">
+                <a:solidFill>
+                  <a:srgbClr val="242A33"/>
+                </a:solidFill>
+                <a:latin typeface="Consolas"/>
+                <a:ea typeface="Consolas"/>
+              </a:rPr>
+              <a:t>print()</a:t>
+            </a:r>
+            <a:r>
+              <a:rPr sz="2000" b="0" i="0">
+                <a:solidFill>
+                  <a:srgbClr val="242A33"/>
+                </a:solidFill>
+                <a:latin typeface="Segoe UI"/>
+                <a:ea typeface="微软雅黑"/>
+              </a:rPr>
+              <a:t> 一个深度嵌套的列表；</a:t>
+            </a:r>
+            <a:r>
+              <a:rPr sz="1879" b="0" i="0">
+                <a:solidFill>
+                  <a:srgbClr val="242A33"/>
+                </a:solidFill>
+                <a:latin typeface="Consolas"/>
+                <a:ea typeface="Consolas"/>
+              </a:rPr>
+              <a:t>sorted(key=...)</a:t>
+            </a:r>
+            <a:r>
+              <a:rPr sz="2000" b="0" i="0">
+                <a:solidFill>
+                  <a:srgbClr val="242A33"/>
+                </a:solidFill>
+                <a:latin typeface="Segoe UI"/>
+                <a:ea typeface="微软雅黑"/>
+              </a:rPr>
+              <a:t> 里调用递归函数</a:t>
+            </a:r>
+          </a:p>
+          <a:p>
+            <a:pPr algn="l">
+              <a:lnSpc>
+                <a:spcPct val="132000"/>
+              </a:lnSpc>
+              <a:spcBef>
+                <a:spcPts val="0"/>
+              </a:spcBef>
+              <a:spcAft>
+                <a:spcPts val="1240"/>
+              </a:spcAft>
+            </a:pPr>
+            <a:r>
+              <a:rPr sz="2000" b="0" i="0">
+                <a:solidFill>
+                  <a:srgbClr val="242A33"/>
+                </a:solidFill>
+                <a:latin typeface="Segoe UI"/>
+                <a:ea typeface="微软雅黑"/>
+              </a:rPr>
+              <a:t>•  </a:t>
+            </a:r>
+            <a:r>
+              <a:rPr sz="1879" b="0" i="0">
+                <a:solidFill>
+                  <a:srgbClr val="242A33"/>
+                </a:solidFill>
+                <a:latin typeface="Consolas"/>
+                <a:ea typeface="Consolas"/>
+              </a:rPr>
+              <a:t>re</a:t>
+            </a:r>
+            <a:r>
+              <a:rPr sz="2000" b="0" i="0">
+                <a:solidFill>
+                  <a:srgbClr val="242A33"/>
+                </a:solidFill>
+                <a:latin typeface="Segoe UI"/>
+                <a:ea typeface="微软雅黑"/>
+              </a:rPr>
+              <a:t> 的回溯匹配、</a:t>
+            </a:r>
+            <a:r>
+              <a:rPr sz="1879" b="0" i="0">
+                <a:solidFill>
+                  <a:srgbClr val="242A33"/>
+                </a:solidFill>
+                <a:latin typeface="Consolas"/>
+                <a:ea typeface="Consolas"/>
+              </a:rPr>
+              <a:t>copy.deepcopy</a:t>
+            </a:r>
+            <a:r>
+              <a:rPr sz="2000" b="0" i="0">
+                <a:solidFill>
+                  <a:srgbClr val="242A33"/>
+                </a:solidFill>
+                <a:latin typeface="Segoe UI"/>
+                <a:ea typeface="微软雅黑"/>
+              </a:rPr>
+              <a:t>、</a:t>
+            </a:r>
+            <a:r>
+              <a:rPr sz="1879" b="0" i="0">
+                <a:solidFill>
+                  <a:srgbClr val="242A33"/>
+                </a:solidFill>
+                <a:latin typeface="Consolas"/>
+                <a:ea typeface="Consolas"/>
+              </a:rPr>
+              <a:t>json.dumps</a:t>
+            </a:r>
+            <a:r>
+              <a:rPr sz="2000" b="0" i="0">
+                <a:solidFill>
+                  <a:srgbClr val="242A33"/>
+                </a:solidFill>
+                <a:latin typeface="Segoe UI"/>
+                <a:ea typeface="微软雅黑"/>
+              </a:rPr>
+              <a:t>、</a:t>
+            </a:r>
+            <a:r>
+              <a:rPr sz="1879" b="0" i="0">
+                <a:solidFill>
+                  <a:srgbClr val="242A33"/>
+                </a:solidFill>
+                <a:latin typeface="Consolas"/>
+                <a:ea typeface="Consolas"/>
+              </a:rPr>
+              <a:t>pickle.dumps</a:t>
+            </a:r>
+          </a:p>
+          <a:p>
+            <a:pPr algn="l">
+              <a:lnSpc>
+                <a:spcPct val="132000"/>
+              </a:lnSpc>
+              <a:spcBef>
+                <a:spcPts val="0"/>
+              </a:spcBef>
+              <a:spcAft>
+                <a:spcPts val="1240"/>
+              </a:spcAft>
+            </a:pPr>
+            <a:r>
+              <a:rPr sz="2000" b="0" i="0">
+                <a:solidFill>
+                  <a:srgbClr val="242A33"/>
+                </a:solidFill>
+                <a:latin typeface="Segoe UI"/>
+                <a:ea typeface="微软雅黑"/>
+              </a:rPr>
+              <a:t>•  </a:t>
+            </a:r>
+            <a:r>
+              <a:rPr sz="1879" b="1" i="0">
+                <a:solidFill>
+                  <a:srgbClr val="12395B"/>
+                </a:solidFill>
+                <a:latin typeface="Consolas"/>
+                <a:ea typeface="Consolas"/>
+              </a:rPr>
+              <a:t>threading.stack_size</a:t>
+            </a:r>
+            <a:r>
+              <a:rPr sz="2000" b="1" i="0">
+                <a:solidFill>
+                  <a:srgbClr val="12395B"/>
+                </a:solidFill>
+                <a:latin typeface="Segoe UI"/>
+                <a:ea typeface="微软雅黑"/>
+              </a:rPr>
+              <a:t> 加大的是新线程的 C 栈</a:t>
+            </a:r>
+            <a:r>
+              <a:rPr sz="2000" b="0" i="0">
+                <a:solidFill>
+                  <a:srgbClr val="242A33"/>
+                </a:solidFill>
+                <a:latin typeface="Segoe UI"/>
+                <a:ea typeface="微软雅黑"/>
+              </a:rPr>
+              <a:t>，也就是往后推墙二：≤3.10 确实有效；3.11+ 对纯递归没必要；对穿过 C 的递归</a:t>
+            </a:r>
+            <a:r>
+              <a:rPr sz="2000" b="1" i="0">
+                <a:solidFill>
+                  <a:srgbClr val="12395B"/>
+                </a:solidFill>
+                <a:latin typeface="Segoe UI"/>
+                <a:ea typeface="微软雅黑"/>
+              </a:rPr>
+              <a:t>没用</a:t>
+            </a:r>
+          </a:p>
+          <a:p>
+            <a:pPr algn="l">
+              <a:lnSpc>
+                <a:spcPct val="132000"/>
+              </a:lnSpc>
+              <a:spcBef>
+                <a:spcPts val="0"/>
+              </a:spcBef>
+              <a:spcAft>
+                <a:spcPts val="1240"/>
+              </a:spcAft>
+            </a:pPr>
+            <a:r>
+              <a:rPr sz="2000" b="0" i="0">
+                <a:solidFill>
+                  <a:srgbClr val="242A33"/>
+                </a:solidFill>
+                <a:latin typeface="Segoe UI"/>
+                <a:ea typeface="微软雅黑"/>
+              </a:rPr>
+              <a:t>•  </a:t>
+            </a:r>
+            <a:r>
+              <a:rPr sz="2000" b="1" i="0">
+                <a:solidFill>
+                  <a:srgbClr val="12395B"/>
+                </a:solidFill>
+                <a:latin typeface="Segoe UI"/>
+                <a:ea typeface="微软雅黑"/>
+              </a:rPr>
+              <a:t>别把它当护身符</a:t>
+            </a:r>
+            <a:r>
+              <a:rPr sz="2000" b="0" i="0">
+                <a:solidFill>
+                  <a:srgbClr val="242A33"/>
+                </a:solidFill>
+                <a:latin typeface="Segoe UI"/>
+                <a:ea typeface="微软雅黑"/>
+              </a:rPr>
+              <a:t> —— 它能不能救你，取决于评测机的版本和你的递归形状，两件事你都控制不了</a:t>
+            </a:r>
+          </a:p>
+        </p:txBody>
+      </p:sp>
+      <p:sp>
+        <p:nvSpPr>
+          <p:cNvPr id="5" name="TextBox 4"/>
           <p:cNvSpPr txBox="1"/>
           <p:nvPr/>
         </p:nvSpPr>
@@ -4521,7 +4534,7 @@
       </p:sp>
       <p:sp>
         <p:nvSpPr>
-          <p:cNvPr id="7" name="TextBox 6"/>
+          <p:cNvPr id="6" name="TextBox 5"/>
           <p:cNvSpPr txBox="1"/>
           <p:nvPr/>
         </p:nvSpPr>
@@ -4557,7 +4570,7 @@
                 <a:latin typeface="Segoe UI"/>
                 <a:ea typeface="微软雅黑"/>
               </a:rPr>
-              <a:t>12</a:t>
+              <a:t>11</a:t>
             </a:r>
           </a:p>
         </p:txBody>
@@ -4570,7 +4583,7 @@
 </p:sld>
 </file>
 
-<file path=ppt/slides/slide13.xml><?xml version="1.0" encoding="utf-8"?>
+<file path=ppt/slides/slide12.xml><?xml version="1.0" encoding="utf-8"?>
 <p:sld xmlns:a="http://schemas.openxmlformats.org/drawingml/2006/main" xmlns:p="http://schemas.openxmlformats.org/presentationml/2006/main" xmlns:r="http://schemas.openxmlformats.org/officeDocument/2006/relationships">
   <p:cSld>
     <p:spTree>
@@ -4618,7 +4631,7 @@
                 <a:latin typeface="Segoe UI"/>
                 <a:ea typeface="微软雅黑"/>
               </a:rPr>
-              <a:t>三种修法</a:t>
+              <a:t>唯一与版本、评测机都无关的做法：显式栈</a:t>
             </a:r>
           </a:p>
         </p:txBody>
@@ -4737,40 +4750,40 @@
           <a:p>
             <a:pPr algn="l">
               <a:lnSpc>
-                <a:spcPts val="1311"/>
-              </a:lnSpc>
-              <a:spcBef>
-                <a:spcPts val="0"/>
-              </a:spcBef>
-              <a:spcAft>
-                <a:spcPts val="0"/>
-              </a:spcAft>
-            </a:pPr>
-            <a:r>
-              <a:rPr sz="1008" b="0" i="0">
-                <a:solidFill>
-                  <a:srgbClr val="242A33"/>
-                </a:solidFill>
-                <a:latin typeface="Consolas"/>
-                <a:ea typeface="Consolas"/>
-              </a:rPr>
-              <a:t>from functools import lru_cache</a:t>
-            </a:r>
-          </a:p>
-          <a:p>
-            <a:pPr algn="l">
-              <a:lnSpc>
-                <a:spcPts val="1311"/>
-              </a:lnSpc>
-              <a:spcBef>
-                <a:spcPts val="0"/>
-              </a:spcBef>
-              <a:spcAft>
-                <a:spcPts val="0"/>
-              </a:spcAft>
-            </a:pPr>
-            <a:r>
-              <a:rPr sz="1008" b="0" i="0">
+                <a:spcPts val="1561"/>
+              </a:lnSpc>
+              <a:spcBef>
+                <a:spcPts val="0"/>
+              </a:spcBef>
+              <a:spcAft>
+                <a:spcPts val="0"/>
+              </a:spcAft>
+            </a:pPr>
+            <a:r>
+              <a:rPr sz="1201" b="0" i="0">
+                <a:solidFill>
+                  <a:srgbClr val="242A33"/>
+                </a:solidFill>
+                <a:latin typeface="Consolas"/>
+                <a:ea typeface="Consolas"/>
+              </a:rPr>
+              <a:t>import sys</a:t>
+            </a:r>
+          </a:p>
+          <a:p>
+            <a:pPr algn="l">
+              <a:lnSpc>
+                <a:spcPts val="1561"/>
+              </a:lnSpc>
+              <a:spcBef>
+                <a:spcPts val="0"/>
+              </a:spcBef>
+              <a:spcAft>
+                <a:spcPts val="0"/>
+              </a:spcAft>
+            </a:pPr>
+            <a:r>
+              <a:rPr sz="1201" b="0" i="0">
                 <a:solidFill>
                   <a:srgbClr val="242A33"/>
                 </a:solidFill>
@@ -4783,17 +4796,17 @@
           <a:p>
             <a:pPr algn="l">
               <a:lnSpc>
-                <a:spcPts val="1311"/>
-              </a:lnSpc>
-              <a:spcBef>
-                <a:spcPts val="0"/>
-              </a:spcBef>
-              <a:spcAft>
-                <a:spcPts val="0"/>
-              </a:spcAft>
-            </a:pPr>
-            <a:r>
-              <a:rPr sz="1008" b="0" i="0">
+                <a:spcPts val="1561"/>
+              </a:lnSpc>
+              <a:spcBef>
+                <a:spcPts val="0"/>
+              </a:spcBef>
+              <a:spcAft>
+                <a:spcPts val="0"/>
+              </a:spcAft>
+            </a:pPr>
+            <a:r>
+              <a:rPr sz="1201" b="0" i="0">
                 <a:solidFill>
                   <a:srgbClr val="242A33"/>
                 </a:solidFill>
@@ -4806,86 +4819,63 @@
           <a:p>
             <a:pPr algn="l">
               <a:lnSpc>
-                <a:spcPts val="1311"/>
-              </a:lnSpc>
-              <a:spcBef>
-                <a:spcPts val="0"/>
-              </a:spcBef>
-              <a:spcAft>
-                <a:spcPts val="0"/>
-              </a:spcAft>
-            </a:pPr>
-            <a:r>
-              <a:rPr sz="1008" b="0" i="0">
-                <a:solidFill>
-                  <a:srgbClr val="242A33"/>
-                </a:solidFill>
-                <a:latin typeface="Consolas"/>
-                <a:ea typeface="Consolas"/>
-              </a:rPr>
-              <a:t>@lru_cache(maxsize=None)            # 修法一：记忆化，O(n)</a:t>
-            </a:r>
-          </a:p>
-          <a:p>
-            <a:pPr algn="l">
-              <a:lnSpc>
-                <a:spcPts val="1311"/>
-              </a:lnSpc>
-              <a:spcBef>
-                <a:spcPts val="0"/>
-              </a:spcBef>
-              <a:spcAft>
-                <a:spcPts val="0"/>
-              </a:spcAft>
-            </a:pPr>
-            <a:r>
-              <a:rPr sz="1008" b="0" i="0">
-                <a:solidFill>
-                  <a:srgbClr val="242A33"/>
-                </a:solidFill>
-                <a:latin typeface="Consolas"/>
-                <a:ea typeface="Consolas"/>
-              </a:rPr>
-              <a:t>def fib_memo(n):</a:t>
-            </a:r>
-          </a:p>
-          <a:p>
-            <a:pPr algn="l">
-              <a:lnSpc>
-                <a:spcPts val="1311"/>
-              </a:lnSpc>
-              <a:spcBef>
-                <a:spcPts val="0"/>
-              </a:spcBef>
-              <a:spcAft>
-                <a:spcPts val="0"/>
-              </a:spcAft>
-            </a:pPr>
-            <a:r>
-              <a:rPr sz="1008" b="0" i="0">
-                <a:solidFill>
-                  <a:srgbClr val="242A33"/>
-                </a:solidFill>
-                <a:latin typeface="Consolas"/>
-                <a:ea typeface="Consolas"/>
-              </a:rPr>
-              <a:t>    return 1 if n &lt;= 2 else fib_memo(n - 1) + fib_memo(n - 2)</a:t>
-            </a:r>
-          </a:p>
-          <a:p>
-            <a:pPr algn="l">
-              <a:lnSpc>
-                <a:spcPts val="1311"/>
-              </a:lnSpc>
-              <a:spcBef>
-                <a:spcPts val="0"/>
-              </a:spcBef>
-              <a:spcAft>
-                <a:spcPts val="0"/>
-              </a:spcAft>
-            </a:pPr>
-            <a:r>
-              <a:rPr sz="1008" b="0" i="0">
+                <a:spcPts val="1561"/>
+              </a:lnSpc>
+              <a:spcBef>
+                <a:spcPts val="0"/>
+              </a:spcBef>
+              <a:spcAft>
+                <a:spcPts val="0"/>
+              </a:spcAft>
+            </a:pPr>
+            <a:r>
+              <a:rPr sz="1201" b="0" i="0">
+                <a:solidFill>
+                  <a:srgbClr val="242A33"/>
+                </a:solidFill>
+                <a:latin typeface="Consolas"/>
+                <a:ea typeface="Consolas"/>
+              </a:rPr>
+              <a:t>def depth_rec(n):</a:t>
+            </a:r>
+          </a:p>
+          <a:p>
+            <a:pPr algn="l">
+              <a:lnSpc>
+                <a:spcPts val="1561"/>
+              </a:lnSpc>
+              <a:spcBef>
+                <a:spcPts val="0"/>
+              </a:spcBef>
+              <a:spcAft>
+                <a:spcPts val="0"/>
+              </a:spcAft>
+            </a:pPr>
+            <a:r>
+              <a:rPr sz="1201" b="0" i="0">
+                <a:solidFill>
+                  <a:srgbClr val="242A33"/>
+                </a:solidFill>
+                <a:latin typeface="Consolas"/>
+                <a:ea typeface="Consolas"/>
+              </a:rPr>
+              <a:t>    return 0 if n == 0 else 1 + depth_rec(n - 1)</a:t>
+            </a:r>
+          </a:p>
+          <a:p>
+            <a:pPr algn="l">
+              <a:lnSpc>
+                <a:spcPts val="1561"/>
+              </a:lnSpc>
+              <a:spcBef>
+                <a:spcPts val="0"/>
+              </a:spcBef>
+              <a:spcAft>
+                <a:spcPts val="0"/>
+              </a:spcAft>
+            </a:pPr>
+            <a:r>
+              <a:rPr sz="1201" b="0" i="0">
                 <a:solidFill>
                   <a:srgbClr val="242A33"/>
                 </a:solidFill>
@@ -4898,17 +4888,17 @@
           <a:p>
             <a:pPr algn="l">
               <a:lnSpc>
-                <a:spcPts val="1311"/>
-              </a:lnSpc>
-              <a:spcBef>
-                <a:spcPts val="0"/>
-              </a:spcBef>
-              <a:spcAft>
-                <a:spcPts val="0"/>
-              </a:spcAft>
-            </a:pPr>
-            <a:r>
-              <a:rPr sz="1008" b="0" i="0">
+                <a:spcPts val="1561"/>
+              </a:lnSpc>
+              <a:spcBef>
+                <a:spcPts val="0"/>
+              </a:spcBef>
+              <a:spcAft>
+                <a:spcPts val="0"/>
+              </a:spcAft>
+            </a:pPr>
+            <a:r>
+              <a:rPr sz="1201" b="0" i="0">
                 <a:solidFill>
                   <a:srgbClr val="242A33"/>
                 </a:solidFill>
@@ -4921,132 +4911,224 @@
           <a:p>
             <a:pPr algn="l">
               <a:lnSpc>
-                <a:spcPts val="1311"/>
-              </a:lnSpc>
-              <a:spcBef>
-                <a:spcPts val="0"/>
-              </a:spcBef>
-              <a:spcAft>
-                <a:spcPts val="0"/>
-              </a:spcAft>
-            </a:pPr>
-            <a:r>
-              <a:rPr sz="1008" b="0" i="0">
-                <a:solidFill>
-                  <a:srgbClr val="242A33"/>
-                </a:solidFill>
-                <a:latin typeface="Consolas"/>
-                <a:ea typeface="Consolas"/>
-              </a:rPr>
-              <a:t>def fib_iter(n):                    # 修法二：迭代递推，O(n)、O(1) 空间</a:t>
-            </a:r>
-          </a:p>
-          <a:p>
-            <a:pPr algn="l">
-              <a:lnSpc>
-                <a:spcPts val="1311"/>
-              </a:lnSpc>
-              <a:spcBef>
-                <a:spcPts val="0"/>
-              </a:spcBef>
-              <a:spcAft>
-                <a:spcPts val="0"/>
-              </a:spcAft>
-            </a:pPr>
-            <a:r>
-              <a:rPr sz="1008" b="0" i="0">
-                <a:solidFill>
-                  <a:srgbClr val="242A33"/>
-                </a:solidFill>
-                <a:latin typeface="Consolas"/>
-                <a:ea typeface="Consolas"/>
-              </a:rPr>
-              <a:t>    a, b = 1, 1</a:t>
-            </a:r>
-          </a:p>
-          <a:p>
-            <a:pPr algn="l">
-              <a:lnSpc>
-                <a:spcPts val="1311"/>
-              </a:lnSpc>
-              <a:spcBef>
-                <a:spcPts val="0"/>
-              </a:spcBef>
-              <a:spcAft>
-                <a:spcPts val="0"/>
-              </a:spcAft>
-            </a:pPr>
-            <a:r>
-              <a:rPr sz="1008" b="0" i="0">
-                <a:solidFill>
-                  <a:srgbClr val="242A33"/>
-                </a:solidFill>
-                <a:latin typeface="Consolas"/>
-                <a:ea typeface="Consolas"/>
-              </a:rPr>
-              <a:t>    for _ in range(n - 2):</a:t>
-            </a:r>
-          </a:p>
-          <a:p>
-            <a:pPr algn="l">
-              <a:lnSpc>
-                <a:spcPts val="1311"/>
-              </a:lnSpc>
-              <a:spcBef>
-                <a:spcPts val="0"/>
-              </a:spcBef>
-              <a:spcAft>
-                <a:spcPts val="0"/>
-              </a:spcAft>
-            </a:pPr>
-            <a:r>
-              <a:rPr sz="1008" b="0" i="0">
-                <a:solidFill>
-                  <a:srgbClr val="242A33"/>
-                </a:solidFill>
-                <a:latin typeface="Consolas"/>
-                <a:ea typeface="Consolas"/>
-              </a:rPr>
-              <a:t>        a, b = b, a + b</a:t>
-            </a:r>
-          </a:p>
-          <a:p>
-            <a:pPr algn="l">
-              <a:lnSpc>
-                <a:spcPts val="1311"/>
-              </a:lnSpc>
-              <a:spcBef>
-                <a:spcPts val="0"/>
-              </a:spcBef>
-              <a:spcAft>
-                <a:spcPts val="0"/>
-              </a:spcAft>
-            </a:pPr>
-            <a:r>
-              <a:rPr sz="1008" b="0" i="0">
-                <a:solidFill>
-                  <a:srgbClr val="242A33"/>
-                </a:solidFill>
-                <a:latin typeface="Consolas"/>
-                <a:ea typeface="Consolas"/>
-              </a:rPr>
-              <a:t>    return b if n &gt;= 2 else 1</a:t>
-            </a:r>
-          </a:p>
-          <a:p>
-            <a:pPr algn="l">
-              <a:lnSpc>
-                <a:spcPts val="1311"/>
-              </a:lnSpc>
-              <a:spcBef>
-                <a:spcPts val="0"/>
-              </a:spcBef>
-              <a:spcAft>
-                <a:spcPts val="0"/>
-              </a:spcAft>
-            </a:pPr>
-            <a:r>
-              <a:rPr sz="1008" b="0" i="0">
+                <a:spcPts val="1561"/>
+              </a:lnSpc>
+              <a:spcBef>
+                <a:spcPts val="0"/>
+              </a:spcBef>
+              <a:spcAft>
+                <a:spcPts val="0"/>
+              </a:spcAft>
+            </a:pPr>
+            <a:r>
+              <a:rPr sz="1201" b="0" i="0">
+                <a:solidFill>
+                  <a:srgbClr val="242A33"/>
+                </a:solidFill>
+                <a:latin typeface="Consolas"/>
+                <a:ea typeface="Consolas"/>
+              </a:rPr>
+              <a:t>def depth_iter(n):</a:t>
+            </a:r>
+          </a:p>
+          <a:p>
+            <a:pPr algn="l">
+              <a:lnSpc>
+                <a:spcPts val="1561"/>
+              </a:lnSpc>
+              <a:spcBef>
+                <a:spcPts val="0"/>
+              </a:spcBef>
+              <a:spcAft>
+                <a:spcPts val="0"/>
+              </a:spcAft>
+            </a:pPr>
+            <a:r>
+              <a:rPr sz="1201" b="0" i="0">
+                <a:solidFill>
+                  <a:srgbClr val="242A33"/>
+                </a:solidFill>
+                <a:latin typeface="Consolas"/>
+                <a:ea typeface="Consolas"/>
+              </a:rPr>
+              <a:t>    """同一件事的显式栈版本：深度只受内存限制"""</a:t>
+            </a:r>
+          </a:p>
+          <a:p>
+            <a:pPr algn="l">
+              <a:lnSpc>
+                <a:spcPts val="1561"/>
+              </a:lnSpc>
+              <a:spcBef>
+                <a:spcPts val="0"/>
+              </a:spcBef>
+              <a:spcAft>
+                <a:spcPts val="0"/>
+              </a:spcAft>
+            </a:pPr>
+            <a:r>
+              <a:rPr sz="1201" b="0" i="0">
+                <a:solidFill>
+                  <a:srgbClr val="242A33"/>
+                </a:solidFill>
+                <a:latin typeface="Consolas"/>
+                <a:ea typeface="Consolas"/>
+              </a:rPr>
+              <a:t>    total, stack = 0, [n]</a:t>
+            </a:r>
+          </a:p>
+          <a:p>
+            <a:pPr algn="l">
+              <a:lnSpc>
+                <a:spcPts val="1561"/>
+              </a:lnSpc>
+              <a:spcBef>
+                <a:spcPts val="0"/>
+              </a:spcBef>
+              <a:spcAft>
+                <a:spcPts val="0"/>
+              </a:spcAft>
+            </a:pPr>
+            <a:r>
+              <a:rPr sz="1201" b="0" i="0">
+                <a:solidFill>
+                  <a:srgbClr val="242A33"/>
+                </a:solidFill>
+                <a:latin typeface="Consolas"/>
+                <a:ea typeface="Consolas"/>
+              </a:rPr>
+              <a:t>    while stack:</a:t>
+            </a:r>
+          </a:p>
+          <a:p>
+            <a:pPr algn="l">
+              <a:lnSpc>
+                <a:spcPts val="1561"/>
+              </a:lnSpc>
+              <a:spcBef>
+                <a:spcPts val="0"/>
+              </a:spcBef>
+              <a:spcAft>
+                <a:spcPts val="0"/>
+              </a:spcAft>
+            </a:pPr>
+            <a:r>
+              <a:rPr sz="1201" b="0" i="0">
+                <a:solidFill>
+                  <a:srgbClr val="242A33"/>
+                </a:solidFill>
+                <a:latin typeface="Consolas"/>
+                <a:ea typeface="Consolas"/>
+              </a:rPr>
+              <a:t>        k = stack.pop()</a:t>
+            </a:r>
+          </a:p>
+          <a:p>
+            <a:pPr algn="l">
+              <a:lnSpc>
+                <a:spcPts val="1561"/>
+              </a:lnSpc>
+              <a:spcBef>
+                <a:spcPts val="0"/>
+              </a:spcBef>
+              <a:spcAft>
+                <a:spcPts val="0"/>
+              </a:spcAft>
+            </a:pPr>
+            <a:r>
+              <a:rPr sz="1201" b="0" i="0">
+                <a:solidFill>
+                  <a:srgbClr val="242A33"/>
+                </a:solidFill>
+                <a:latin typeface="Consolas"/>
+                <a:ea typeface="Consolas"/>
+              </a:rPr>
+              <a:t>        if k:</a:t>
+            </a:r>
+          </a:p>
+          <a:p>
+            <a:pPr algn="l">
+              <a:lnSpc>
+                <a:spcPts val="1561"/>
+              </a:lnSpc>
+              <a:spcBef>
+                <a:spcPts val="0"/>
+              </a:spcBef>
+              <a:spcAft>
+                <a:spcPts val="0"/>
+              </a:spcAft>
+            </a:pPr>
+            <a:r>
+              <a:rPr sz="1201" b="0" i="0">
+                <a:solidFill>
+                  <a:srgbClr val="242A33"/>
+                </a:solidFill>
+                <a:latin typeface="Consolas"/>
+                <a:ea typeface="Consolas"/>
+              </a:rPr>
+              <a:t>            total += 1</a:t>
+            </a:r>
+          </a:p>
+          <a:p>
+            <a:pPr algn="l">
+              <a:lnSpc>
+                <a:spcPts val="1561"/>
+              </a:lnSpc>
+              <a:spcBef>
+                <a:spcPts val="0"/>
+              </a:spcBef>
+              <a:spcAft>
+                <a:spcPts val="0"/>
+              </a:spcAft>
+            </a:pPr>
+            <a:r>
+              <a:rPr sz="1201" b="0" i="0">
+                <a:solidFill>
+                  <a:srgbClr val="242A33"/>
+                </a:solidFill>
+                <a:latin typeface="Consolas"/>
+                <a:ea typeface="Consolas"/>
+              </a:rPr>
+              <a:t>            stack.append(k - 1)</a:t>
+            </a:r>
+          </a:p>
+          <a:p>
+            <a:pPr algn="l">
+              <a:lnSpc>
+                <a:spcPts val="1561"/>
+              </a:lnSpc>
+              <a:spcBef>
+                <a:spcPts val="0"/>
+              </a:spcBef>
+              <a:spcAft>
+                <a:spcPts val="0"/>
+              </a:spcAft>
+            </a:pPr>
+            <a:r>
+              <a:rPr sz="1201" b="0" i="0">
+                <a:solidFill>
+                  <a:srgbClr val="242A33"/>
+                </a:solidFill>
+                <a:latin typeface="Consolas"/>
+                <a:ea typeface="Consolas"/>
+              </a:rPr>
+              <a:t>    return total</a:t>
+            </a:r>
+          </a:p>
+          <a:p>
+            <a:pPr algn="l">
+              <a:lnSpc>
+                <a:spcPts val="1561"/>
+              </a:lnSpc>
+              <a:spcBef>
+                <a:spcPts val="0"/>
+              </a:spcBef>
+              <a:spcAft>
+                <a:spcPts val="0"/>
+              </a:spcAft>
+            </a:pPr>
+            <a:r>
+              <a:rPr sz="1201" b="0" i="0">
                 <a:solidFill>
                   <a:srgbClr val="242A33"/>
                 </a:solidFill>
@@ -5059,17 +5141,17 @@
           <a:p>
             <a:pPr algn="l">
               <a:lnSpc>
-                <a:spcPts val="1311"/>
-              </a:lnSpc>
-              <a:spcBef>
-                <a:spcPts val="0"/>
-              </a:spcBef>
-              <a:spcAft>
-                <a:spcPts val="0"/>
-              </a:spcAft>
-            </a:pPr>
-            <a:r>
-              <a:rPr sz="1008" b="0" i="0">
+                <a:spcPts val="1561"/>
+              </a:lnSpc>
+              <a:spcBef>
+                <a:spcPts val="0"/>
+              </a:spcBef>
+              <a:spcAft>
+                <a:spcPts val="0"/>
+              </a:spcAft>
+            </a:pPr>
+            <a:r>
+              <a:rPr sz="1201" b="0" i="0">
                 <a:solidFill>
                   <a:srgbClr val="242A33"/>
                 </a:solidFill>
@@ -5082,231 +5164,70 @@
           <a:p>
             <a:pPr algn="l">
               <a:lnSpc>
-                <a:spcPts val="1311"/>
-              </a:lnSpc>
-              <a:spcBef>
-                <a:spcPts val="0"/>
-              </a:spcBef>
-              <a:spcAft>
-                <a:spcPts val="0"/>
-              </a:spcAft>
-            </a:pPr>
-            <a:r>
-              <a:rPr sz="1008" b="0" i="0">
-                <a:solidFill>
-                  <a:srgbClr val="242A33"/>
-                </a:solidFill>
-                <a:latin typeface="Consolas"/>
-                <a:ea typeface="Consolas"/>
-              </a:rPr>
-              <a:t>def fib_dp(n):                      # 修法三：自底向上填表</a:t>
-            </a:r>
-          </a:p>
-          <a:p>
-            <a:pPr algn="l">
-              <a:lnSpc>
-                <a:spcPts val="1311"/>
-              </a:lnSpc>
-              <a:spcBef>
-                <a:spcPts val="0"/>
-              </a:spcBef>
-              <a:spcAft>
-                <a:spcPts val="0"/>
-              </a:spcAft>
-            </a:pPr>
-            <a:r>
-              <a:rPr sz="1008" b="0" i="0">
-                <a:solidFill>
-                  <a:srgbClr val="242A33"/>
-                </a:solidFill>
-                <a:latin typeface="Consolas"/>
-                <a:ea typeface="Consolas"/>
-              </a:rPr>
-              <a:t>    if n &lt;= 2:</a:t>
-            </a:r>
-          </a:p>
-          <a:p>
-            <a:pPr algn="l">
-              <a:lnSpc>
-                <a:spcPts val="1311"/>
-              </a:lnSpc>
-              <a:spcBef>
-                <a:spcPts val="0"/>
-              </a:spcBef>
-              <a:spcAft>
-                <a:spcPts val="0"/>
-              </a:spcAft>
-            </a:pPr>
-            <a:r>
-              <a:rPr sz="1008" b="0" i="0">
-                <a:solidFill>
-                  <a:srgbClr val="242A33"/>
-                </a:solidFill>
-                <a:latin typeface="Consolas"/>
-                <a:ea typeface="Consolas"/>
-              </a:rPr>
-              <a:t>        return 1</a:t>
-            </a:r>
-          </a:p>
-          <a:p>
-            <a:pPr algn="l">
-              <a:lnSpc>
-                <a:spcPts val="1311"/>
-              </a:lnSpc>
-              <a:spcBef>
-                <a:spcPts val="0"/>
-              </a:spcBef>
-              <a:spcAft>
-                <a:spcPts val="0"/>
-              </a:spcAft>
-            </a:pPr>
-            <a:r>
-              <a:rPr sz="1008" b="0" i="0">
-                <a:solidFill>
-                  <a:srgbClr val="242A33"/>
-                </a:solidFill>
-                <a:latin typeface="Consolas"/>
-                <a:ea typeface="Consolas"/>
-              </a:rPr>
-              <a:t>    dp = [0] * (n + 1); dp[1] = dp[2] = 1</a:t>
-            </a:r>
-          </a:p>
-          <a:p>
-            <a:pPr algn="l">
-              <a:lnSpc>
-                <a:spcPts val="1311"/>
-              </a:lnSpc>
-              <a:spcBef>
-                <a:spcPts val="0"/>
-              </a:spcBef>
-              <a:spcAft>
-                <a:spcPts val="0"/>
-              </a:spcAft>
-            </a:pPr>
-            <a:r>
-              <a:rPr sz="1008" b="0" i="0">
-                <a:solidFill>
-                  <a:srgbClr val="242A33"/>
-                </a:solidFill>
-                <a:latin typeface="Consolas"/>
-                <a:ea typeface="Consolas"/>
-              </a:rPr>
-              <a:t>    for i in range(3, n + 1):</a:t>
-            </a:r>
-          </a:p>
-          <a:p>
-            <a:pPr algn="l">
-              <a:lnSpc>
-                <a:spcPts val="1311"/>
-              </a:lnSpc>
-              <a:spcBef>
-                <a:spcPts val="0"/>
-              </a:spcBef>
-              <a:spcAft>
-                <a:spcPts val="0"/>
-              </a:spcAft>
-            </a:pPr>
-            <a:r>
-              <a:rPr sz="1008" b="0" i="0">
-                <a:solidFill>
-                  <a:srgbClr val="242A33"/>
-                </a:solidFill>
-                <a:latin typeface="Consolas"/>
-                <a:ea typeface="Consolas"/>
-              </a:rPr>
-              <a:t>        dp[i] = dp[i - 1] + dp[i - 2]</a:t>
-            </a:r>
-          </a:p>
-          <a:p>
-            <a:pPr algn="l">
-              <a:lnSpc>
-                <a:spcPts val="1311"/>
-              </a:lnSpc>
-              <a:spcBef>
-                <a:spcPts val="0"/>
-              </a:spcBef>
-              <a:spcAft>
-                <a:spcPts val="0"/>
-              </a:spcAft>
-            </a:pPr>
-            <a:r>
-              <a:rPr sz="1008" b="0" i="0">
-                <a:solidFill>
-                  <a:srgbClr val="242A33"/>
-                </a:solidFill>
-                <a:latin typeface="Consolas"/>
-                <a:ea typeface="Consolas"/>
-              </a:rPr>
-              <a:t>    return dp[n]</a:t>
-            </a:r>
-          </a:p>
-          <a:p>
-            <a:pPr algn="l">
-              <a:lnSpc>
-                <a:spcPts val="1311"/>
-              </a:lnSpc>
-              <a:spcBef>
-                <a:spcPts val="0"/>
-              </a:spcBef>
-              <a:spcAft>
-                <a:spcPts val="0"/>
-              </a:spcAft>
-            </a:pPr>
-            <a:r>
-              <a:rPr sz="1008" b="0" i="0">
-                <a:solidFill>
-                  <a:srgbClr val="242A33"/>
-                </a:solidFill>
-                <a:latin typeface="Consolas"/>
-                <a:ea typeface="Consolas"/>
-              </a:rPr>
-              <a:t> </a:t>
-            </a:r>
-          </a:p>
-          <a:p>
-            <a:pPr algn="l">
-              <a:lnSpc>
-                <a:spcPts val="1311"/>
-              </a:lnSpc>
-              <a:spcBef>
-                <a:spcPts val="0"/>
-              </a:spcBef>
-              <a:spcAft>
-                <a:spcPts val="0"/>
-              </a:spcAft>
-            </a:pPr>
-            <a:r>
-              <a:rPr sz="1008" b="0" i="0">
-                <a:solidFill>
-                  <a:srgbClr val="242A33"/>
-                </a:solidFill>
-                <a:latin typeface="Consolas"/>
-                <a:ea typeface="Consolas"/>
-              </a:rPr>
-              <a:t> </a:t>
-            </a:r>
-          </a:p>
-          <a:p>
-            <a:pPr algn="l">
-              <a:lnSpc>
-                <a:spcPts val="1311"/>
-              </a:lnSpc>
-              <a:spcBef>
-                <a:spcPts val="0"/>
-              </a:spcBef>
-              <a:spcAft>
-                <a:spcPts val="0"/>
-              </a:spcAft>
-            </a:pPr>
-            <a:r>
-              <a:rPr sz="1008" b="0" i="0">
-                <a:solidFill>
-                  <a:srgbClr val="242A33"/>
-                </a:solidFill>
-                <a:latin typeface="Consolas"/>
-                <a:ea typeface="Consolas"/>
-              </a:rPr>
-              <a:t>print(fib_memo(50), fib_iter(50), fib_dp(50))   # 三者一致</a:t>
+                <a:spcPts val="1561"/>
+              </a:lnSpc>
+              <a:spcBef>
+                <a:spcPts val="0"/>
+              </a:spcBef>
+              <a:spcAft>
+                <a:spcPts val="0"/>
+              </a:spcAft>
+            </a:pPr>
+            <a:r>
+              <a:rPr sz="1201" b="0" i="0">
+                <a:solidFill>
+                  <a:srgbClr val="242A33"/>
+                </a:solidFill>
+                <a:latin typeface="Consolas"/>
+                <a:ea typeface="Consolas"/>
+              </a:rPr>
+              <a:t>sys.setrecursionlimit(1 &lt;&lt; 20)</a:t>
+            </a:r>
+          </a:p>
+          <a:p>
+            <a:pPr algn="l">
+              <a:lnSpc>
+                <a:spcPts val="1561"/>
+              </a:lnSpc>
+              <a:spcBef>
+                <a:spcPts val="0"/>
+              </a:spcBef>
+              <a:spcAft>
+                <a:spcPts val="0"/>
+              </a:spcAft>
+            </a:pPr>
+            <a:r>
+              <a:rPr sz="1201" b="0" i="0">
+                <a:solidFill>
+                  <a:srgbClr val="242A33"/>
+                </a:solidFill>
+                <a:latin typeface="Consolas"/>
+                <a:ea typeface="Consolas"/>
+              </a:rPr>
+              <a:t>print(depth_rec(3000), depth_iter(3000))     # 3000 3000  小深度上两者一致</a:t>
+            </a:r>
+          </a:p>
+          <a:p>
+            <a:pPr algn="l">
+              <a:lnSpc>
+                <a:spcPts val="1561"/>
+              </a:lnSpc>
+              <a:spcBef>
+                <a:spcPts val="0"/>
+              </a:spcBef>
+              <a:spcAft>
+                <a:spcPts val="0"/>
+              </a:spcAft>
+            </a:pPr>
+            <a:r>
+              <a:rPr sz="1201" b="0" i="0">
+                <a:solidFill>
+                  <a:srgbClr val="242A33"/>
+                </a:solidFill>
+                <a:latin typeface="Consolas"/>
+                <a:ea typeface="Consolas"/>
+              </a:rPr>
+              <a:t>print(depth_iter(10 ** 6))                   # 1000000    递归版到不了这里</a:t>
             </a:r>
           </a:p>
         </p:txBody>
@@ -5349,7 +5270,7 @@
                 <a:latin typeface="Segoe UI"/>
                 <a:ea typeface="微软雅黑"/>
               </a:rPr>
-              <a:t>lru_cache 是本课最划算的一行代码：一个装饰器把指数降成线性</a:t>
+              <a:t>深递归题的可靠解法只有一个：显式栈。另外两招都是「看运气」的补丁，而且失败方式恰恰最难诊断</a:t>
             </a:r>
           </a:p>
         </p:txBody>
@@ -5435,7 +5356,7 @@
                 <a:latin typeface="Segoe UI"/>
                 <a:ea typeface="微软雅黑"/>
               </a:rPr>
-              <a:t>13</a:t>
+              <a:t>12</a:t>
             </a:r>
           </a:p>
         </p:txBody>
@@ -5448,7 +5369,7 @@
 </p:sld>
 </file>
 
-<file path=ppt/slides/slide14.xml><?xml version="1.0" encoding="utf-8"?>
+<file path=ppt/slides/slide13.xml><?xml version="1.0" encoding="utf-8"?>
 <p:sld xmlns:a="http://schemas.openxmlformats.org/drawingml/2006/main" xmlns:p="http://schemas.openxmlformats.org/presentationml/2006/main" xmlns:r="http://schemas.openxmlformats.org/officeDocument/2006/relationships">
   <p:cSld>
     <p:spTree>
@@ -5496,7 +5417,7 @@
                 <a:latin typeface="Segoe UI"/>
                 <a:ea typeface="微软雅黑"/>
               </a:rPr>
-              <a:t>第一部：汉诺塔（04147）的三步</a:t>
+              <a:t>进程的虚拟地址空间</a:t>
             </a:r>
           </a:p>
         </p:txBody>
@@ -5554,7 +5475,7 @@
         <p:spPr>
           <a:xfrm>
             <a:off x="566928" y="1298448"/>
-            <a:ext cx="11057839" cy="4864608"/>
+            <a:ext cx="11057839" cy="4443984"/>
           </a:xfrm>
           <a:prstGeom prst="rect">
             <a:avLst/>
@@ -5569,160 +5490,419 @@
           <a:p>
             <a:pPr algn="l">
               <a:lnSpc>
-                <a:spcPct val="132000"/>
-              </a:lnSpc>
-              <a:spcBef>
-                <a:spcPts val="0"/>
-              </a:spcBef>
-              <a:spcAft>
-                <a:spcPts val="1240"/>
-              </a:spcAft>
-            </a:pPr>
-            <a:r>
-              <a:rPr sz="2000" b="0" i="0">
-                <a:solidFill>
-                  <a:srgbClr val="242A33"/>
+                <a:spcPts val="2187"/>
+              </a:lnSpc>
+              <a:spcBef>
+                <a:spcPts val="0"/>
+              </a:spcBef>
+              <a:spcAft>
+                <a:spcPts val="0"/>
+              </a:spcAft>
+            </a:pPr>
+            <a:r>
+              <a:rPr sz="1682" b="0" i="0">
+                <a:solidFill>
+                  <a:srgbClr val="12395B"/>
+                </a:solidFill>
+                <a:latin typeface="Consolas"/>
+                <a:ea typeface="Consolas"/>
+              </a:rPr>
+              <a:t> </a:t>
+            </a:r>
+          </a:p>
+          <a:p>
+            <a:pPr algn="l">
+              <a:lnSpc>
+                <a:spcPts val="2187"/>
+              </a:lnSpc>
+              <a:spcBef>
+                <a:spcPts val="0"/>
+              </a:spcBef>
+              <a:spcAft>
+                <a:spcPts val="0"/>
+              </a:spcAft>
+            </a:pPr>
+            <a:r>
+              <a:rPr sz="1682" b="0" i="0">
+                <a:solidFill>
+                  <a:srgbClr val="12395B"/>
+                </a:solidFill>
+                <a:latin typeface="Consolas"/>
+                <a:ea typeface="Consolas"/>
+              </a:rPr>
+              <a:t>   高地址</a:t>
+            </a:r>
+          </a:p>
+          <a:p>
+            <a:pPr algn="l">
+              <a:lnSpc>
+                <a:spcPts val="2187"/>
+              </a:lnSpc>
+              <a:spcBef>
+                <a:spcPts val="0"/>
+              </a:spcBef>
+              <a:spcAft>
+                <a:spcPts val="0"/>
+              </a:spcAft>
+            </a:pPr>
+            <a:r>
+              <a:rPr sz="1682" b="0" i="0">
+                <a:solidFill>
+                  <a:srgbClr val="12395B"/>
+                </a:solidFill>
+                <a:latin typeface="Consolas"/>
+                <a:ea typeface="Consolas"/>
+              </a:rPr>
+              <a:t>   +-------------------+</a:t>
+            </a:r>
+          </a:p>
+          <a:p>
+            <a:pPr algn="l">
+              <a:lnSpc>
+                <a:spcPts val="2187"/>
+              </a:lnSpc>
+              <a:spcBef>
+                <a:spcPts val="0"/>
+              </a:spcBef>
+              <a:spcAft>
+                <a:spcPts val="0"/>
+              </a:spcAft>
+            </a:pPr>
+            <a:r>
+              <a:rPr sz="1682" b="0" i="0">
+                <a:solidFill>
+                  <a:srgbClr val="12395B"/>
+                </a:solidFill>
+                <a:latin typeface="Consolas"/>
+                <a:ea typeface="Consolas"/>
+              </a:rPr>
+              <a:t>   |       内核区       |</a:t>
+            </a:r>
+          </a:p>
+          <a:p>
+            <a:pPr algn="l">
+              <a:lnSpc>
+                <a:spcPts val="2187"/>
+              </a:lnSpc>
+              <a:spcBef>
+                <a:spcPts val="0"/>
+              </a:spcBef>
+              <a:spcAft>
+                <a:spcPts val="0"/>
+              </a:spcAft>
+            </a:pPr>
+            <a:r>
+              <a:rPr sz="1682" b="0" i="0">
+                <a:solidFill>
+                  <a:srgbClr val="12395B"/>
+                </a:solidFill>
+                <a:latin typeface="Consolas"/>
+                <a:ea typeface="Consolas"/>
+              </a:rPr>
+              <a:t>   +-------------------+</a:t>
+            </a:r>
+          </a:p>
+          <a:p>
+            <a:pPr algn="l">
+              <a:lnSpc>
+                <a:spcPts val="2187"/>
+              </a:lnSpc>
+              <a:spcBef>
+                <a:spcPts val="0"/>
+              </a:spcBef>
+              <a:spcAft>
+                <a:spcPts val="0"/>
+              </a:spcAft>
+            </a:pPr>
+            <a:r>
+              <a:rPr sz="1682" b="0" i="0">
+                <a:solidFill>
+                  <a:srgbClr val="12395B"/>
+                </a:solidFill>
+                <a:latin typeface="Consolas"/>
+                <a:ea typeface="Consolas"/>
+              </a:rPr>
+              <a:t>   |       栈 Stack     |  &lt;- 函数调用帧，向下增长，通常 8 MB</a:t>
+            </a:r>
+          </a:p>
+          <a:p>
+            <a:pPr algn="l">
+              <a:lnSpc>
+                <a:spcPts val="2187"/>
+              </a:lnSpc>
+              <a:spcBef>
+                <a:spcPts val="0"/>
+              </a:spcBef>
+              <a:spcAft>
+                <a:spcPts val="0"/>
+              </a:spcAft>
+            </a:pPr>
+            <a:r>
+              <a:rPr sz="1682" b="0" i="0">
+                <a:solidFill>
+                  <a:srgbClr val="12395B"/>
+                </a:solidFill>
+                <a:latin typeface="Consolas"/>
+                <a:ea typeface="Consolas"/>
+              </a:rPr>
+              <a:t>   |         v          |</a:t>
+            </a:r>
+          </a:p>
+          <a:p>
+            <a:pPr algn="l">
+              <a:lnSpc>
+                <a:spcPts val="2187"/>
+              </a:lnSpc>
+              <a:spcBef>
+                <a:spcPts val="0"/>
+              </a:spcBef>
+              <a:spcAft>
+                <a:spcPts val="0"/>
+              </a:spcAft>
+            </a:pPr>
+            <a:r>
+              <a:rPr sz="1682" b="0" i="0">
+                <a:solidFill>
+                  <a:srgbClr val="12395B"/>
+                </a:solidFill>
+                <a:latin typeface="Consolas"/>
+                <a:ea typeface="Consolas"/>
+              </a:rPr>
+              <a:t>   |                    |</a:t>
+            </a:r>
+          </a:p>
+          <a:p>
+            <a:pPr algn="l">
+              <a:lnSpc>
+                <a:spcPts val="2187"/>
+              </a:lnSpc>
+              <a:spcBef>
+                <a:spcPts val="0"/>
+              </a:spcBef>
+              <a:spcAft>
+                <a:spcPts val="0"/>
+              </a:spcAft>
+            </a:pPr>
+            <a:r>
+              <a:rPr sz="1682" b="0" i="0">
+                <a:solidFill>
+                  <a:srgbClr val="12395B"/>
+                </a:solidFill>
+                <a:latin typeface="Consolas"/>
+                <a:ea typeface="Consolas"/>
+              </a:rPr>
+              <a:t>   |         ^          |</a:t>
+            </a:r>
+          </a:p>
+          <a:p>
+            <a:pPr algn="l">
+              <a:lnSpc>
+                <a:spcPts val="2187"/>
+              </a:lnSpc>
+              <a:spcBef>
+                <a:spcPts val="0"/>
+              </a:spcBef>
+              <a:spcAft>
+                <a:spcPts val="0"/>
+              </a:spcAft>
+            </a:pPr>
+            <a:r>
+              <a:rPr sz="1682" b="0" i="0">
+                <a:solidFill>
+                  <a:srgbClr val="12395B"/>
+                </a:solidFill>
+                <a:latin typeface="Consolas"/>
+                <a:ea typeface="Consolas"/>
+              </a:rPr>
+              <a:t>   |       堆 Heap      |  &lt;- 动态分配的对象，向上增长</a:t>
+            </a:r>
+          </a:p>
+          <a:p>
+            <a:pPr algn="l">
+              <a:lnSpc>
+                <a:spcPts val="2187"/>
+              </a:lnSpc>
+              <a:spcBef>
+                <a:spcPts val="0"/>
+              </a:spcBef>
+              <a:spcAft>
+                <a:spcPts val="0"/>
+              </a:spcAft>
+            </a:pPr>
+            <a:r>
+              <a:rPr sz="1682" b="0" i="0">
+                <a:solidFill>
+                  <a:srgbClr val="12395B"/>
+                </a:solidFill>
+                <a:latin typeface="Consolas"/>
+                <a:ea typeface="Consolas"/>
+              </a:rPr>
+              <a:t>   +-------------------+</a:t>
+            </a:r>
+          </a:p>
+          <a:p>
+            <a:pPr algn="l">
+              <a:lnSpc>
+                <a:spcPts val="2187"/>
+              </a:lnSpc>
+              <a:spcBef>
+                <a:spcPts val="0"/>
+              </a:spcBef>
+              <a:spcAft>
+                <a:spcPts val="0"/>
+              </a:spcAft>
+            </a:pPr>
+            <a:r>
+              <a:rPr sz="1682" b="0" i="0">
+                <a:solidFill>
+                  <a:srgbClr val="12395B"/>
+                </a:solidFill>
+                <a:latin typeface="Consolas"/>
+                <a:ea typeface="Consolas"/>
+              </a:rPr>
+              <a:t>   |   全局 / 静态数据   |</a:t>
+            </a:r>
+          </a:p>
+          <a:p>
+            <a:pPr algn="l">
+              <a:lnSpc>
+                <a:spcPts val="2187"/>
+              </a:lnSpc>
+              <a:spcBef>
+                <a:spcPts val="0"/>
+              </a:spcBef>
+              <a:spcAft>
+                <a:spcPts val="0"/>
+              </a:spcAft>
+            </a:pPr>
+            <a:r>
+              <a:rPr sz="1682" b="0" i="0">
+                <a:solidFill>
+                  <a:srgbClr val="12395B"/>
+                </a:solidFill>
+                <a:latin typeface="Consolas"/>
+                <a:ea typeface="Consolas"/>
+              </a:rPr>
+              <a:t>   +-------------------+</a:t>
+            </a:r>
+          </a:p>
+          <a:p>
+            <a:pPr algn="l">
+              <a:lnSpc>
+                <a:spcPts val="2187"/>
+              </a:lnSpc>
+              <a:spcBef>
+                <a:spcPts val="0"/>
+              </a:spcBef>
+              <a:spcAft>
+                <a:spcPts val="0"/>
+              </a:spcAft>
+            </a:pPr>
+            <a:r>
+              <a:rPr sz="1682" b="0" i="0">
+                <a:solidFill>
+                  <a:srgbClr val="12395B"/>
+                </a:solidFill>
+                <a:latin typeface="Consolas"/>
+                <a:ea typeface="Consolas"/>
+              </a:rPr>
+              <a:t>   |     代码段 Text     |</a:t>
+            </a:r>
+          </a:p>
+          <a:p>
+            <a:pPr algn="l">
+              <a:lnSpc>
+                <a:spcPts val="2187"/>
+              </a:lnSpc>
+              <a:spcBef>
+                <a:spcPts val="0"/>
+              </a:spcBef>
+              <a:spcAft>
+                <a:spcPts val="0"/>
+              </a:spcAft>
+            </a:pPr>
+            <a:r>
+              <a:rPr sz="1682" b="0" i="0">
+                <a:solidFill>
+                  <a:srgbClr val="12395B"/>
+                </a:solidFill>
+                <a:latin typeface="Consolas"/>
+                <a:ea typeface="Consolas"/>
+              </a:rPr>
+              <a:t>   +-------------------+</a:t>
+            </a:r>
+          </a:p>
+          <a:p>
+            <a:pPr algn="l">
+              <a:lnSpc>
+                <a:spcPts val="2187"/>
+              </a:lnSpc>
+              <a:spcBef>
+                <a:spcPts val="0"/>
+              </a:spcBef>
+              <a:spcAft>
+                <a:spcPts val="0"/>
+              </a:spcAft>
+            </a:pPr>
+            <a:r>
+              <a:rPr sz="1682" b="0" i="0">
+                <a:solidFill>
+                  <a:srgbClr val="12395B"/>
+                </a:solidFill>
+                <a:latin typeface="Consolas"/>
+                <a:ea typeface="Consolas"/>
+              </a:rPr>
+              <a:t>   低地址</a:t>
+            </a:r>
+          </a:p>
+        </p:txBody>
+      </p:sp>
+      <p:sp>
+        <p:nvSpPr>
+          <p:cNvPr id="5" name="TextBox 4"/>
+          <p:cNvSpPr txBox="1"/>
+          <p:nvPr/>
+        </p:nvSpPr>
+        <p:spPr>
+          <a:xfrm>
+            <a:off x="566928" y="5888736"/>
+            <a:ext cx="11057839" cy="329184"/>
+          </a:xfrm>
+          <a:prstGeom prst="rect">
+            <a:avLst/>
+          </a:prstGeom>
+          <a:noFill/>
+        </p:spPr>
+        <p:txBody>
+          <a:bodyPr wrap="square" lIns="0" rIns="0" tIns="0" bIns="0">
+            <a:noAutofit/>
+          </a:bodyPr>
+          <a:lstStyle/>
+          <a:p>
+            <a:pPr algn="l">
+              <a:spcBef>
+                <a:spcPts val="0"/>
+              </a:spcBef>
+              <a:spcAft>
+                <a:spcPts val="0"/>
+              </a:spcAft>
+            </a:pPr>
+            <a:r>
+              <a:rPr sz="1300" b="0" i="0">
+                <a:solidFill>
+                  <a:srgbClr val="6B7582"/>
                 </a:solidFill>
                 <a:latin typeface="Segoe UI"/>
                 <a:ea typeface="微软雅黑"/>
               </a:rPr>
-              <a:t>•  把上面 </a:t>
-            </a:r>
-            <a:r>
-              <a:rPr sz="2000" b="1" i="0">
-                <a:solidFill>
-                  <a:srgbClr val="12395B"/>
-                </a:solidFill>
-                <a:latin typeface="Segoe UI"/>
-                <a:ea typeface="微软雅黑"/>
-              </a:rPr>
-              <a:t>n−1 个盘从 A 移到 B</a:t>
-            </a:r>
-            <a:r>
-              <a:rPr sz="2000" b="0" i="0">
-                <a:solidFill>
-                  <a:srgbClr val="242A33"/>
-                </a:solidFill>
-                <a:latin typeface="Segoe UI"/>
-                <a:ea typeface="微软雅黑"/>
-              </a:rPr>
-              <a:t>（借助 C）</a:t>
-            </a:r>
-          </a:p>
-          <a:p>
-            <a:pPr algn="l">
-              <a:lnSpc>
-                <a:spcPct val="132000"/>
-              </a:lnSpc>
-              <a:spcBef>
-                <a:spcPts val="0"/>
-              </a:spcBef>
-              <a:spcAft>
-                <a:spcPts val="1240"/>
-              </a:spcAft>
-            </a:pPr>
-            <a:r>
-              <a:rPr sz="2000" b="0" i="0">
-                <a:solidFill>
-                  <a:srgbClr val="242A33"/>
-                </a:solidFill>
-                <a:latin typeface="Segoe UI"/>
-                <a:ea typeface="微软雅黑"/>
-              </a:rPr>
-              <a:t>•  把</a:t>
-            </a:r>
-            <a:r>
-              <a:rPr sz="2000" b="1" i="0">
-                <a:solidFill>
-                  <a:srgbClr val="12395B"/>
-                </a:solidFill>
-                <a:latin typeface="Segoe UI"/>
-                <a:ea typeface="微软雅黑"/>
-              </a:rPr>
-              <a:t>最大的第 n 个盘从 A 移到 C</a:t>
-            </a:r>
-          </a:p>
-          <a:p>
-            <a:pPr algn="l">
-              <a:lnSpc>
-                <a:spcPct val="132000"/>
-              </a:lnSpc>
-              <a:spcBef>
-                <a:spcPts val="0"/>
-              </a:spcBef>
-              <a:spcAft>
-                <a:spcPts val="1240"/>
-              </a:spcAft>
-            </a:pPr>
-            <a:r>
-              <a:rPr sz="2000" b="0" i="0">
-                <a:solidFill>
-                  <a:srgbClr val="242A33"/>
-                </a:solidFill>
-                <a:latin typeface="Segoe UI"/>
-                <a:ea typeface="微软雅黑"/>
-              </a:rPr>
-              <a:t>•  把 </a:t>
-            </a:r>
-            <a:r>
-              <a:rPr sz="2000" b="1" i="0">
-                <a:solidFill>
-                  <a:srgbClr val="12395B"/>
-                </a:solidFill>
-                <a:latin typeface="Segoe UI"/>
-                <a:ea typeface="微软雅黑"/>
-              </a:rPr>
-              <a:t>n−1 个盘从 B 移到 C</a:t>
-            </a:r>
-            <a:r>
-              <a:rPr sz="2000" b="0" i="0">
-                <a:solidFill>
-                  <a:srgbClr val="242A33"/>
-                </a:solidFill>
-                <a:latin typeface="Segoe UI"/>
-                <a:ea typeface="微软雅黑"/>
-              </a:rPr>
-              <a:t>（借助 A）</a:t>
-            </a:r>
-          </a:p>
-          <a:p>
-            <a:pPr algn="l">
-              <a:lnSpc>
-                <a:spcPct val="132000"/>
-              </a:lnSpc>
-              <a:spcBef>
-                <a:spcPts val="0"/>
-              </a:spcBef>
-              <a:spcAft>
-                <a:spcPts val="1240"/>
-              </a:spcAft>
-            </a:pPr>
-            <a:r>
-              <a:rPr sz="2000" b="0" i="0">
-                <a:solidFill>
-                  <a:srgbClr val="242A33"/>
-                </a:solidFill>
-                <a:latin typeface="Segoe UI"/>
-                <a:ea typeface="微软雅黑"/>
-              </a:rPr>
-              <a:t>•  移动次数：T(n) = 2T(n−1) + 1，T(1) = 1 ⟹ </a:t>
-            </a:r>
-            <a:r>
-              <a:rPr sz="2000" b="1" i="0">
-                <a:solidFill>
-                  <a:srgbClr val="12395B"/>
-                </a:solidFill>
-                <a:latin typeface="Segoe UI"/>
-                <a:ea typeface="微软雅黑"/>
-              </a:rPr>
-              <a:t>T(n) = 2ⁿ − 1</a:t>
-            </a:r>
-          </a:p>
-        </p:txBody>
-      </p:sp>
-      <p:sp>
-        <p:nvSpPr>
-          <p:cNvPr id="5" name="TextBox 4"/>
+              <a:t>"虚拟"：每个进程都以为自己独占整个地址空间，由 OS + MMU 映射到物理内存</a:t>
+            </a:r>
+          </a:p>
+        </p:txBody>
+      </p:sp>
+      <p:sp>
+        <p:nvSpPr>
+          <p:cNvPr id="6" name="TextBox 5"/>
           <p:cNvSpPr txBox="1"/>
           <p:nvPr/>
         </p:nvSpPr>
@@ -5765,7 +5945,7 @@
       </p:sp>
       <p:sp>
         <p:nvSpPr>
-          <p:cNvPr id="6" name="TextBox 5"/>
+          <p:cNvPr id="7" name="TextBox 6"/>
           <p:cNvSpPr txBox="1"/>
           <p:nvPr/>
         </p:nvSpPr>
@@ -5801,7 +5981,176 @@
                 <a:latin typeface="Segoe UI"/>
                 <a:ea typeface="微软雅黑"/>
               </a:rPr>
-              <a:t>14</a:t>
+              <a:t>13</a:t>
+            </a:r>
+          </a:p>
+        </p:txBody>
+      </p:sp>
+    </p:spTree>
+  </p:cSld>
+  <p:clrMapOvr>
+    <a:masterClrMapping/>
+  </p:clrMapOvr>
+</p:sld>
+</file>
+
+<file path=ppt/slides/slide14.xml><?xml version="1.0" encoding="utf-8"?>
+<p:sld xmlns:a="http://schemas.openxmlformats.org/drawingml/2006/main" xmlns:p="http://schemas.openxmlformats.org/presentationml/2006/main" xmlns:r="http://schemas.openxmlformats.org/officeDocument/2006/relationships">
+  <p:cSld>
+    <p:spTree>
+      <p:nvGrpSpPr>
+        <p:cNvPr id="1" name=""/>
+        <p:cNvGrpSpPr/>
+        <p:nvPr/>
+      </p:nvGrpSpPr>
+      <p:grpSpPr/>
+      <p:sp>
+        <p:nvSpPr>
+          <p:cNvPr id="2" name="Rectangle 1"/>
+          <p:cNvSpPr/>
+          <p:nvPr/>
+        </p:nvSpPr>
+        <p:spPr>
+          <a:xfrm>
+            <a:off x="0" y="0"/>
+            <a:ext cx="12191695" cy="6858000"/>
+          </a:xfrm>
+          <a:prstGeom prst="rect">
+            <a:avLst/>
+          </a:prstGeom>
+          <a:solidFill>
+            <a:srgbClr val="F2F4F7"/>
+          </a:solidFill>
+          <a:ln>
+            <a:noFill/>
+          </a:ln>
+          <a:effectLst/>
+        </p:spPr>
+        <p:style>
+          <a:lnRef idx="1">
+            <a:schemeClr val="accent1"/>
+          </a:lnRef>
+          <a:fillRef idx="3">
+            <a:schemeClr val="accent1"/>
+          </a:fillRef>
+          <a:effectRef idx="2">
+            <a:schemeClr val="accent1"/>
+          </a:effectRef>
+          <a:fontRef idx="minor">
+            <a:schemeClr val="lt1"/>
+          </a:fontRef>
+        </p:style>
+        <p:txBody>
+          <a:bodyPr rtlCol="0" anchor="ctr"/>
+          <a:lstStyle/>
+          <a:p>
+            <a:pPr algn="ctr"/>
+          </a:p>
+        </p:txBody>
+      </p:sp>
+      <p:sp>
+        <p:nvSpPr>
+          <p:cNvPr id="3" name="Rectangle 2"/>
+          <p:cNvSpPr/>
+          <p:nvPr/>
+        </p:nvSpPr>
+        <p:spPr>
+          <a:xfrm>
+            <a:off x="0" y="2331720"/>
+            <a:ext cx="274320" cy="1737360"/>
+          </a:xfrm>
+          <a:prstGeom prst="rect">
+            <a:avLst/>
+          </a:prstGeom>
+          <a:solidFill>
+            <a:srgbClr val="E07B39"/>
+          </a:solidFill>
+          <a:ln>
+            <a:noFill/>
+          </a:ln>
+          <a:effectLst/>
+        </p:spPr>
+        <p:style>
+          <a:lnRef idx="1">
+            <a:schemeClr val="accent1"/>
+          </a:lnRef>
+          <a:fillRef idx="3">
+            <a:schemeClr val="accent1"/>
+          </a:fillRef>
+          <a:effectRef idx="2">
+            <a:schemeClr val="accent1"/>
+          </a:effectRef>
+          <a:fontRef idx="minor">
+            <a:schemeClr val="lt1"/>
+          </a:fontRef>
+        </p:style>
+        <p:txBody>
+          <a:bodyPr rtlCol="0" anchor="ctr"/>
+          <a:lstStyle/>
+          <a:p>
+            <a:pPr algn="ctr"/>
+          </a:p>
+        </p:txBody>
+      </p:sp>
+      <p:sp>
+        <p:nvSpPr>
+          <p:cNvPr id="4" name="TextBox 3"/>
+          <p:cNvSpPr txBox="1"/>
+          <p:nvPr/>
+        </p:nvSpPr>
+        <p:spPr>
+          <a:xfrm>
+            <a:off x="868680" y="2395728"/>
+            <a:ext cx="10424160" cy="1737360"/>
+          </a:xfrm>
+          <a:prstGeom prst="rect">
+            <a:avLst/>
+          </a:prstGeom>
+          <a:noFill/>
+        </p:spPr>
+        <p:txBody>
+          <a:bodyPr wrap="square" lIns="0" rIns="0" tIns="0" bIns="0">
+            <a:noAutofit/>
+          </a:bodyPr>
+          <a:lstStyle/>
+          <a:p>
+            <a:pPr algn="l">
+              <a:spcBef>
+                <a:spcPts val="0"/>
+              </a:spcBef>
+              <a:spcAft>
+                <a:spcPts val="800"/>
+              </a:spcAft>
+            </a:pPr>
+            <a:r>
+              <a:rPr sz="1500" b="1" i="0">
+                <a:solidFill>
+                  <a:srgbClr val="E07B39"/>
+                </a:solidFill>
+                <a:latin typeface="Segoe UI"/>
+                <a:ea typeface="微软雅黑"/>
+              </a:rPr>
+              <a:t>第 2 节</a:t>
+            </a:r>
+          </a:p>
+          <a:p>
+            <a:pPr algn="l">
+              <a:spcBef>
+                <a:spcPts val="0"/>
+              </a:spcBef>
+              <a:spcAft>
+                <a:spcPts val="800"/>
+              </a:spcAft>
+            </a:pPr>
+            <a:r>
+              <a:rPr sz="3400" b="1" i="0">
+                <a:solidFill>
+                  <a:srgbClr val="12395B"/>
+                </a:solidFill>
+                <a:latin typeface="Segoe UI"/>
+                <a:ea typeface="微软雅黑"/>
+              </a:rPr>
+              <a:t>递归三部曲</a:t>
             </a:r>
           </a:p>
         </p:txBody>
@@ -5815,6 +6164,1691 @@
 </file>
 
 <file path=ppt/slides/slide15.xml><?xml version="1.0" encoding="utf-8"?>
+<p:sld xmlns:a="http://schemas.openxmlformats.org/drawingml/2006/main" xmlns:p="http://schemas.openxmlformats.org/presentationml/2006/main" xmlns:r="http://schemas.openxmlformats.org/officeDocument/2006/relationships">
+  <p:cSld>
+    <p:spTree>
+      <p:nvGrpSpPr>
+        <p:cNvPr id="1" name=""/>
+        <p:cNvGrpSpPr/>
+        <p:nvPr/>
+      </p:nvGrpSpPr>
+      <p:grpSpPr/>
+      <p:sp>
+        <p:nvSpPr>
+          <p:cNvPr id="2" name="TextBox 1"/>
+          <p:cNvSpPr txBox="1"/>
+          <p:nvPr/>
+        </p:nvSpPr>
+        <p:spPr>
+          <a:xfrm>
+            <a:off x="566928" y="420624"/>
+            <a:ext cx="11057839" cy="548640"/>
+          </a:xfrm>
+          <a:prstGeom prst="rect">
+            <a:avLst/>
+          </a:prstGeom>
+          <a:noFill/>
+        </p:spPr>
+        <p:txBody>
+          <a:bodyPr wrap="square" lIns="0" rIns="0" tIns="0" bIns="0">
+            <a:noAutofit/>
+          </a:bodyPr>
+          <a:lstStyle/>
+          <a:p>
+            <a:pPr algn="l">
+              <a:spcBef>
+                <a:spcPts val="0"/>
+              </a:spcBef>
+              <a:spcAft>
+                <a:spcPts val="0"/>
+              </a:spcAft>
+            </a:pPr>
+            <a:r>
+              <a:rPr sz="2600" b="1" i="0">
+                <a:solidFill>
+                  <a:srgbClr val="12395B"/>
+                </a:solidFill>
+                <a:latin typeface="Segoe UI"/>
+                <a:ea typeface="微软雅黑"/>
+              </a:rPr>
+              <a:t>序曲：朴素斐波那契是 O(2^n)</a:t>
+            </a:r>
+          </a:p>
+        </p:txBody>
+      </p:sp>
+      <p:sp>
+        <p:nvSpPr>
+          <p:cNvPr id="3" name="Rectangle 2"/>
+          <p:cNvSpPr/>
+          <p:nvPr/>
+        </p:nvSpPr>
+        <p:spPr>
+          <a:xfrm>
+            <a:off x="566928" y="1060704"/>
+            <a:ext cx="960120" cy="40640"/>
+          </a:xfrm>
+          <a:prstGeom prst="rect">
+            <a:avLst/>
+          </a:prstGeom>
+          <a:solidFill>
+            <a:srgbClr val="E07B39"/>
+          </a:solidFill>
+          <a:ln>
+            <a:noFill/>
+          </a:ln>
+          <a:effectLst/>
+        </p:spPr>
+        <p:style>
+          <a:lnRef idx="1">
+            <a:schemeClr val="accent1"/>
+          </a:lnRef>
+          <a:fillRef idx="3">
+            <a:schemeClr val="accent1"/>
+          </a:fillRef>
+          <a:effectRef idx="2">
+            <a:schemeClr val="accent1"/>
+          </a:effectRef>
+          <a:fontRef idx="minor">
+            <a:schemeClr val="lt1"/>
+          </a:fontRef>
+        </p:style>
+        <p:txBody>
+          <a:bodyPr rtlCol="0" anchor="ctr"/>
+          <a:lstStyle/>
+          <a:p>
+            <a:pPr algn="ctr"/>
+          </a:p>
+        </p:txBody>
+      </p:sp>
+      <p:sp>
+        <p:nvSpPr>
+          <p:cNvPr id="4" name="TextBox 3"/>
+          <p:cNvSpPr txBox="1"/>
+          <p:nvPr/>
+        </p:nvSpPr>
+        <p:spPr>
+          <a:xfrm>
+            <a:off x="566928" y="2397760"/>
+            <a:ext cx="11057839" cy="2245360"/>
+          </a:xfrm>
+          <a:prstGeom prst="rect">
+            <a:avLst/>
+          </a:prstGeom>
+          <a:noFill/>
+        </p:spPr>
+        <p:txBody>
+          <a:bodyPr wrap="square" lIns="0" rIns="0" tIns="0" bIns="0">
+            <a:noAutofit/>
+          </a:bodyPr>
+          <a:lstStyle/>
+          <a:p>
+            <a:pPr algn="l">
+              <a:lnSpc>
+                <a:spcPts val="2210"/>
+              </a:lnSpc>
+              <a:spcBef>
+                <a:spcPts val="0"/>
+              </a:spcBef>
+              <a:spcAft>
+                <a:spcPts val="0"/>
+              </a:spcAft>
+            </a:pPr>
+            <a:r>
+              <a:rPr sz="1700" b="0" i="0">
+                <a:solidFill>
+                  <a:srgbClr val="12395B"/>
+                </a:solidFill>
+                <a:latin typeface="Consolas"/>
+                <a:ea typeface="Consolas"/>
+              </a:rPr>
+              <a:t> </a:t>
+            </a:r>
+          </a:p>
+          <a:p>
+            <a:pPr algn="l">
+              <a:lnSpc>
+                <a:spcPts val="2210"/>
+              </a:lnSpc>
+              <a:spcBef>
+                <a:spcPts val="0"/>
+              </a:spcBef>
+              <a:spcAft>
+                <a:spcPts val="0"/>
+              </a:spcAft>
+            </a:pPr>
+            <a:r>
+              <a:rPr sz="1700" b="0" i="0">
+                <a:solidFill>
+                  <a:srgbClr val="12395B"/>
+                </a:solidFill>
+                <a:latin typeface="Consolas"/>
+                <a:ea typeface="Consolas"/>
+              </a:rPr>
+              <a:t>                 fib(5)</a:t>
+            </a:r>
+          </a:p>
+          <a:p>
+            <a:pPr algn="l">
+              <a:lnSpc>
+                <a:spcPts val="2210"/>
+              </a:lnSpc>
+              <a:spcBef>
+                <a:spcPts val="0"/>
+              </a:spcBef>
+              <a:spcAft>
+                <a:spcPts val="0"/>
+              </a:spcAft>
+            </a:pPr>
+            <a:r>
+              <a:rPr sz="1700" b="0" i="0">
+                <a:solidFill>
+                  <a:srgbClr val="12395B"/>
+                </a:solidFill>
+                <a:latin typeface="Consolas"/>
+                <a:ea typeface="Consolas"/>
+              </a:rPr>
+              <a:t>            /            \</a:t>
+            </a:r>
+          </a:p>
+          <a:p>
+            <a:pPr algn="l">
+              <a:lnSpc>
+                <a:spcPts val="2210"/>
+              </a:lnSpc>
+              <a:spcBef>
+                <a:spcPts val="0"/>
+              </a:spcBef>
+              <a:spcAft>
+                <a:spcPts val="0"/>
+              </a:spcAft>
+            </a:pPr>
+            <a:r>
+              <a:rPr sz="1700" b="0" i="0">
+                <a:solidFill>
+                  <a:srgbClr val="12395B"/>
+                </a:solidFill>
+                <a:latin typeface="Consolas"/>
+                <a:ea typeface="Consolas"/>
+              </a:rPr>
+              <a:t>        fib(4)          fib(3)      &lt;- fib(3) 算了两次</a:t>
+            </a:r>
+          </a:p>
+          <a:p>
+            <a:pPr algn="l">
+              <a:lnSpc>
+                <a:spcPts val="2210"/>
+              </a:lnSpc>
+              <a:spcBef>
+                <a:spcPts val="0"/>
+              </a:spcBef>
+              <a:spcAft>
+                <a:spcPts val="0"/>
+              </a:spcAft>
+            </a:pPr>
+            <a:r>
+              <a:rPr sz="1700" b="0" i="0">
+                <a:solidFill>
+                  <a:srgbClr val="12395B"/>
+                </a:solidFill>
+                <a:latin typeface="Consolas"/>
+                <a:ea typeface="Consolas"/>
+              </a:rPr>
+              <a:t>      /      \         /     \</a:t>
+            </a:r>
+          </a:p>
+          <a:p>
+            <a:pPr algn="l">
+              <a:lnSpc>
+                <a:spcPts val="2210"/>
+              </a:lnSpc>
+              <a:spcBef>
+                <a:spcPts val="0"/>
+              </a:spcBef>
+              <a:spcAft>
+                <a:spcPts val="0"/>
+              </a:spcAft>
+            </a:pPr>
+            <a:r>
+              <a:rPr sz="1700" b="0" i="0">
+                <a:solidFill>
+                  <a:srgbClr val="12395B"/>
+                </a:solidFill>
+                <a:latin typeface="Consolas"/>
+                <a:ea typeface="Consolas"/>
+              </a:rPr>
+              <a:t>   fib(3)  fib(2)   fib(2) fib(1)   &lt;- fib(2) 算了三次</a:t>
+            </a:r>
+          </a:p>
+          <a:p>
+            <a:pPr algn="l">
+              <a:lnSpc>
+                <a:spcPts val="2210"/>
+              </a:lnSpc>
+              <a:spcBef>
+                <a:spcPts val="0"/>
+              </a:spcBef>
+              <a:spcAft>
+                <a:spcPts val="0"/>
+              </a:spcAft>
+            </a:pPr>
+            <a:r>
+              <a:rPr sz="1700" b="0" i="0">
+                <a:solidFill>
+                  <a:srgbClr val="12395B"/>
+                </a:solidFill>
+                <a:latin typeface="Consolas"/>
+                <a:ea typeface="Consolas"/>
+              </a:rPr>
+              <a:t>   /    \</a:t>
+            </a:r>
+          </a:p>
+          <a:p>
+            <a:pPr algn="l">
+              <a:lnSpc>
+                <a:spcPts val="2210"/>
+              </a:lnSpc>
+              <a:spcBef>
+                <a:spcPts val="0"/>
+              </a:spcBef>
+              <a:spcAft>
+                <a:spcPts val="0"/>
+              </a:spcAft>
+            </a:pPr>
+            <a:r>
+              <a:rPr sz="1700" b="0" i="0">
+                <a:solidFill>
+                  <a:srgbClr val="12395B"/>
+                </a:solidFill>
+                <a:latin typeface="Consolas"/>
+                <a:ea typeface="Consolas"/>
+              </a:rPr>
+              <a:t>fib(2) fib(1)</a:t>
+            </a:r>
+          </a:p>
+        </p:txBody>
+      </p:sp>
+      <p:sp>
+        <p:nvSpPr>
+          <p:cNvPr id="5" name="TextBox 4"/>
+          <p:cNvSpPr txBox="1"/>
+          <p:nvPr/>
+        </p:nvSpPr>
+        <p:spPr>
+          <a:xfrm>
+            <a:off x="566928" y="5888736"/>
+            <a:ext cx="11057839" cy="329184"/>
+          </a:xfrm>
+          <a:prstGeom prst="rect">
+            <a:avLst/>
+          </a:prstGeom>
+          <a:noFill/>
+        </p:spPr>
+        <p:txBody>
+          <a:bodyPr wrap="square" lIns="0" rIns="0" tIns="0" bIns="0">
+            <a:noAutofit/>
+          </a:bodyPr>
+          <a:lstStyle/>
+          <a:p>
+            <a:pPr algn="l">
+              <a:spcBef>
+                <a:spcPts val="0"/>
+              </a:spcBef>
+              <a:spcAft>
+                <a:spcPts val="0"/>
+              </a:spcAft>
+            </a:pPr>
+            <a:r>
+              <a:rPr sz="1300" b="0" i="0">
+                <a:solidFill>
+                  <a:srgbClr val="6B7582"/>
+                </a:solidFill>
+                <a:latin typeface="Segoe UI"/>
+                <a:ea typeface="微软雅黑"/>
+              </a:rPr>
+              <a:t>同一个子问题被重复计算无数次 —— 这就是"重叠子问题"</a:t>
+            </a:r>
+          </a:p>
+        </p:txBody>
+      </p:sp>
+      <p:sp>
+        <p:nvSpPr>
+          <p:cNvPr id="6" name="TextBox 5"/>
+          <p:cNvSpPr txBox="1"/>
+          <p:nvPr/>
+        </p:nvSpPr>
+        <p:spPr>
+          <a:xfrm>
+            <a:off x="566928" y="6327648"/>
+            <a:ext cx="8229600" cy="310896"/>
+          </a:xfrm>
+          <a:prstGeom prst="rect">
+            <a:avLst/>
+          </a:prstGeom>
+          <a:noFill/>
+        </p:spPr>
+        <p:txBody>
+          <a:bodyPr wrap="square" lIns="0" rIns="0" tIns="0" bIns="0">
+            <a:noAutofit/>
+          </a:bodyPr>
+          <a:lstStyle/>
+          <a:p>
+            <a:pPr algn="l">
+              <a:spcBef>
+                <a:spcPts val="0"/>
+              </a:spcBef>
+              <a:spcAft>
+                <a:spcPts val="0"/>
+              </a:spcAft>
+            </a:pPr>
+            <a:r>
+              <a:rPr sz="1000" b="0" i="0">
+                <a:solidFill>
+                  <a:srgbClr val="6B7582"/>
+                </a:solidFill>
+                <a:latin typeface="Segoe UI"/>
+                <a:ea typeface="微软雅黑"/>
+              </a:rPr>
+              <a:t>计算概论（B） · 第8周 · 闫宏飞 · 2026 Fall</a:t>
+            </a:r>
+          </a:p>
+        </p:txBody>
+      </p:sp>
+      <p:sp>
+        <p:nvSpPr>
+          <p:cNvPr id="7" name="TextBox 6"/>
+          <p:cNvSpPr txBox="1"/>
+          <p:nvPr/>
+        </p:nvSpPr>
+        <p:spPr>
+          <a:xfrm>
+            <a:off x="10710367" y="6327648"/>
+            <a:ext cx="914400" cy="310896"/>
+          </a:xfrm>
+          <a:prstGeom prst="rect">
+            <a:avLst/>
+          </a:prstGeom>
+          <a:noFill/>
+        </p:spPr>
+        <p:txBody>
+          <a:bodyPr wrap="square" lIns="0" rIns="0" tIns="0" bIns="0">
+            <a:noAutofit/>
+          </a:bodyPr>
+          <a:lstStyle/>
+          <a:p>
+            <a:pPr algn="r">
+              <a:spcBef>
+                <a:spcPts val="0"/>
+              </a:spcBef>
+              <a:spcAft>
+                <a:spcPts val="0"/>
+              </a:spcAft>
+            </a:pPr>
+            <a:r>
+              <a:rPr sz="1000" b="0" i="0">
+                <a:solidFill>
+                  <a:srgbClr val="6B7582"/>
+                </a:solidFill>
+                <a:latin typeface="Segoe UI"/>
+                <a:ea typeface="微软雅黑"/>
+              </a:rPr>
+              <a:t>15</a:t>
+            </a:r>
+          </a:p>
+        </p:txBody>
+      </p:sp>
+    </p:spTree>
+  </p:cSld>
+  <p:clrMapOvr>
+    <a:masterClrMapping/>
+  </p:clrMapOvr>
+</p:sld>
+</file>
+
+<file path=ppt/slides/slide16.xml><?xml version="1.0" encoding="utf-8"?>
+<p:sld xmlns:a="http://schemas.openxmlformats.org/drawingml/2006/main" xmlns:p="http://schemas.openxmlformats.org/presentationml/2006/main" xmlns:r="http://schemas.openxmlformats.org/officeDocument/2006/relationships">
+  <p:cSld>
+    <p:spTree>
+      <p:nvGrpSpPr>
+        <p:cNvPr id="1" name=""/>
+        <p:cNvGrpSpPr/>
+        <p:nvPr/>
+      </p:nvGrpSpPr>
+      <p:grpSpPr/>
+      <p:sp>
+        <p:nvSpPr>
+          <p:cNvPr id="2" name="TextBox 1"/>
+          <p:cNvSpPr txBox="1"/>
+          <p:nvPr/>
+        </p:nvSpPr>
+        <p:spPr>
+          <a:xfrm>
+            <a:off x="566928" y="420624"/>
+            <a:ext cx="11057839" cy="548640"/>
+          </a:xfrm>
+          <a:prstGeom prst="rect">
+            <a:avLst/>
+          </a:prstGeom>
+          <a:noFill/>
+        </p:spPr>
+        <p:txBody>
+          <a:bodyPr wrap="square" lIns="0" rIns="0" tIns="0" bIns="0">
+            <a:noAutofit/>
+          </a:bodyPr>
+          <a:lstStyle/>
+          <a:p>
+            <a:pPr algn="l">
+              <a:spcBef>
+                <a:spcPts val="0"/>
+              </a:spcBef>
+              <a:spcAft>
+                <a:spcPts val="0"/>
+              </a:spcAft>
+            </a:pPr>
+            <a:r>
+              <a:rPr sz="2600" b="1" i="0">
+                <a:solidFill>
+                  <a:srgbClr val="12395B"/>
+                </a:solidFill>
+                <a:latin typeface="Segoe UI"/>
+                <a:ea typeface="微软雅黑"/>
+              </a:rPr>
+              <a:t>三种修法</a:t>
+            </a:r>
+          </a:p>
+        </p:txBody>
+      </p:sp>
+      <p:sp>
+        <p:nvSpPr>
+          <p:cNvPr id="3" name="Rectangle 2"/>
+          <p:cNvSpPr/>
+          <p:nvPr/>
+        </p:nvSpPr>
+        <p:spPr>
+          <a:xfrm>
+            <a:off x="566928" y="1060704"/>
+            <a:ext cx="960120" cy="40640"/>
+          </a:xfrm>
+          <a:prstGeom prst="rect">
+            <a:avLst/>
+          </a:prstGeom>
+          <a:solidFill>
+            <a:srgbClr val="E07B39"/>
+          </a:solidFill>
+          <a:ln>
+            <a:noFill/>
+          </a:ln>
+          <a:effectLst/>
+        </p:spPr>
+        <p:style>
+          <a:lnRef idx="1">
+            <a:schemeClr val="accent1"/>
+          </a:lnRef>
+          <a:fillRef idx="3">
+            <a:schemeClr val="accent1"/>
+          </a:fillRef>
+          <a:effectRef idx="2">
+            <a:schemeClr val="accent1"/>
+          </a:effectRef>
+          <a:fontRef idx="minor">
+            <a:schemeClr val="lt1"/>
+          </a:fontRef>
+        </p:style>
+        <p:txBody>
+          <a:bodyPr rtlCol="0" anchor="ctr"/>
+          <a:lstStyle/>
+          <a:p>
+            <a:pPr algn="ctr"/>
+          </a:p>
+        </p:txBody>
+      </p:sp>
+      <p:sp>
+        <p:nvSpPr>
+          <p:cNvPr id="4" name="Rectangle 3"/>
+          <p:cNvSpPr/>
+          <p:nvPr/>
+        </p:nvSpPr>
+        <p:spPr>
+          <a:xfrm>
+            <a:off x="566928" y="1298448"/>
+            <a:ext cx="11057839" cy="4443984"/>
+          </a:xfrm>
+          <a:prstGeom prst="rect">
+            <a:avLst/>
+          </a:prstGeom>
+          <a:solidFill>
+            <a:srgbClr val="F6F7F9"/>
+          </a:solidFill>
+          <a:ln w="9525">
+            <a:solidFill>
+              <a:srgbClr val="D6DCE4"/>
+            </a:solidFill>
+          </a:ln>
+          <a:effectLst/>
+        </p:spPr>
+        <p:style>
+          <a:lnRef idx="1">
+            <a:schemeClr val="accent1"/>
+          </a:lnRef>
+          <a:fillRef idx="3">
+            <a:schemeClr val="accent1"/>
+          </a:fillRef>
+          <a:effectRef idx="2">
+            <a:schemeClr val="accent1"/>
+          </a:effectRef>
+          <a:fontRef idx="minor">
+            <a:schemeClr val="lt1"/>
+          </a:fontRef>
+        </p:style>
+        <p:txBody>
+          <a:bodyPr rtlCol="0" anchor="ctr"/>
+          <a:lstStyle/>
+          <a:p>
+            <a:pPr algn="ctr"/>
+          </a:p>
+        </p:txBody>
+      </p:sp>
+      <p:sp>
+        <p:nvSpPr>
+          <p:cNvPr id="5" name="TextBox 4"/>
+          <p:cNvSpPr txBox="1"/>
+          <p:nvPr/>
+        </p:nvSpPr>
+        <p:spPr>
+          <a:xfrm>
+            <a:off x="822960" y="1399032"/>
+            <a:ext cx="10545775" cy="4242816"/>
+          </a:xfrm>
+          <a:prstGeom prst="rect">
+            <a:avLst/>
+          </a:prstGeom>
+          <a:noFill/>
+        </p:spPr>
+        <p:txBody>
+          <a:bodyPr wrap="square" lIns="0" rIns="0" tIns="0" bIns="0">
+            <a:noAutofit/>
+          </a:bodyPr>
+          <a:lstStyle/>
+          <a:p>
+            <a:pPr algn="l">
+              <a:lnSpc>
+                <a:spcPts val="1311"/>
+              </a:lnSpc>
+              <a:spcBef>
+                <a:spcPts val="0"/>
+              </a:spcBef>
+              <a:spcAft>
+                <a:spcPts val="0"/>
+              </a:spcAft>
+            </a:pPr>
+            <a:r>
+              <a:rPr sz="1008" b="0" i="0">
+                <a:solidFill>
+                  <a:srgbClr val="242A33"/>
+                </a:solidFill>
+                <a:latin typeface="Consolas"/>
+                <a:ea typeface="Consolas"/>
+              </a:rPr>
+              <a:t>from functools import lru_cache</a:t>
+            </a:r>
+          </a:p>
+          <a:p>
+            <a:pPr algn="l">
+              <a:lnSpc>
+                <a:spcPts val="1311"/>
+              </a:lnSpc>
+              <a:spcBef>
+                <a:spcPts val="0"/>
+              </a:spcBef>
+              <a:spcAft>
+                <a:spcPts val="0"/>
+              </a:spcAft>
+            </a:pPr>
+            <a:r>
+              <a:rPr sz="1008" b="0" i="0">
+                <a:solidFill>
+                  <a:srgbClr val="242A33"/>
+                </a:solidFill>
+                <a:latin typeface="Consolas"/>
+                <a:ea typeface="Consolas"/>
+              </a:rPr>
+              <a:t> </a:t>
+            </a:r>
+          </a:p>
+          <a:p>
+            <a:pPr algn="l">
+              <a:lnSpc>
+                <a:spcPts val="1311"/>
+              </a:lnSpc>
+              <a:spcBef>
+                <a:spcPts val="0"/>
+              </a:spcBef>
+              <a:spcAft>
+                <a:spcPts val="0"/>
+              </a:spcAft>
+            </a:pPr>
+            <a:r>
+              <a:rPr sz="1008" b="0" i="0">
+                <a:solidFill>
+                  <a:srgbClr val="242A33"/>
+                </a:solidFill>
+                <a:latin typeface="Consolas"/>
+                <a:ea typeface="Consolas"/>
+              </a:rPr>
+              <a:t> </a:t>
+            </a:r>
+          </a:p>
+          <a:p>
+            <a:pPr algn="l">
+              <a:lnSpc>
+                <a:spcPts val="1311"/>
+              </a:lnSpc>
+              <a:spcBef>
+                <a:spcPts val="0"/>
+              </a:spcBef>
+              <a:spcAft>
+                <a:spcPts val="0"/>
+              </a:spcAft>
+            </a:pPr>
+            <a:r>
+              <a:rPr sz="1008" b="0" i="0">
+                <a:solidFill>
+                  <a:srgbClr val="242A33"/>
+                </a:solidFill>
+                <a:latin typeface="Consolas"/>
+                <a:ea typeface="Consolas"/>
+              </a:rPr>
+              <a:t>@lru_cache(maxsize=None)            # 修法一：记忆化，O(n)</a:t>
+            </a:r>
+          </a:p>
+          <a:p>
+            <a:pPr algn="l">
+              <a:lnSpc>
+                <a:spcPts val="1311"/>
+              </a:lnSpc>
+              <a:spcBef>
+                <a:spcPts val="0"/>
+              </a:spcBef>
+              <a:spcAft>
+                <a:spcPts val="0"/>
+              </a:spcAft>
+            </a:pPr>
+            <a:r>
+              <a:rPr sz="1008" b="0" i="0">
+                <a:solidFill>
+                  <a:srgbClr val="242A33"/>
+                </a:solidFill>
+                <a:latin typeface="Consolas"/>
+                <a:ea typeface="Consolas"/>
+              </a:rPr>
+              <a:t>def fib_memo(n):</a:t>
+            </a:r>
+          </a:p>
+          <a:p>
+            <a:pPr algn="l">
+              <a:lnSpc>
+                <a:spcPts val="1311"/>
+              </a:lnSpc>
+              <a:spcBef>
+                <a:spcPts val="0"/>
+              </a:spcBef>
+              <a:spcAft>
+                <a:spcPts val="0"/>
+              </a:spcAft>
+            </a:pPr>
+            <a:r>
+              <a:rPr sz="1008" b="0" i="0">
+                <a:solidFill>
+                  <a:srgbClr val="242A33"/>
+                </a:solidFill>
+                <a:latin typeface="Consolas"/>
+                <a:ea typeface="Consolas"/>
+              </a:rPr>
+              <a:t>    return 1 if n &lt;= 2 else fib_memo(n - 1) + fib_memo(n - 2)</a:t>
+            </a:r>
+          </a:p>
+          <a:p>
+            <a:pPr algn="l">
+              <a:lnSpc>
+                <a:spcPts val="1311"/>
+              </a:lnSpc>
+              <a:spcBef>
+                <a:spcPts val="0"/>
+              </a:spcBef>
+              <a:spcAft>
+                <a:spcPts val="0"/>
+              </a:spcAft>
+            </a:pPr>
+            <a:r>
+              <a:rPr sz="1008" b="0" i="0">
+                <a:solidFill>
+                  <a:srgbClr val="242A33"/>
+                </a:solidFill>
+                <a:latin typeface="Consolas"/>
+                <a:ea typeface="Consolas"/>
+              </a:rPr>
+              <a:t> </a:t>
+            </a:r>
+          </a:p>
+          <a:p>
+            <a:pPr algn="l">
+              <a:lnSpc>
+                <a:spcPts val="1311"/>
+              </a:lnSpc>
+              <a:spcBef>
+                <a:spcPts val="0"/>
+              </a:spcBef>
+              <a:spcAft>
+                <a:spcPts val="0"/>
+              </a:spcAft>
+            </a:pPr>
+            <a:r>
+              <a:rPr sz="1008" b="0" i="0">
+                <a:solidFill>
+                  <a:srgbClr val="242A33"/>
+                </a:solidFill>
+                <a:latin typeface="Consolas"/>
+                <a:ea typeface="Consolas"/>
+              </a:rPr>
+              <a:t> </a:t>
+            </a:r>
+          </a:p>
+          <a:p>
+            <a:pPr algn="l">
+              <a:lnSpc>
+                <a:spcPts val="1311"/>
+              </a:lnSpc>
+              <a:spcBef>
+                <a:spcPts val="0"/>
+              </a:spcBef>
+              <a:spcAft>
+                <a:spcPts val="0"/>
+              </a:spcAft>
+            </a:pPr>
+            <a:r>
+              <a:rPr sz="1008" b="0" i="0">
+                <a:solidFill>
+                  <a:srgbClr val="242A33"/>
+                </a:solidFill>
+                <a:latin typeface="Consolas"/>
+                <a:ea typeface="Consolas"/>
+              </a:rPr>
+              <a:t>def fib_iter(n):                    # 修法二：迭代递推，O(n)、O(1) 空间</a:t>
+            </a:r>
+          </a:p>
+          <a:p>
+            <a:pPr algn="l">
+              <a:lnSpc>
+                <a:spcPts val="1311"/>
+              </a:lnSpc>
+              <a:spcBef>
+                <a:spcPts val="0"/>
+              </a:spcBef>
+              <a:spcAft>
+                <a:spcPts val="0"/>
+              </a:spcAft>
+            </a:pPr>
+            <a:r>
+              <a:rPr sz="1008" b="0" i="0">
+                <a:solidFill>
+                  <a:srgbClr val="242A33"/>
+                </a:solidFill>
+                <a:latin typeface="Consolas"/>
+                <a:ea typeface="Consolas"/>
+              </a:rPr>
+              <a:t>    a, b = 1, 1</a:t>
+            </a:r>
+          </a:p>
+          <a:p>
+            <a:pPr algn="l">
+              <a:lnSpc>
+                <a:spcPts val="1311"/>
+              </a:lnSpc>
+              <a:spcBef>
+                <a:spcPts val="0"/>
+              </a:spcBef>
+              <a:spcAft>
+                <a:spcPts val="0"/>
+              </a:spcAft>
+            </a:pPr>
+            <a:r>
+              <a:rPr sz="1008" b="0" i="0">
+                <a:solidFill>
+                  <a:srgbClr val="242A33"/>
+                </a:solidFill>
+                <a:latin typeface="Consolas"/>
+                <a:ea typeface="Consolas"/>
+              </a:rPr>
+              <a:t>    for _ in range(n - 2):</a:t>
+            </a:r>
+          </a:p>
+          <a:p>
+            <a:pPr algn="l">
+              <a:lnSpc>
+                <a:spcPts val="1311"/>
+              </a:lnSpc>
+              <a:spcBef>
+                <a:spcPts val="0"/>
+              </a:spcBef>
+              <a:spcAft>
+                <a:spcPts val="0"/>
+              </a:spcAft>
+            </a:pPr>
+            <a:r>
+              <a:rPr sz="1008" b="0" i="0">
+                <a:solidFill>
+                  <a:srgbClr val="242A33"/>
+                </a:solidFill>
+                <a:latin typeface="Consolas"/>
+                <a:ea typeface="Consolas"/>
+              </a:rPr>
+              <a:t>        a, b = b, a + b</a:t>
+            </a:r>
+          </a:p>
+          <a:p>
+            <a:pPr algn="l">
+              <a:lnSpc>
+                <a:spcPts val="1311"/>
+              </a:lnSpc>
+              <a:spcBef>
+                <a:spcPts val="0"/>
+              </a:spcBef>
+              <a:spcAft>
+                <a:spcPts val="0"/>
+              </a:spcAft>
+            </a:pPr>
+            <a:r>
+              <a:rPr sz="1008" b="0" i="0">
+                <a:solidFill>
+                  <a:srgbClr val="242A33"/>
+                </a:solidFill>
+                <a:latin typeface="Consolas"/>
+                <a:ea typeface="Consolas"/>
+              </a:rPr>
+              <a:t>    return b if n &gt;= 2 else 1</a:t>
+            </a:r>
+          </a:p>
+          <a:p>
+            <a:pPr algn="l">
+              <a:lnSpc>
+                <a:spcPts val="1311"/>
+              </a:lnSpc>
+              <a:spcBef>
+                <a:spcPts val="0"/>
+              </a:spcBef>
+              <a:spcAft>
+                <a:spcPts val="0"/>
+              </a:spcAft>
+            </a:pPr>
+            <a:r>
+              <a:rPr sz="1008" b="0" i="0">
+                <a:solidFill>
+                  <a:srgbClr val="242A33"/>
+                </a:solidFill>
+                <a:latin typeface="Consolas"/>
+                <a:ea typeface="Consolas"/>
+              </a:rPr>
+              <a:t> </a:t>
+            </a:r>
+          </a:p>
+          <a:p>
+            <a:pPr algn="l">
+              <a:lnSpc>
+                <a:spcPts val="1311"/>
+              </a:lnSpc>
+              <a:spcBef>
+                <a:spcPts val="0"/>
+              </a:spcBef>
+              <a:spcAft>
+                <a:spcPts val="0"/>
+              </a:spcAft>
+            </a:pPr>
+            <a:r>
+              <a:rPr sz="1008" b="0" i="0">
+                <a:solidFill>
+                  <a:srgbClr val="242A33"/>
+                </a:solidFill>
+                <a:latin typeface="Consolas"/>
+                <a:ea typeface="Consolas"/>
+              </a:rPr>
+              <a:t> </a:t>
+            </a:r>
+          </a:p>
+          <a:p>
+            <a:pPr algn="l">
+              <a:lnSpc>
+                <a:spcPts val="1311"/>
+              </a:lnSpc>
+              <a:spcBef>
+                <a:spcPts val="0"/>
+              </a:spcBef>
+              <a:spcAft>
+                <a:spcPts val="0"/>
+              </a:spcAft>
+            </a:pPr>
+            <a:r>
+              <a:rPr sz="1008" b="0" i="0">
+                <a:solidFill>
+                  <a:srgbClr val="242A33"/>
+                </a:solidFill>
+                <a:latin typeface="Consolas"/>
+                <a:ea typeface="Consolas"/>
+              </a:rPr>
+              <a:t>def fib_dp(n):                      # 修法三：自底向上填表</a:t>
+            </a:r>
+          </a:p>
+          <a:p>
+            <a:pPr algn="l">
+              <a:lnSpc>
+                <a:spcPts val="1311"/>
+              </a:lnSpc>
+              <a:spcBef>
+                <a:spcPts val="0"/>
+              </a:spcBef>
+              <a:spcAft>
+                <a:spcPts val="0"/>
+              </a:spcAft>
+            </a:pPr>
+            <a:r>
+              <a:rPr sz="1008" b="0" i="0">
+                <a:solidFill>
+                  <a:srgbClr val="242A33"/>
+                </a:solidFill>
+                <a:latin typeface="Consolas"/>
+                <a:ea typeface="Consolas"/>
+              </a:rPr>
+              <a:t>    if n &lt;= 2:</a:t>
+            </a:r>
+          </a:p>
+          <a:p>
+            <a:pPr algn="l">
+              <a:lnSpc>
+                <a:spcPts val="1311"/>
+              </a:lnSpc>
+              <a:spcBef>
+                <a:spcPts val="0"/>
+              </a:spcBef>
+              <a:spcAft>
+                <a:spcPts val="0"/>
+              </a:spcAft>
+            </a:pPr>
+            <a:r>
+              <a:rPr sz="1008" b="0" i="0">
+                <a:solidFill>
+                  <a:srgbClr val="242A33"/>
+                </a:solidFill>
+                <a:latin typeface="Consolas"/>
+                <a:ea typeface="Consolas"/>
+              </a:rPr>
+              <a:t>        return 1</a:t>
+            </a:r>
+          </a:p>
+          <a:p>
+            <a:pPr algn="l">
+              <a:lnSpc>
+                <a:spcPts val="1311"/>
+              </a:lnSpc>
+              <a:spcBef>
+                <a:spcPts val="0"/>
+              </a:spcBef>
+              <a:spcAft>
+                <a:spcPts val="0"/>
+              </a:spcAft>
+            </a:pPr>
+            <a:r>
+              <a:rPr sz="1008" b="0" i="0">
+                <a:solidFill>
+                  <a:srgbClr val="242A33"/>
+                </a:solidFill>
+                <a:latin typeface="Consolas"/>
+                <a:ea typeface="Consolas"/>
+              </a:rPr>
+              <a:t>    dp = [0] * (n + 1); dp[1] = dp[2] = 1</a:t>
+            </a:r>
+          </a:p>
+          <a:p>
+            <a:pPr algn="l">
+              <a:lnSpc>
+                <a:spcPts val="1311"/>
+              </a:lnSpc>
+              <a:spcBef>
+                <a:spcPts val="0"/>
+              </a:spcBef>
+              <a:spcAft>
+                <a:spcPts val="0"/>
+              </a:spcAft>
+            </a:pPr>
+            <a:r>
+              <a:rPr sz="1008" b="0" i="0">
+                <a:solidFill>
+                  <a:srgbClr val="242A33"/>
+                </a:solidFill>
+                <a:latin typeface="Consolas"/>
+                <a:ea typeface="Consolas"/>
+              </a:rPr>
+              <a:t>    for i in range(3, n + 1):</a:t>
+            </a:r>
+          </a:p>
+          <a:p>
+            <a:pPr algn="l">
+              <a:lnSpc>
+                <a:spcPts val="1311"/>
+              </a:lnSpc>
+              <a:spcBef>
+                <a:spcPts val="0"/>
+              </a:spcBef>
+              <a:spcAft>
+                <a:spcPts val="0"/>
+              </a:spcAft>
+            </a:pPr>
+            <a:r>
+              <a:rPr sz="1008" b="0" i="0">
+                <a:solidFill>
+                  <a:srgbClr val="242A33"/>
+                </a:solidFill>
+                <a:latin typeface="Consolas"/>
+                <a:ea typeface="Consolas"/>
+              </a:rPr>
+              <a:t>        dp[i] = dp[i - 1] + dp[i - 2]</a:t>
+            </a:r>
+          </a:p>
+          <a:p>
+            <a:pPr algn="l">
+              <a:lnSpc>
+                <a:spcPts val="1311"/>
+              </a:lnSpc>
+              <a:spcBef>
+                <a:spcPts val="0"/>
+              </a:spcBef>
+              <a:spcAft>
+                <a:spcPts val="0"/>
+              </a:spcAft>
+            </a:pPr>
+            <a:r>
+              <a:rPr sz="1008" b="0" i="0">
+                <a:solidFill>
+                  <a:srgbClr val="242A33"/>
+                </a:solidFill>
+                <a:latin typeface="Consolas"/>
+                <a:ea typeface="Consolas"/>
+              </a:rPr>
+              <a:t>    return dp[n]</a:t>
+            </a:r>
+          </a:p>
+          <a:p>
+            <a:pPr algn="l">
+              <a:lnSpc>
+                <a:spcPts val="1311"/>
+              </a:lnSpc>
+              <a:spcBef>
+                <a:spcPts val="0"/>
+              </a:spcBef>
+              <a:spcAft>
+                <a:spcPts val="0"/>
+              </a:spcAft>
+            </a:pPr>
+            <a:r>
+              <a:rPr sz="1008" b="0" i="0">
+                <a:solidFill>
+                  <a:srgbClr val="242A33"/>
+                </a:solidFill>
+                <a:latin typeface="Consolas"/>
+                <a:ea typeface="Consolas"/>
+              </a:rPr>
+              <a:t> </a:t>
+            </a:r>
+          </a:p>
+          <a:p>
+            <a:pPr algn="l">
+              <a:lnSpc>
+                <a:spcPts val="1311"/>
+              </a:lnSpc>
+              <a:spcBef>
+                <a:spcPts val="0"/>
+              </a:spcBef>
+              <a:spcAft>
+                <a:spcPts val="0"/>
+              </a:spcAft>
+            </a:pPr>
+            <a:r>
+              <a:rPr sz="1008" b="0" i="0">
+                <a:solidFill>
+                  <a:srgbClr val="242A33"/>
+                </a:solidFill>
+                <a:latin typeface="Consolas"/>
+                <a:ea typeface="Consolas"/>
+              </a:rPr>
+              <a:t> </a:t>
+            </a:r>
+          </a:p>
+          <a:p>
+            <a:pPr algn="l">
+              <a:lnSpc>
+                <a:spcPts val="1311"/>
+              </a:lnSpc>
+              <a:spcBef>
+                <a:spcPts val="0"/>
+              </a:spcBef>
+              <a:spcAft>
+                <a:spcPts val="0"/>
+              </a:spcAft>
+            </a:pPr>
+            <a:r>
+              <a:rPr sz="1008" b="0" i="0">
+                <a:solidFill>
+                  <a:srgbClr val="242A33"/>
+                </a:solidFill>
+                <a:latin typeface="Consolas"/>
+                <a:ea typeface="Consolas"/>
+              </a:rPr>
+              <a:t>print(fib_memo(50), fib_iter(50), fib_dp(50))   # 三者一致</a:t>
+            </a:r>
+          </a:p>
+        </p:txBody>
+      </p:sp>
+      <p:sp>
+        <p:nvSpPr>
+          <p:cNvPr id="6" name="TextBox 5"/>
+          <p:cNvSpPr txBox="1"/>
+          <p:nvPr/>
+        </p:nvSpPr>
+        <p:spPr>
+          <a:xfrm>
+            <a:off x="566928" y="5861304"/>
+            <a:ext cx="11057839" cy="329184"/>
+          </a:xfrm>
+          <a:prstGeom prst="rect">
+            <a:avLst/>
+          </a:prstGeom>
+          <a:noFill/>
+        </p:spPr>
+        <p:txBody>
+          <a:bodyPr wrap="square" lIns="0" rIns="0" tIns="0" bIns="0">
+            <a:noAutofit/>
+          </a:bodyPr>
+          <a:lstStyle/>
+          <a:p>
+            <a:pPr algn="l">
+              <a:spcBef>
+                <a:spcPts val="0"/>
+              </a:spcBef>
+              <a:spcAft>
+                <a:spcPts val="0"/>
+              </a:spcAft>
+            </a:pPr>
+            <a:r>
+              <a:rPr sz="1300" b="0" i="0">
+                <a:solidFill>
+                  <a:srgbClr val="6B7582"/>
+                </a:solidFill>
+                <a:latin typeface="Segoe UI"/>
+                <a:ea typeface="微软雅黑"/>
+              </a:rPr>
+              <a:t>lru_cache 是本课最划算的一行代码：一个装饰器把指数降成线性</a:t>
+            </a:r>
+          </a:p>
+        </p:txBody>
+      </p:sp>
+      <p:sp>
+        <p:nvSpPr>
+          <p:cNvPr id="7" name="TextBox 6"/>
+          <p:cNvSpPr txBox="1"/>
+          <p:nvPr/>
+        </p:nvSpPr>
+        <p:spPr>
+          <a:xfrm>
+            <a:off x="566928" y="6327648"/>
+            <a:ext cx="8229600" cy="310896"/>
+          </a:xfrm>
+          <a:prstGeom prst="rect">
+            <a:avLst/>
+          </a:prstGeom>
+          <a:noFill/>
+        </p:spPr>
+        <p:txBody>
+          <a:bodyPr wrap="square" lIns="0" rIns="0" tIns="0" bIns="0">
+            <a:noAutofit/>
+          </a:bodyPr>
+          <a:lstStyle/>
+          <a:p>
+            <a:pPr algn="l">
+              <a:spcBef>
+                <a:spcPts val="0"/>
+              </a:spcBef>
+              <a:spcAft>
+                <a:spcPts val="0"/>
+              </a:spcAft>
+            </a:pPr>
+            <a:r>
+              <a:rPr sz="1000" b="0" i="0">
+                <a:solidFill>
+                  <a:srgbClr val="6B7582"/>
+                </a:solidFill>
+                <a:latin typeface="Segoe UI"/>
+                <a:ea typeface="微软雅黑"/>
+              </a:rPr>
+              <a:t>计算概论（B） · 第8周 · 闫宏飞 · 2026 Fall</a:t>
+            </a:r>
+          </a:p>
+        </p:txBody>
+      </p:sp>
+      <p:sp>
+        <p:nvSpPr>
+          <p:cNvPr id="8" name="TextBox 7"/>
+          <p:cNvSpPr txBox="1"/>
+          <p:nvPr/>
+        </p:nvSpPr>
+        <p:spPr>
+          <a:xfrm>
+            <a:off x="10710367" y="6327648"/>
+            <a:ext cx="914400" cy="310896"/>
+          </a:xfrm>
+          <a:prstGeom prst="rect">
+            <a:avLst/>
+          </a:prstGeom>
+          <a:noFill/>
+        </p:spPr>
+        <p:txBody>
+          <a:bodyPr wrap="square" lIns="0" rIns="0" tIns="0" bIns="0">
+            <a:noAutofit/>
+          </a:bodyPr>
+          <a:lstStyle/>
+          <a:p>
+            <a:pPr algn="r">
+              <a:spcBef>
+                <a:spcPts val="0"/>
+              </a:spcBef>
+              <a:spcAft>
+                <a:spcPts val="0"/>
+              </a:spcAft>
+            </a:pPr>
+            <a:r>
+              <a:rPr sz="1000" b="0" i="0">
+                <a:solidFill>
+                  <a:srgbClr val="6B7582"/>
+                </a:solidFill>
+                <a:latin typeface="Segoe UI"/>
+                <a:ea typeface="微软雅黑"/>
+              </a:rPr>
+              <a:t>16</a:t>
+            </a:r>
+          </a:p>
+        </p:txBody>
+      </p:sp>
+    </p:spTree>
+  </p:cSld>
+  <p:clrMapOvr>
+    <a:masterClrMapping/>
+  </p:clrMapOvr>
+</p:sld>
+</file>
+
+<file path=ppt/slides/slide17.xml><?xml version="1.0" encoding="utf-8"?>
+<p:sld xmlns:a="http://schemas.openxmlformats.org/drawingml/2006/main" xmlns:p="http://schemas.openxmlformats.org/presentationml/2006/main" xmlns:r="http://schemas.openxmlformats.org/officeDocument/2006/relationships">
+  <p:cSld>
+    <p:spTree>
+      <p:nvGrpSpPr>
+        <p:cNvPr id="1" name=""/>
+        <p:cNvGrpSpPr/>
+        <p:nvPr/>
+      </p:nvGrpSpPr>
+      <p:grpSpPr/>
+      <p:sp>
+        <p:nvSpPr>
+          <p:cNvPr id="2" name="TextBox 1"/>
+          <p:cNvSpPr txBox="1"/>
+          <p:nvPr/>
+        </p:nvSpPr>
+        <p:spPr>
+          <a:xfrm>
+            <a:off x="566928" y="420624"/>
+            <a:ext cx="11057839" cy="548640"/>
+          </a:xfrm>
+          <a:prstGeom prst="rect">
+            <a:avLst/>
+          </a:prstGeom>
+          <a:noFill/>
+        </p:spPr>
+        <p:txBody>
+          <a:bodyPr wrap="square" lIns="0" rIns="0" tIns="0" bIns="0">
+            <a:noAutofit/>
+          </a:bodyPr>
+          <a:lstStyle/>
+          <a:p>
+            <a:pPr algn="l">
+              <a:spcBef>
+                <a:spcPts val="0"/>
+              </a:spcBef>
+              <a:spcAft>
+                <a:spcPts val="0"/>
+              </a:spcAft>
+            </a:pPr>
+            <a:r>
+              <a:rPr sz="2600" b="1" i="0">
+                <a:solidFill>
+                  <a:srgbClr val="12395B"/>
+                </a:solidFill>
+                <a:latin typeface="Segoe UI"/>
+                <a:ea typeface="微软雅黑"/>
+              </a:rPr>
+              <a:t>第一部：汉诺塔（04147）的三步</a:t>
+            </a:r>
+          </a:p>
+        </p:txBody>
+      </p:sp>
+      <p:sp>
+        <p:nvSpPr>
+          <p:cNvPr id="3" name="Rectangle 2"/>
+          <p:cNvSpPr/>
+          <p:nvPr/>
+        </p:nvSpPr>
+        <p:spPr>
+          <a:xfrm>
+            <a:off x="566928" y="1060704"/>
+            <a:ext cx="960120" cy="40640"/>
+          </a:xfrm>
+          <a:prstGeom prst="rect">
+            <a:avLst/>
+          </a:prstGeom>
+          <a:solidFill>
+            <a:srgbClr val="E07B39"/>
+          </a:solidFill>
+          <a:ln>
+            <a:noFill/>
+          </a:ln>
+          <a:effectLst/>
+        </p:spPr>
+        <p:style>
+          <a:lnRef idx="1">
+            <a:schemeClr val="accent1"/>
+          </a:lnRef>
+          <a:fillRef idx="3">
+            <a:schemeClr val="accent1"/>
+          </a:fillRef>
+          <a:effectRef idx="2">
+            <a:schemeClr val="accent1"/>
+          </a:effectRef>
+          <a:fontRef idx="minor">
+            <a:schemeClr val="lt1"/>
+          </a:fontRef>
+        </p:style>
+        <p:txBody>
+          <a:bodyPr rtlCol="0" anchor="ctr"/>
+          <a:lstStyle/>
+          <a:p>
+            <a:pPr algn="ctr"/>
+          </a:p>
+        </p:txBody>
+      </p:sp>
+      <p:sp>
+        <p:nvSpPr>
+          <p:cNvPr id="4" name="TextBox 3"/>
+          <p:cNvSpPr txBox="1"/>
+          <p:nvPr/>
+        </p:nvSpPr>
+        <p:spPr>
+          <a:xfrm>
+            <a:off x="566928" y="1298448"/>
+            <a:ext cx="11057839" cy="4864608"/>
+          </a:xfrm>
+          <a:prstGeom prst="rect">
+            <a:avLst/>
+          </a:prstGeom>
+          <a:noFill/>
+        </p:spPr>
+        <p:txBody>
+          <a:bodyPr wrap="square" lIns="0" rIns="0" tIns="0" bIns="0">
+            <a:noAutofit/>
+          </a:bodyPr>
+          <a:lstStyle/>
+          <a:p>
+            <a:pPr algn="l">
+              <a:lnSpc>
+                <a:spcPct val="132000"/>
+              </a:lnSpc>
+              <a:spcBef>
+                <a:spcPts val="0"/>
+              </a:spcBef>
+              <a:spcAft>
+                <a:spcPts val="1240"/>
+              </a:spcAft>
+            </a:pPr>
+            <a:r>
+              <a:rPr sz="2000" b="0" i="0">
+                <a:solidFill>
+                  <a:srgbClr val="242A33"/>
+                </a:solidFill>
+                <a:latin typeface="Segoe UI"/>
+                <a:ea typeface="微软雅黑"/>
+              </a:rPr>
+              <a:t>•  把上面 </a:t>
+            </a:r>
+            <a:r>
+              <a:rPr sz="2000" b="1" i="0">
+                <a:solidFill>
+                  <a:srgbClr val="12395B"/>
+                </a:solidFill>
+                <a:latin typeface="Segoe UI"/>
+                <a:ea typeface="微软雅黑"/>
+              </a:rPr>
+              <a:t>n−1 个盘从 A 移到 B</a:t>
+            </a:r>
+            <a:r>
+              <a:rPr sz="2000" b="0" i="0">
+                <a:solidFill>
+                  <a:srgbClr val="242A33"/>
+                </a:solidFill>
+                <a:latin typeface="Segoe UI"/>
+                <a:ea typeface="微软雅黑"/>
+              </a:rPr>
+              <a:t>（借助 C）</a:t>
+            </a:r>
+          </a:p>
+          <a:p>
+            <a:pPr algn="l">
+              <a:lnSpc>
+                <a:spcPct val="132000"/>
+              </a:lnSpc>
+              <a:spcBef>
+                <a:spcPts val="0"/>
+              </a:spcBef>
+              <a:spcAft>
+                <a:spcPts val="1240"/>
+              </a:spcAft>
+            </a:pPr>
+            <a:r>
+              <a:rPr sz="2000" b="0" i="0">
+                <a:solidFill>
+                  <a:srgbClr val="242A33"/>
+                </a:solidFill>
+                <a:latin typeface="Segoe UI"/>
+                <a:ea typeface="微软雅黑"/>
+              </a:rPr>
+              <a:t>•  把</a:t>
+            </a:r>
+            <a:r>
+              <a:rPr sz="2000" b="1" i="0">
+                <a:solidFill>
+                  <a:srgbClr val="12395B"/>
+                </a:solidFill>
+                <a:latin typeface="Segoe UI"/>
+                <a:ea typeface="微软雅黑"/>
+              </a:rPr>
+              <a:t>最大的第 n 个盘从 A 移到 C</a:t>
+            </a:r>
+          </a:p>
+          <a:p>
+            <a:pPr algn="l">
+              <a:lnSpc>
+                <a:spcPct val="132000"/>
+              </a:lnSpc>
+              <a:spcBef>
+                <a:spcPts val="0"/>
+              </a:spcBef>
+              <a:spcAft>
+                <a:spcPts val="1240"/>
+              </a:spcAft>
+            </a:pPr>
+            <a:r>
+              <a:rPr sz="2000" b="0" i="0">
+                <a:solidFill>
+                  <a:srgbClr val="242A33"/>
+                </a:solidFill>
+                <a:latin typeface="Segoe UI"/>
+                <a:ea typeface="微软雅黑"/>
+              </a:rPr>
+              <a:t>•  把 </a:t>
+            </a:r>
+            <a:r>
+              <a:rPr sz="2000" b="1" i="0">
+                <a:solidFill>
+                  <a:srgbClr val="12395B"/>
+                </a:solidFill>
+                <a:latin typeface="Segoe UI"/>
+                <a:ea typeface="微软雅黑"/>
+              </a:rPr>
+              <a:t>n−1 个盘从 B 移到 C</a:t>
+            </a:r>
+            <a:r>
+              <a:rPr sz="2000" b="0" i="0">
+                <a:solidFill>
+                  <a:srgbClr val="242A33"/>
+                </a:solidFill>
+                <a:latin typeface="Segoe UI"/>
+                <a:ea typeface="微软雅黑"/>
+              </a:rPr>
+              <a:t>（借助 A）</a:t>
+            </a:r>
+          </a:p>
+          <a:p>
+            <a:pPr algn="l">
+              <a:lnSpc>
+                <a:spcPct val="132000"/>
+              </a:lnSpc>
+              <a:spcBef>
+                <a:spcPts val="0"/>
+              </a:spcBef>
+              <a:spcAft>
+                <a:spcPts val="1240"/>
+              </a:spcAft>
+            </a:pPr>
+            <a:r>
+              <a:rPr sz="2000" b="0" i="0">
+                <a:solidFill>
+                  <a:srgbClr val="242A33"/>
+                </a:solidFill>
+                <a:latin typeface="Segoe UI"/>
+                <a:ea typeface="微软雅黑"/>
+              </a:rPr>
+              <a:t>•  移动次数：T(n) = 2T(n−1) + 1，T(1) = 1 ⟹ </a:t>
+            </a:r>
+            <a:r>
+              <a:rPr sz="2000" b="1" i="0">
+                <a:solidFill>
+                  <a:srgbClr val="12395B"/>
+                </a:solidFill>
+                <a:latin typeface="Segoe UI"/>
+                <a:ea typeface="微软雅黑"/>
+              </a:rPr>
+              <a:t>T(n) = 2ⁿ − 1</a:t>
+            </a:r>
+          </a:p>
+        </p:txBody>
+      </p:sp>
+      <p:sp>
+        <p:nvSpPr>
+          <p:cNvPr id="5" name="TextBox 4"/>
+          <p:cNvSpPr txBox="1"/>
+          <p:nvPr/>
+        </p:nvSpPr>
+        <p:spPr>
+          <a:xfrm>
+            <a:off x="566928" y="6327648"/>
+            <a:ext cx="8229600" cy="310896"/>
+          </a:xfrm>
+          <a:prstGeom prst="rect">
+            <a:avLst/>
+          </a:prstGeom>
+          <a:noFill/>
+        </p:spPr>
+        <p:txBody>
+          <a:bodyPr wrap="square" lIns="0" rIns="0" tIns="0" bIns="0">
+            <a:noAutofit/>
+          </a:bodyPr>
+          <a:lstStyle/>
+          <a:p>
+            <a:pPr algn="l">
+              <a:spcBef>
+                <a:spcPts val="0"/>
+              </a:spcBef>
+              <a:spcAft>
+                <a:spcPts val="0"/>
+              </a:spcAft>
+            </a:pPr>
+            <a:r>
+              <a:rPr sz="1000" b="0" i="0">
+                <a:solidFill>
+                  <a:srgbClr val="6B7582"/>
+                </a:solidFill>
+                <a:latin typeface="Segoe UI"/>
+                <a:ea typeface="微软雅黑"/>
+              </a:rPr>
+              <a:t>计算概论（B） · 第8周 · 闫宏飞 · 2026 Fall</a:t>
+            </a:r>
+          </a:p>
+        </p:txBody>
+      </p:sp>
+      <p:sp>
+        <p:nvSpPr>
+          <p:cNvPr id="6" name="TextBox 5"/>
+          <p:cNvSpPr txBox="1"/>
+          <p:nvPr/>
+        </p:nvSpPr>
+        <p:spPr>
+          <a:xfrm>
+            <a:off x="10710367" y="6327648"/>
+            <a:ext cx="914400" cy="310896"/>
+          </a:xfrm>
+          <a:prstGeom prst="rect">
+            <a:avLst/>
+          </a:prstGeom>
+          <a:noFill/>
+        </p:spPr>
+        <p:txBody>
+          <a:bodyPr wrap="square" lIns="0" rIns="0" tIns="0" bIns="0">
+            <a:noAutofit/>
+          </a:bodyPr>
+          <a:lstStyle/>
+          <a:p>
+            <a:pPr algn="r">
+              <a:spcBef>
+                <a:spcPts val="0"/>
+              </a:spcBef>
+              <a:spcAft>
+                <a:spcPts val="0"/>
+              </a:spcAft>
+            </a:pPr>
+            <a:r>
+              <a:rPr sz="1000" b="0" i="0">
+                <a:solidFill>
+                  <a:srgbClr val="6B7582"/>
+                </a:solidFill>
+                <a:latin typeface="Segoe UI"/>
+                <a:ea typeface="微软雅黑"/>
+              </a:rPr>
+              <a:t>17</a:t>
+            </a:r>
+          </a:p>
+        </p:txBody>
+      </p:sp>
+    </p:spTree>
+  </p:cSld>
+  <p:clrMapOvr>
+    <a:masterClrMapping/>
+  </p:clrMapOvr>
+</p:sld>
+</file>
+
+<file path=ppt/slides/slide18.xml><?xml version="1.0" encoding="utf-8"?>
 <p:sld xmlns:a="http://schemas.openxmlformats.org/drawingml/2006/main" xmlns:p="http://schemas.openxmlformats.org/presentationml/2006/main" xmlns:r="http://schemas.openxmlformats.org/officeDocument/2006/relationships">
   <p:cSld>
     <p:spTree>
@@ -6426,7 +8460,7 @@
                 <a:latin typeface="Segoe UI"/>
                 <a:ea typeface="微软雅黑"/>
               </a:rPr>
-              <a:t>15</a:t>
+              <a:t>18</a:t>
             </a:r>
           </a:p>
         </p:txBody>
@@ -6439,7 +8473,7 @@
 </p:sld>
 </file>
 
-<file path=ppt/slides/slide16.xml><?xml version="1.0" encoding="utf-8"?>
+<file path=ppt/slides/slide19.xml><?xml version="1.0" encoding="utf-8"?>
 <p:sld xmlns:a="http://schemas.openxmlformats.org/drawingml/2006/main" xmlns:p="http://schemas.openxmlformats.org/presentationml/2006/main" xmlns:r="http://schemas.openxmlformats.org/officeDocument/2006/relationships">
   <p:cSld>
     <p:spTree>
@@ -7166,7 +9200,7 @@
                 <a:latin typeface="Segoe UI"/>
                 <a:ea typeface="微软雅黑"/>
               </a:rPr>
-              <a:t>16</a:t>
+              <a:t>19</a:t>
             </a:r>
           </a:p>
         </p:txBody>
@@ -7179,7 +9213,471 @@
 </p:sld>
 </file>
 
-<file path=ppt/slides/slide17.xml><?xml version="1.0" encoding="utf-8"?>
+<file path=ppt/slides/slide2.xml><?xml version="1.0" encoding="utf-8"?>
+<p:sld xmlns:a="http://schemas.openxmlformats.org/drawingml/2006/main" xmlns:p="http://schemas.openxmlformats.org/presentationml/2006/main" xmlns:r="http://schemas.openxmlformats.org/officeDocument/2006/relationships">
+  <p:cSld>
+    <p:spTree>
+      <p:nvGrpSpPr>
+        <p:cNvPr id="1" name=""/>
+        <p:cNvGrpSpPr/>
+        <p:nvPr/>
+      </p:nvGrpSpPr>
+      <p:grpSpPr/>
+      <p:sp>
+        <p:nvSpPr>
+          <p:cNvPr id="2" name="TextBox 1"/>
+          <p:cNvSpPr txBox="1"/>
+          <p:nvPr/>
+        </p:nvSpPr>
+        <p:spPr>
+          <a:xfrm>
+            <a:off x="566928" y="420624"/>
+            <a:ext cx="11057839" cy="548640"/>
+          </a:xfrm>
+          <a:prstGeom prst="rect">
+            <a:avLst/>
+          </a:prstGeom>
+          <a:noFill/>
+        </p:spPr>
+        <p:txBody>
+          <a:bodyPr wrap="square" lIns="0" rIns="0" tIns="0" bIns="0">
+            <a:noAutofit/>
+          </a:bodyPr>
+          <a:lstStyle/>
+          <a:p>
+            <a:pPr algn="l">
+              <a:spcBef>
+                <a:spcPts val="0"/>
+              </a:spcBef>
+              <a:spcAft>
+                <a:spcPts val="0"/>
+              </a:spcAft>
+            </a:pPr>
+            <a:r>
+              <a:rPr sz="2600" b="1" i="0">
+                <a:solidFill>
+                  <a:srgbClr val="12395B"/>
+                </a:solidFill>
+                <a:latin typeface="Segoe UI"/>
+                <a:ea typeface="微软雅黑"/>
+              </a:rPr>
+              <a:t>什么是递归</a:t>
+            </a:r>
+          </a:p>
+        </p:txBody>
+      </p:sp>
+      <p:sp>
+        <p:nvSpPr>
+          <p:cNvPr id="3" name="Rectangle 2"/>
+          <p:cNvSpPr/>
+          <p:nvPr/>
+        </p:nvSpPr>
+        <p:spPr>
+          <a:xfrm>
+            <a:off x="566928" y="1060704"/>
+            <a:ext cx="960120" cy="40640"/>
+          </a:xfrm>
+          <a:prstGeom prst="rect">
+            <a:avLst/>
+          </a:prstGeom>
+          <a:solidFill>
+            <a:srgbClr val="E07B39"/>
+          </a:solidFill>
+          <a:ln>
+            <a:noFill/>
+          </a:ln>
+          <a:effectLst/>
+        </p:spPr>
+        <p:style>
+          <a:lnRef idx="1">
+            <a:schemeClr val="accent1"/>
+          </a:lnRef>
+          <a:fillRef idx="3">
+            <a:schemeClr val="accent1"/>
+          </a:fillRef>
+          <a:effectRef idx="2">
+            <a:schemeClr val="accent1"/>
+          </a:effectRef>
+          <a:fontRef idx="minor">
+            <a:schemeClr val="lt1"/>
+          </a:fontRef>
+        </p:style>
+        <p:txBody>
+          <a:bodyPr rtlCol="0" anchor="ctr"/>
+          <a:lstStyle/>
+          <a:p>
+            <a:pPr algn="ctr"/>
+          </a:p>
+        </p:txBody>
+      </p:sp>
+      <p:sp>
+        <p:nvSpPr>
+          <p:cNvPr id="4" name="Rectangle 3"/>
+          <p:cNvSpPr/>
+          <p:nvPr/>
+        </p:nvSpPr>
+        <p:spPr>
+          <a:xfrm>
+            <a:off x="566928" y="1298448"/>
+            <a:ext cx="11057839" cy="2070735"/>
+          </a:xfrm>
+          <a:prstGeom prst="rect">
+            <a:avLst/>
+          </a:prstGeom>
+          <a:solidFill>
+            <a:srgbClr val="F6F7F9"/>
+          </a:solidFill>
+          <a:ln w="9525">
+            <a:solidFill>
+              <a:srgbClr val="D6DCE4"/>
+            </a:solidFill>
+          </a:ln>
+          <a:effectLst/>
+        </p:spPr>
+        <p:style>
+          <a:lnRef idx="1">
+            <a:schemeClr val="accent1"/>
+          </a:lnRef>
+          <a:fillRef idx="3">
+            <a:schemeClr val="accent1"/>
+          </a:fillRef>
+          <a:effectRef idx="2">
+            <a:schemeClr val="accent1"/>
+          </a:effectRef>
+          <a:fontRef idx="minor">
+            <a:schemeClr val="lt1"/>
+          </a:fontRef>
+        </p:style>
+        <p:txBody>
+          <a:bodyPr rtlCol="0" anchor="ctr"/>
+          <a:lstStyle/>
+          <a:p>
+            <a:pPr algn="ctr"/>
+          </a:p>
+        </p:txBody>
+      </p:sp>
+      <p:sp>
+        <p:nvSpPr>
+          <p:cNvPr id="5" name="TextBox 4"/>
+          <p:cNvSpPr txBox="1"/>
+          <p:nvPr/>
+        </p:nvSpPr>
+        <p:spPr>
+          <a:xfrm>
+            <a:off x="822960" y="1399032"/>
+            <a:ext cx="10545775" cy="1869567"/>
+          </a:xfrm>
+          <a:prstGeom prst="rect">
+            <a:avLst/>
+          </a:prstGeom>
+          <a:noFill/>
+        </p:spPr>
+        <p:txBody>
+          <a:bodyPr wrap="square" lIns="0" rIns="0" tIns="0" bIns="0">
+            <a:noAutofit/>
+          </a:bodyPr>
+          <a:lstStyle/>
+          <a:p>
+            <a:pPr algn="l">
+              <a:lnSpc>
+                <a:spcPts val="2015"/>
+              </a:lnSpc>
+              <a:spcBef>
+                <a:spcPts val="0"/>
+              </a:spcBef>
+              <a:spcAft>
+                <a:spcPts val="0"/>
+              </a:spcAft>
+            </a:pPr>
+            <a:r>
+              <a:rPr sz="1550" b="0" i="0">
+                <a:solidFill>
+                  <a:srgbClr val="242A33"/>
+                </a:solidFill>
+                <a:latin typeface="Consolas"/>
+                <a:ea typeface="Consolas"/>
+              </a:rPr>
+              <a:t>def factorial(n):</a:t>
+            </a:r>
+          </a:p>
+          <a:p>
+            <a:pPr algn="l">
+              <a:lnSpc>
+                <a:spcPts val="2015"/>
+              </a:lnSpc>
+              <a:spcBef>
+                <a:spcPts val="0"/>
+              </a:spcBef>
+              <a:spcAft>
+                <a:spcPts val="0"/>
+              </a:spcAft>
+            </a:pPr>
+            <a:r>
+              <a:rPr sz="1550" b="0" i="0">
+                <a:solidFill>
+                  <a:srgbClr val="242A33"/>
+                </a:solidFill>
+                <a:latin typeface="Consolas"/>
+                <a:ea typeface="Consolas"/>
+              </a:rPr>
+              <a:t>    if n &lt;= 1:              # 基例（base case）</a:t>
+            </a:r>
+          </a:p>
+          <a:p>
+            <a:pPr algn="l">
+              <a:lnSpc>
+                <a:spcPts val="2015"/>
+              </a:lnSpc>
+              <a:spcBef>
+                <a:spcPts val="0"/>
+              </a:spcBef>
+              <a:spcAft>
+                <a:spcPts val="0"/>
+              </a:spcAft>
+            </a:pPr>
+            <a:r>
+              <a:rPr sz="1550" b="0" i="0">
+                <a:solidFill>
+                  <a:srgbClr val="242A33"/>
+                </a:solidFill>
+                <a:latin typeface="Consolas"/>
+                <a:ea typeface="Consolas"/>
+              </a:rPr>
+              <a:t>        return 1</a:t>
+            </a:r>
+          </a:p>
+          <a:p>
+            <a:pPr algn="l">
+              <a:lnSpc>
+                <a:spcPts val="2015"/>
+              </a:lnSpc>
+              <a:spcBef>
+                <a:spcPts val="0"/>
+              </a:spcBef>
+              <a:spcAft>
+                <a:spcPts val="0"/>
+              </a:spcAft>
+            </a:pPr>
+            <a:r>
+              <a:rPr sz="1550" b="0" i="0">
+                <a:solidFill>
+                  <a:srgbClr val="242A33"/>
+                </a:solidFill>
+                <a:latin typeface="Consolas"/>
+                <a:ea typeface="Consolas"/>
+              </a:rPr>
+              <a:t>    return n * factorial(n - 1)     # 递归调用，向基例逼近</a:t>
+            </a:r>
+          </a:p>
+          <a:p>
+            <a:pPr algn="l">
+              <a:lnSpc>
+                <a:spcPts val="2015"/>
+              </a:lnSpc>
+              <a:spcBef>
+                <a:spcPts val="0"/>
+              </a:spcBef>
+              <a:spcAft>
+                <a:spcPts val="0"/>
+              </a:spcAft>
+            </a:pPr>
+            <a:r>
+              <a:rPr sz="1550" b="0" i="0">
+                <a:solidFill>
+                  <a:srgbClr val="242A33"/>
+                </a:solidFill>
+                <a:latin typeface="Consolas"/>
+                <a:ea typeface="Consolas"/>
+              </a:rPr>
+              <a:t> </a:t>
+            </a:r>
+          </a:p>
+          <a:p>
+            <a:pPr algn="l">
+              <a:lnSpc>
+                <a:spcPts val="2015"/>
+              </a:lnSpc>
+              <a:spcBef>
+                <a:spcPts val="0"/>
+              </a:spcBef>
+              <a:spcAft>
+                <a:spcPts val="0"/>
+              </a:spcAft>
+            </a:pPr>
+            <a:r>
+              <a:rPr sz="1550" b="0" i="0">
+                <a:solidFill>
+                  <a:srgbClr val="242A33"/>
+                </a:solidFill>
+                <a:latin typeface="Consolas"/>
+                <a:ea typeface="Consolas"/>
+              </a:rPr>
+              <a:t> </a:t>
+            </a:r>
+          </a:p>
+          <a:p>
+            <a:pPr algn="l">
+              <a:lnSpc>
+                <a:spcPts val="2015"/>
+              </a:lnSpc>
+              <a:spcBef>
+                <a:spcPts val="0"/>
+              </a:spcBef>
+              <a:spcAft>
+                <a:spcPts val="0"/>
+              </a:spcAft>
+            </a:pPr>
+            <a:r>
+              <a:rPr sz="1550" b="0" i="0">
+                <a:solidFill>
+                  <a:srgbClr val="242A33"/>
+                </a:solidFill>
+                <a:latin typeface="Consolas"/>
+                <a:ea typeface="Consolas"/>
+              </a:rPr>
+              <a:t>print(factorial(5))         # 120</a:t>
+            </a:r>
+          </a:p>
+        </p:txBody>
+      </p:sp>
+      <p:sp>
+        <p:nvSpPr>
+          <p:cNvPr id="6" name="TextBox 5"/>
+          <p:cNvSpPr txBox="1"/>
+          <p:nvPr/>
+        </p:nvSpPr>
+        <p:spPr>
+          <a:xfrm>
+            <a:off x="566928" y="3488055"/>
+            <a:ext cx="11057839" cy="329184"/>
+          </a:xfrm>
+          <a:prstGeom prst="rect">
+            <a:avLst/>
+          </a:prstGeom>
+          <a:noFill/>
+        </p:spPr>
+        <p:txBody>
+          <a:bodyPr wrap="square" lIns="0" rIns="0" tIns="0" bIns="0">
+            <a:noAutofit/>
+          </a:bodyPr>
+          <a:lstStyle/>
+          <a:p>
+            <a:pPr algn="l">
+              <a:spcBef>
+                <a:spcPts val="0"/>
+              </a:spcBef>
+              <a:spcAft>
+                <a:spcPts val="0"/>
+              </a:spcAft>
+            </a:pPr>
+            <a:r>
+              <a:rPr sz="1300" b="0" i="0">
+                <a:solidFill>
+                  <a:srgbClr val="6B7582"/>
+                </a:solidFill>
+                <a:latin typeface="Segoe UI"/>
+                <a:ea typeface="微软雅黑"/>
+              </a:rPr>
+              <a:t>递归：函数在自己的定义中调用自己</a:t>
+            </a:r>
+          </a:p>
+        </p:txBody>
+      </p:sp>
+      <p:sp>
+        <p:nvSpPr>
+          <p:cNvPr id="7" name="TextBox 6"/>
+          <p:cNvSpPr txBox="1"/>
+          <p:nvPr/>
+        </p:nvSpPr>
+        <p:spPr>
+          <a:xfrm>
+            <a:off x="566928" y="6327648"/>
+            <a:ext cx="8229600" cy="310896"/>
+          </a:xfrm>
+          <a:prstGeom prst="rect">
+            <a:avLst/>
+          </a:prstGeom>
+          <a:noFill/>
+        </p:spPr>
+        <p:txBody>
+          <a:bodyPr wrap="square" lIns="0" rIns="0" tIns="0" bIns="0">
+            <a:noAutofit/>
+          </a:bodyPr>
+          <a:lstStyle/>
+          <a:p>
+            <a:pPr algn="l">
+              <a:spcBef>
+                <a:spcPts val="0"/>
+              </a:spcBef>
+              <a:spcAft>
+                <a:spcPts val="0"/>
+              </a:spcAft>
+            </a:pPr>
+            <a:r>
+              <a:rPr sz="1000" b="0" i="0">
+                <a:solidFill>
+                  <a:srgbClr val="6B7582"/>
+                </a:solidFill>
+                <a:latin typeface="Segoe UI"/>
+                <a:ea typeface="微软雅黑"/>
+              </a:rPr>
+              <a:t>计算概论（B） · 第8周 · 闫宏飞 · 2026 Fall</a:t>
+            </a:r>
+          </a:p>
+        </p:txBody>
+      </p:sp>
+      <p:sp>
+        <p:nvSpPr>
+          <p:cNvPr id="8" name="TextBox 7"/>
+          <p:cNvSpPr txBox="1"/>
+          <p:nvPr/>
+        </p:nvSpPr>
+        <p:spPr>
+          <a:xfrm>
+            <a:off x="10710367" y="6327648"/>
+            <a:ext cx="914400" cy="310896"/>
+          </a:xfrm>
+          <a:prstGeom prst="rect">
+            <a:avLst/>
+          </a:prstGeom>
+          <a:noFill/>
+        </p:spPr>
+        <p:txBody>
+          <a:bodyPr wrap="square" lIns="0" rIns="0" tIns="0" bIns="0">
+            <a:noAutofit/>
+          </a:bodyPr>
+          <a:lstStyle/>
+          <a:p>
+            <a:pPr algn="r">
+              <a:spcBef>
+                <a:spcPts val="0"/>
+              </a:spcBef>
+              <a:spcAft>
+                <a:spcPts val="0"/>
+              </a:spcAft>
+            </a:pPr>
+            <a:r>
+              <a:rPr sz="1000" b="0" i="0">
+                <a:solidFill>
+                  <a:srgbClr val="6B7582"/>
+                </a:solidFill>
+                <a:latin typeface="Segoe UI"/>
+                <a:ea typeface="微软雅黑"/>
+              </a:rPr>
+              <a:t>2</a:t>
+            </a:r>
+          </a:p>
+        </p:txBody>
+      </p:sp>
+    </p:spTree>
+  </p:cSld>
+  <p:clrMapOvr>
+    <a:masterClrMapping/>
+  </p:clrMapOvr>
+</p:sld>
+</file>
+
+<file path=ppt/slides/slide20.xml><?xml version="1.0" encoding="utf-8"?>
 <p:sld xmlns:a="http://schemas.openxmlformats.org/drawingml/2006/main" xmlns:p="http://schemas.openxmlformats.org/presentationml/2006/main" xmlns:r="http://schemas.openxmlformats.org/officeDocument/2006/relationships">
   <p:cSld>
     <p:spTree>
@@ -7348,7 +9846,7 @@
 </p:sld>
 </file>
 
-<file path=ppt/slides/slide18.xml><?xml version="1.0" encoding="utf-8"?>
+<file path=ppt/slides/slide21.xml><?xml version="1.0" encoding="utf-8"?>
 <p:sld xmlns:a="http://schemas.openxmlformats.org/drawingml/2006/main" xmlns:p="http://schemas.openxmlformats.org/presentationml/2006/main" xmlns:r="http://schemas.openxmlformats.org/officeDocument/2006/relationships">
   <p:cSld>
     <p:spTree>
@@ -8244,7 +10742,7 @@
                 <a:latin typeface="Segoe UI"/>
                 <a:ea typeface="微软雅黑"/>
               </a:rPr>
-              <a:t>18</a:t>
+              <a:t>21</a:t>
             </a:r>
           </a:p>
         </p:txBody>
@@ -8257,7 +10755,7 @@
 </p:sld>
 </file>
 
-<file path=ppt/slides/slide19.xml><?xml version="1.0" encoding="utf-8"?>
+<file path=ppt/slides/slide22.xml><?xml version="1.0" encoding="utf-8"?>
 <p:sld xmlns:a="http://schemas.openxmlformats.org/drawingml/2006/main" xmlns:p="http://schemas.openxmlformats.org/presentationml/2006/main" xmlns:r="http://schemas.openxmlformats.org/officeDocument/2006/relationships">
   <p:cSld>
     <p:spTree>
@@ -9099,7 +11597,7 @@
                 <a:latin typeface="Segoe UI"/>
                 <a:ea typeface="微软雅黑"/>
               </a:rPr>
-              <a:t>19</a:t>
+              <a:t>22</a:t>
             </a:r>
           </a:p>
         </p:txBody>
@@ -9112,471 +11610,7 @@
 </p:sld>
 </file>
 
-<file path=ppt/slides/slide2.xml><?xml version="1.0" encoding="utf-8"?>
-<p:sld xmlns:a="http://schemas.openxmlformats.org/drawingml/2006/main" xmlns:p="http://schemas.openxmlformats.org/presentationml/2006/main" xmlns:r="http://schemas.openxmlformats.org/officeDocument/2006/relationships">
-  <p:cSld>
-    <p:spTree>
-      <p:nvGrpSpPr>
-        <p:cNvPr id="1" name=""/>
-        <p:cNvGrpSpPr/>
-        <p:nvPr/>
-      </p:nvGrpSpPr>
-      <p:grpSpPr/>
-      <p:sp>
-        <p:nvSpPr>
-          <p:cNvPr id="2" name="TextBox 1"/>
-          <p:cNvSpPr txBox="1"/>
-          <p:nvPr/>
-        </p:nvSpPr>
-        <p:spPr>
-          <a:xfrm>
-            <a:off x="566928" y="420624"/>
-            <a:ext cx="11057839" cy="548640"/>
-          </a:xfrm>
-          <a:prstGeom prst="rect">
-            <a:avLst/>
-          </a:prstGeom>
-          <a:noFill/>
-        </p:spPr>
-        <p:txBody>
-          <a:bodyPr wrap="square" lIns="0" rIns="0" tIns="0" bIns="0">
-            <a:noAutofit/>
-          </a:bodyPr>
-          <a:lstStyle/>
-          <a:p>
-            <a:pPr algn="l">
-              <a:spcBef>
-                <a:spcPts val="0"/>
-              </a:spcBef>
-              <a:spcAft>
-                <a:spcPts val="0"/>
-              </a:spcAft>
-            </a:pPr>
-            <a:r>
-              <a:rPr sz="2600" b="1" i="0">
-                <a:solidFill>
-                  <a:srgbClr val="12395B"/>
-                </a:solidFill>
-                <a:latin typeface="Segoe UI"/>
-                <a:ea typeface="微软雅黑"/>
-              </a:rPr>
-              <a:t>什么是递归</a:t>
-            </a:r>
-          </a:p>
-        </p:txBody>
-      </p:sp>
-      <p:sp>
-        <p:nvSpPr>
-          <p:cNvPr id="3" name="Rectangle 2"/>
-          <p:cNvSpPr/>
-          <p:nvPr/>
-        </p:nvSpPr>
-        <p:spPr>
-          <a:xfrm>
-            <a:off x="566928" y="1060704"/>
-            <a:ext cx="960120" cy="40640"/>
-          </a:xfrm>
-          <a:prstGeom prst="rect">
-            <a:avLst/>
-          </a:prstGeom>
-          <a:solidFill>
-            <a:srgbClr val="E07B39"/>
-          </a:solidFill>
-          <a:ln>
-            <a:noFill/>
-          </a:ln>
-          <a:effectLst/>
-        </p:spPr>
-        <p:style>
-          <a:lnRef idx="1">
-            <a:schemeClr val="accent1"/>
-          </a:lnRef>
-          <a:fillRef idx="3">
-            <a:schemeClr val="accent1"/>
-          </a:fillRef>
-          <a:effectRef idx="2">
-            <a:schemeClr val="accent1"/>
-          </a:effectRef>
-          <a:fontRef idx="minor">
-            <a:schemeClr val="lt1"/>
-          </a:fontRef>
-        </p:style>
-        <p:txBody>
-          <a:bodyPr rtlCol="0" anchor="ctr"/>
-          <a:lstStyle/>
-          <a:p>
-            <a:pPr algn="ctr"/>
-          </a:p>
-        </p:txBody>
-      </p:sp>
-      <p:sp>
-        <p:nvSpPr>
-          <p:cNvPr id="4" name="Rectangle 3"/>
-          <p:cNvSpPr/>
-          <p:nvPr/>
-        </p:nvSpPr>
-        <p:spPr>
-          <a:xfrm>
-            <a:off x="566928" y="1298448"/>
-            <a:ext cx="11057839" cy="2070735"/>
-          </a:xfrm>
-          <a:prstGeom prst="rect">
-            <a:avLst/>
-          </a:prstGeom>
-          <a:solidFill>
-            <a:srgbClr val="F6F7F9"/>
-          </a:solidFill>
-          <a:ln w="9525">
-            <a:solidFill>
-              <a:srgbClr val="D6DCE4"/>
-            </a:solidFill>
-          </a:ln>
-          <a:effectLst/>
-        </p:spPr>
-        <p:style>
-          <a:lnRef idx="1">
-            <a:schemeClr val="accent1"/>
-          </a:lnRef>
-          <a:fillRef idx="3">
-            <a:schemeClr val="accent1"/>
-          </a:fillRef>
-          <a:effectRef idx="2">
-            <a:schemeClr val="accent1"/>
-          </a:effectRef>
-          <a:fontRef idx="minor">
-            <a:schemeClr val="lt1"/>
-          </a:fontRef>
-        </p:style>
-        <p:txBody>
-          <a:bodyPr rtlCol="0" anchor="ctr"/>
-          <a:lstStyle/>
-          <a:p>
-            <a:pPr algn="ctr"/>
-          </a:p>
-        </p:txBody>
-      </p:sp>
-      <p:sp>
-        <p:nvSpPr>
-          <p:cNvPr id="5" name="TextBox 4"/>
-          <p:cNvSpPr txBox="1"/>
-          <p:nvPr/>
-        </p:nvSpPr>
-        <p:spPr>
-          <a:xfrm>
-            <a:off x="822960" y="1399032"/>
-            <a:ext cx="10545775" cy="1869567"/>
-          </a:xfrm>
-          <a:prstGeom prst="rect">
-            <a:avLst/>
-          </a:prstGeom>
-          <a:noFill/>
-        </p:spPr>
-        <p:txBody>
-          <a:bodyPr wrap="square" lIns="0" rIns="0" tIns="0" bIns="0">
-            <a:noAutofit/>
-          </a:bodyPr>
-          <a:lstStyle/>
-          <a:p>
-            <a:pPr algn="l">
-              <a:lnSpc>
-                <a:spcPts val="2015"/>
-              </a:lnSpc>
-              <a:spcBef>
-                <a:spcPts val="0"/>
-              </a:spcBef>
-              <a:spcAft>
-                <a:spcPts val="0"/>
-              </a:spcAft>
-            </a:pPr>
-            <a:r>
-              <a:rPr sz="1550" b="0" i="0">
-                <a:solidFill>
-                  <a:srgbClr val="242A33"/>
-                </a:solidFill>
-                <a:latin typeface="Consolas"/>
-                <a:ea typeface="Consolas"/>
-              </a:rPr>
-              <a:t>def factorial(n):</a:t>
-            </a:r>
-          </a:p>
-          <a:p>
-            <a:pPr algn="l">
-              <a:lnSpc>
-                <a:spcPts val="2015"/>
-              </a:lnSpc>
-              <a:spcBef>
-                <a:spcPts val="0"/>
-              </a:spcBef>
-              <a:spcAft>
-                <a:spcPts val="0"/>
-              </a:spcAft>
-            </a:pPr>
-            <a:r>
-              <a:rPr sz="1550" b="0" i="0">
-                <a:solidFill>
-                  <a:srgbClr val="242A33"/>
-                </a:solidFill>
-                <a:latin typeface="Consolas"/>
-                <a:ea typeface="Consolas"/>
-              </a:rPr>
-              <a:t>    if n &lt;= 1:              # 基例（base case）</a:t>
-            </a:r>
-          </a:p>
-          <a:p>
-            <a:pPr algn="l">
-              <a:lnSpc>
-                <a:spcPts val="2015"/>
-              </a:lnSpc>
-              <a:spcBef>
-                <a:spcPts val="0"/>
-              </a:spcBef>
-              <a:spcAft>
-                <a:spcPts val="0"/>
-              </a:spcAft>
-            </a:pPr>
-            <a:r>
-              <a:rPr sz="1550" b="0" i="0">
-                <a:solidFill>
-                  <a:srgbClr val="242A33"/>
-                </a:solidFill>
-                <a:latin typeface="Consolas"/>
-                <a:ea typeface="Consolas"/>
-              </a:rPr>
-              <a:t>        return 1</a:t>
-            </a:r>
-          </a:p>
-          <a:p>
-            <a:pPr algn="l">
-              <a:lnSpc>
-                <a:spcPts val="2015"/>
-              </a:lnSpc>
-              <a:spcBef>
-                <a:spcPts val="0"/>
-              </a:spcBef>
-              <a:spcAft>
-                <a:spcPts val="0"/>
-              </a:spcAft>
-            </a:pPr>
-            <a:r>
-              <a:rPr sz="1550" b="0" i="0">
-                <a:solidFill>
-                  <a:srgbClr val="242A33"/>
-                </a:solidFill>
-                <a:latin typeface="Consolas"/>
-                <a:ea typeface="Consolas"/>
-              </a:rPr>
-              <a:t>    return n * factorial(n - 1)     # 递归调用，向基例逼近</a:t>
-            </a:r>
-          </a:p>
-          <a:p>
-            <a:pPr algn="l">
-              <a:lnSpc>
-                <a:spcPts val="2015"/>
-              </a:lnSpc>
-              <a:spcBef>
-                <a:spcPts val="0"/>
-              </a:spcBef>
-              <a:spcAft>
-                <a:spcPts val="0"/>
-              </a:spcAft>
-            </a:pPr>
-            <a:r>
-              <a:rPr sz="1550" b="0" i="0">
-                <a:solidFill>
-                  <a:srgbClr val="242A33"/>
-                </a:solidFill>
-                <a:latin typeface="Consolas"/>
-                <a:ea typeface="Consolas"/>
-              </a:rPr>
-              <a:t> </a:t>
-            </a:r>
-          </a:p>
-          <a:p>
-            <a:pPr algn="l">
-              <a:lnSpc>
-                <a:spcPts val="2015"/>
-              </a:lnSpc>
-              <a:spcBef>
-                <a:spcPts val="0"/>
-              </a:spcBef>
-              <a:spcAft>
-                <a:spcPts val="0"/>
-              </a:spcAft>
-            </a:pPr>
-            <a:r>
-              <a:rPr sz="1550" b="0" i="0">
-                <a:solidFill>
-                  <a:srgbClr val="242A33"/>
-                </a:solidFill>
-                <a:latin typeface="Consolas"/>
-                <a:ea typeface="Consolas"/>
-              </a:rPr>
-              <a:t> </a:t>
-            </a:r>
-          </a:p>
-          <a:p>
-            <a:pPr algn="l">
-              <a:lnSpc>
-                <a:spcPts val="2015"/>
-              </a:lnSpc>
-              <a:spcBef>
-                <a:spcPts val="0"/>
-              </a:spcBef>
-              <a:spcAft>
-                <a:spcPts val="0"/>
-              </a:spcAft>
-            </a:pPr>
-            <a:r>
-              <a:rPr sz="1550" b="0" i="0">
-                <a:solidFill>
-                  <a:srgbClr val="242A33"/>
-                </a:solidFill>
-                <a:latin typeface="Consolas"/>
-                <a:ea typeface="Consolas"/>
-              </a:rPr>
-              <a:t>print(factorial(5))         # 120</a:t>
-            </a:r>
-          </a:p>
-        </p:txBody>
-      </p:sp>
-      <p:sp>
-        <p:nvSpPr>
-          <p:cNvPr id="6" name="TextBox 5"/>
-          <p:cNvSpPr txBox="1"/>
-          <p:nvPr/>
-        </p:nvSpPr>
-        <p:spPr>
-          <a:xfrm>
-            <a:off x="566928" y="3488055"/>
-            <a:ext cx="11057839" cy="329184"/>
-          </a:xfrm>
-          <a:prstGeom prst="rect">
-            <a:avLst/>
-          </a:prstGeom>
-          <a:noFill/>
-        </p:spPr>
-        <p:txBody>
-          <a:bodyPr wrap="square" lIns="0" rIns="0" tIns="0" bIns="0">
-            <a:noAutofit/>
-          </a:bodyPr>
-          <a:lstStyle/>
-          <a:p>
-            <a:pPr algn="l">
-              <a:spcBef>
-                <a:spcPts val="0"/>
-              </a:spcBef>
-              <a:spcAft>
-                <a:spcPts val="0"/>
-              </a:spcAft>
-            </a:pPr>
-            <a:r>
-              <a:rPr sz="1300" b="0" i="0">
-                <a:solidFill>
-                  <a:srgbClr val="6B7582"/>
-                </a:solidFill>
-                <a:latin typeface="Segoe UI"/>
-                <a:ea typeface="微软雅黑"/>
-              </a:rPr>
-              <a:t>递归：函数在自己的定义中调用自己</a:t>
-            </a:r>
-          </a:p>
-        </p:txBody>
-      </p:sp>
-      <p:sp>
-        <p:nvSpPr>
-          <p:cNvPr id="7" name="TextBox 6"/>
-          <p:cNvSpPr txBox="1"/>
-          <p:nvPr/>
-        </p:nvSpPr>
-        <p:spPr>
-          <a:xfrm>
-            <a:off x="566928" y="6327648"/>
-            <a:ext cx="8229600" cy="310896"/>
-          </a:xfrm>
-          <a:prstGeom prst="rect">
-            <a:avLst/>
-          </a:prstGeom>
-          <a:noFill/>
-        </p:spPr>
-        <p:txBody>
-          <a:bodyPr wrap="square" lIns="0" rIns="0" tIns="0" bIns="0">
-            <a:noAutofit/>
-          </a:bodyPr>
-          <a:lstStyle/>
-          <a:p>
-            <a:pPr algn="l">
-              <a:spcBef>
-                <a:spcPts val="0"/>
-              </a:spcBef>
-              <a:spcAft>
-                <a:spcPts val="0"/>
-              </a:spcAft>
-            </a:pPr>
-            <a:r>
-              <a:rPr sz="1000" b="0" i="0">
-                <a:solidFill>
-                  <a:srgbClr val="6B7582"/>
-                </a:solidFill>
-                <a:latin typeface="Segoe UI"/>
-                <a:ea typeface="微软雅黑"/>
-              </a:rPr>
-              <a:t>计算概论（B） · 第8周 · 闫宏飞 · 2026 Fall</a:t>
-            </a:r>
-          </a:p>
-        </p:txBody>
-      </p:sp>
-      <p:sp>
-        <p:nvSpPr>
-          <p:cNvPr id="8" name="TextBox 7"/>
-          <p:cNvSpPr txBox="1"/>
-          <p:nvPr/>
-        </p:nvSpPr>
-        <p:spPr>
-          <a:xfrm>
-            <a:off x="10710367" y="6327648"/>
-            <a:ext cx="914400" cy="310896"/>
-          </a:xfrm>
-          <a:prstGeom prst="rect">
-            <a:avLst/>
-          </a:prstGeom>
-          <a:noFill/>
-        </p:spPr>
-        <p:txBody>
-          <a:bodyPr wrap="square" lIns="0" rIns="0" tIns="0" bIns="0">
-            <a:noAutofit/>
-          </a:bodyPr>
-          <a:lstStyle/>
-          <a:p>
-            <a:pPr algn="r">
-              <a:spcBef>
-                <a:spcPts val="0"/>
-              </a:spcBef>
-              <a:spcAft>
-                <a:spcPts val="0"/>
-              </a:spcAft>
-            </a:pPr>
-            <a:r>
-              <a:rPr sz="1000" b="0" i="0">
-                <a:solidFill>
-                  <a:srgbClr val="6B7582"/>
-                </a:solidFill>
-                <a:latin typeface="Segoe UI"/>
-                <a:ea typeface="微软雅黑"/>
-              </a:rPr>
-              <a:t>2</a:t>
-            </a:r>
-          </a:p>
-        </p:txBody>
-      </p:sp>
-    </p:spTree>
-  </p:cSld>
-  <p:clrMapOvr>
-    <a:masterClrMapping/>
-  </p:clrMapOvr>
-</p:sld>
-</file>
-
-<file path=ppt/slides/slide20.xml><?xml version="1.0" encoding="utf-8"?>
+<file path=ppt/slides/slide23.xml><?xml version="1.0" encoding="utf-8"?>
 <p:sld xmlns:a="http://schemas.openxmlformats.org/drawingml/2006/main" xmlns:p="http://schemas.openxmlformats.org/presentationml/2006/main" xmlns:r="http://schemas.openxmlformats.org/officeDocument/2006/relationships">
   <p:cSld>
     <p:spTree>
@@ -10073,7 +12107,7 @@
                 <a:latin typeface="Segoe UI"/>
                 <a:ea typeface="微软雅黑"/>
               </a:rPr>
-              <a:t>20</a:t>
+              <a:t>23</a:t>
             </a:r>
           </a:p>
         </p:txBody>
@@ -10086,7 +12120,7 @@
 </p:sld>
 </file>
 
-<file path=ppt/slides/slide21.xml><?xml version="1.0" encoding="utf-8"?>
+<file path=ppt/slides/slide24.xml><?xml version="1.0" encoding="utf-8"?>
 <p:sld xmlns:a="http://schemas.openxmlformats.org/drawingml/2006/main" xmlns:p="http://schemas.openxmlformats.org/presentationml/2006/main" xmlns:r="http://schemas.openxmlformats.org/officeDocument/2006/relationships">
   <p:cSld>
     <p:spTree>
@@ -10255,7 +12289,7 @@
 </p:sld>
 </file>
 
-<file path=ppt/slides/slide22.xml><?xml version="1.0" encoding="utf-8"?>
+<file path=ppt/slides/slide25.xml><?xml version="1.0" encoding="utf-8"?>
 <p:sld xmlns:a="http://schemas.openxmlformats.org/drawingml/2006/main" xmlns:p="http://schemas.openxmlformats.org/presentationml/2006/main" xmlns:r="http://schemas.openxmlformats.org/officeDocument/2006/relationships">
   <p:cSld>
     <p:spTree>
@@ -10844,7 +12878,7 @@
                 <a:latin typeface="Segoe UI"/>
                 <a:ea typeface="微软雅黑"/>
               </a:rPr>
-              <a:t>22</a:t>
+              <a:t>25</a:t>
             </a:r>
           </a:p>
         </p:txBody>
@@ -10857,7 +12891,7 @@
 </p:sld>
 </file>
 
-<file path=ppt/slides/slide23.xml><?xml version="1.0" encoding="utf-8"?>
+<file path=ppt/slides/slide26.xml><?xml version="1.0" encoding="utf-8"?>
 <p:sld xmlns:a="http://schemas.openxmlformats.org/drawingml/2006/main" xmlns:p="http://schemas.openxmlformats.org/presentationml/2006/main" xmlns:r="http://schemas.openxmlformats.org/officeDocument/2006/relationships">
   <p:cSld>
     <p:spTree>
@@ -10973,8 +13007,8 @@
                 <a:tableStyleId>{5C22544A-7EE6-4342-B048-85BDC9FD1C3A}</a:tableStyleId>
               </a:tblPr>
               <a:tblGrid>
-                <a:gridCol w="3932811"/>
-                <a:gridCol w="7125027"/>
+                <a:gridCol w="2812959"/>
+                <a:gridCol w="8244879"/>
               </a:tblGrid>
               <a:tr h="439420">
                 <a:tc>
@@ -11351,7 +13385,7 @@
                           <a:latin typeface="Segoe UI"/>
                           <a:ea typeface="微软雅黑"/>
                         </a:rPr>
-                        <a:t>RE（评测机上）</a:t>
+                        <a:t>RE（且没有 traceback）</a:t>
                       </a:r>
                     </a:p>
                   </a:txBody>
@@ -11385,7 +13419,17 @@
                           <a:latin typeface="Segoe UI"/>
                           <a:ea typeface="微软雅黑"/>
                         </a:rPr>
-                        <a:t>递归太深，C 栈溢出</a:t>
+                        <a:t>递归太深撞穿 C 栈（墙二）；新版 CPython 上更常见的表现是 </a:t>
+                      </a:r>
+                      <a:r>
+                        <a:rPr sz="1597" b="0" i="0">
+                          <a:solidFill>
+                            <a:srgbClr val="242A33"/>
+                          </a:solidFill>
+                          <a:latin typeface="Consolas"/>
+                          <a:ea typeface="Consolas"/>
+                        </a:rPr>
+                        <a:t>RecursionError</a:t>
                       </a:r>
                     </a:p>
                   </a:txBody>
@@ -11481,7 +13525,7 @@
                 <a:latin typeface="Segoe UI"/>
                 <a:ea typeface="微软雅黑"/>
               </a:rPr>
-              <a:t>23</a:t>
+              <a:t>26</a:t>
             </a:r>
           </a:p>
         </p:txBody>
@@ -11494,7 +13538,7 @@
 </p:sld>
 </file>
 
-<file path=ppt/slides/slide24.xml><?xml version="1.0" encoding="utf-8"?>
+<file path=ppt/slides/slide27.xml><?xml version="1.0" encoding="utf-8"?>
 <p:sld xmlns:a="http://schemas.openxmlformats.org/drawingml/2006/main" xmlns:p="http://schemas.openxmlformats.org/presentationml/2006/main" xmlns:r="http://schemas.openxmlformats.org/officeDocument/2006/relationships">
   <p:cSld>
     <p:spTree>
@@ -12804,7 +14848,7 @@
                 <a:latin typeface="Segoe UI"/>
                 <a:ea typeface="微软雅黑"/>
               </a:rPr>
-              <a:t>24</a:t>
+              <a:t>27</a:t>
             </a:r>
           </a:p>
         </p:txBody>
@@ -12817,7 +14861,7 @@
 </p:sld>
 </file>
 
-<file path=ppt/slides/slide25.xml><?xml version="1.0" encoding="utf-8"?>
+<file path=ppt/slides/slide28.xml><?xml version="1.0" encoding="utf-8"?>
 <p:sld xmlns:a="http://schemas.openxmlformats.org/drawingml/2006/main" xmlns:p="http://schemas.openxmlformats.org/presentationml/2006/main" xmlns:r="http://schemas.openxmlformats.org/officeDocument/2006/relationships">
   <p:cSld>
     <p:spTree>
@@ -12998,7 +15042,7 @@
                 <a:latin typeface="Segoe UI"/>
                 <a:ea typeface="微软雅黑"/>
               </a:rPr>
-              <a:t>•  递归就是在用</a:t>
+              <a:t>•  递归深度有</a:t>
             </a:r>
             <a:r>
               <a:rPr sz="2000" b="1" i="0">
@@ -13008,7 +15052,7 @@
                 <a:latin typeface="Segoe UI"/>
                 <a:ea typeface="微软雅黑"/>
               </a:rPr>
-              <a:t>系统栈</a:t>
+              <a:t>两道墙</a:t>
             </a:r>
             <a:r>
               <a:rPr sz="2000" b="0" i="0">
@@ -13018,7 +15062,90 @@
                 <a:latin typeface="Segoe UI"/>
                 <a:ea typeface="微软雅黑"/>
               </a:rPr>
-              <a:t>；深递归要么改迭代，要么开线程加大栈</a:t>
+              <a:t>：Python 层计数器（</a:t>
+            </a:r>
+            <a:r>
+              <a:rPr sz="1879" b="0" i="0">
+                <a:solidFill>
+                  <a:srgbClr val="242A33"/>
+                </a:solidFill>
+                <a:latin typeface="Consolas"/>
+                <a:ea typeface="Consolas"/>
+              </a:rPr>
+              <a:t>setrecursionlimit</a:t>
+            </a:r>
+            <a:r>
+              <a:rPr sz="2000" b="0" i="0">
+                <a:solidFill>
+                  <a:srgbClr val="242A33"/>
+                </a:solidFill>
+                <a:latin typeface="Segoe UI"/>
+                <a:ea typeface="微软雅黑"/>
+              </a:rPr>
+              <a:t> 管得到）与 </a:t>
+            </a:r>
+            <a:r>
+              <a:rPr sz="2000" b="1" i="0">
+                <a:solidFill>
+                  <a:srgbClr val="12395B"/>
+                </a:solidFill>
+                <a:latin typeface="Segoe UI"/>
+                <a:ea typeface="微软雅黑"/>
+              </a:rPr>
+              <a:t>C 调用栈</a:t>
+            </a:r>
+            <a:r>
+              <a:rPr sz="2000" b="0" i="0">
+                <a:solidFill>
+                  <a:srgbClr val="242A33"/>
+                </a:solidFill>
+                <a:latin typeface="Segoe UI"/>
+                <a:ea typeface="微软雅黑"/>
+              </a:rPr>
+              <a:t>（管不到）</a:t>
+            </a:r>
+          </a:p>
+          <a:p>
+            <a:pPr algn="l">
+              <a:lnSpc>
+                <a:spcPct val="132000"/>
+              </a:lnSpc>
+              <a:spcBef>
+                <a:spcPts val="0"/>
+              </a:spcBef>
+              <a:spcAft>
+                <a:spcPts val="1240"/>
+              </a:spcAft>
+            </a:pPr>
+            <a:r>
+              <a:rPr sz="2000" b="0" i="0">
+                <a:solidFill>
+                  <a:srgbClr val="242A33"/>
+                </a:solidFill>
+                <a:latin typeface="Segoe UI"/>
+                <a:ea typeface="微软雅黑"/>
+              </a:rPr>
+              <a:t>•  </a:t>
+            </a:r>
+            <a:r>
+              <a:rPr sz="2000" b="1" i="0">
+                <a:solidFill>
+                  <a:srgbClr val="12395B"/>
+                </a:solidFill>
+                <a:latin typeface="Segoe UI"/>
+                <a:ea typeface="微软雅黑"/>
+              </a:rPr>
+              <a:t>深递归唯一可靠的解法是显式栈</a:t>
+            </a:r>
+            <a:r>
+              <a:rPr sz="2000" b="0" i="0">
+                <a:solidFill>
+                  <a:srgbClr val="242A33"/>
+                </a:solidFill>
+                <a:latin typeface="Segoe UI"/>
+                <a:ea typeface="微软雅黑"/>
+              </a:rPr>
+              <a:t>；另外两招都要看版本和评测机的脸色</a:t>
             </a:r>
           </a:p>
           <a:p>
@@ -13303,7 +15430,7 @@
                 <a:latin typeface="Segoe UI"/>
                 <a:ea typeface="微软雅黑"/>
               </a:rPr>
-              <a:t>25</a:t>
+              <a:t>28</a:t>
             </a:r>
           </a:p>
         </p:txBody>
@@ -13316,7 +15443,7 @@
 </p:sld>
 </file>
 
-<file path=ppt/slides/slide26.xml><?xml version="1.0" encoding="utf-8"?>
+<file path=ppt/slides/slide29.xml><?xml version="1.0" encoding="utf-8"?>
 <p:sld xmlns:a="http://schemas.openxmlformats.org/drawingml/2006/main" xmlns:p="http://schemas.openxmlformats.org/presentationml/2006/main" xmlns:r="http://schemas.openxmlformats.org/officeDocument/2006/relationships">
   <p:cSld>
     <p:spTree>
@@ -13628,7 +15755,7 @@
                 <a:latin typeface="Segoe UI"/>
                 <a:ea typeface="微软雅黑"/>
               </a:rPr>
-              <a:t>26</a:t>
+              <a:t>29</a:t>
             </a:r>
           </a:p>
         </p:txBody>
@@ -16243,7 +18370,7 @@
                 <a:latin typeface="Segoe UI"/>
                 <a:ea typeface="微软雅黑"/>
               </a:rPr>
-              <a:t>Python 的递归深度限制与兜底</a:t>
+              <a:t>递归深度限制：其实有两道墙</a:t>
             </a:r>
           </a:p>
         </p:txBody>
@@ -16292,52 +18419,498 @@
           </a:p>
         </p:txBody>
       </p:sp>
-      <p:sp>
-        <p:nvSpPr>
-          <p:cNvPr id="4" name="Rectangle 3"/>
-          <p:cNvSpPr/>
+      <p:graphicFrame>
+        <p:nvGraphicFramePr>
+          <p:cNvPr id="4" name="Table 3"/>
+          <p:cNvGraphicFramePr>
+            <a:graphicFrameLocks noGrp="1"/>
+          </p:cNvGraphicFramePr>
           <p:nvPr/>
-        </p:nvSpPr>
-        <p:spPr>
-          <a:xfrm>
-            <a:off x="566928" y="1298448"/>
-            <a:ext cx="11057839" cy="4373880"/>
-          </a:xfrm>
-          <a:prstGeom prst="rect">
-            <a:avLst/>
-          </a:prstGeom>
-          <a:solidFill>
-            <a:srgbClr val="F6F7F9"/>
-          </a:solidFill>
-          <a:ln w="9525">
-            <a:solidFill>
-              <a:srgbClr val="D6DCE4"/>
-            </a:solidFill>
-          </a:ln>
-          <a:effectLst/>
-        </p:spPr>
-        <p:style>
-          <a:lnRef idx="1">
-            <a:schemeClr val="accent1"/>
-          </a:lnRef>
-          <a:fillRef idx="3">
-            <a:schemeClr val="accent1"/>
-          </a:fillRef>
-          <a:effectRef idx="2">
-            <a:schemeClr val="accent1"/>
-          </a:effectRef>
-          <a:fontRef idx="minor">
-            <a:schemeClr val="lt1"/>
-          </a:fontRef>
-        </p:style>
-        <p:txBody>
-          <a:bodyPr rtlCol="0" anchor="ctr"/>
-          <a:lstStyle/>
-          <a:p>
-            <a:pPr algn="ctr"/>
-          </a:p>
-        </p:txBody>
-      </p:sp>
+        </p:nvGraphicFramePr>
+        <p:xfrm>
+          <a:off x="566928" y="1298448"/>
+          <a:ext cx="11057838" cy="1318260"/>
+        </p:xfrm>
+        <a:graphic>
+          <a:graphicData uri="http://schemas.openxmlformats.org/drawingml/2006/table">
+            <a:tbl>
+              <a:tblPr firstRow="1" bandRow="1">
+                <a:tableStyleId>{5C22544A-7EE6-4342-B048-85BDC9FD1C3A}</a:tableStyleId>
+              </a:tblPr>
+              <a:tblGrid>
+                <a:gridCol w="982919"/>
+                <a:gridCol w="3403357"/>
+                <a:gridCol w="3255919"/>
+                <a:gridCol w="3415643"/>
+              </a:tblGrid>
+              <a:tr h="439420">
+                <a:tc>
+                  <a:txBody>
+                    <a:bodyPr wrap="square"/>
+                    <a:lstStyle/>
+                    <a:p>
+                      <a:pPr algn="l">
+                        <a:lnSpc>
+                          <a:spcPct val="122000"/>
+                        </a:lnSpc>
+                        <a:spcBef>
+                          <a:spcPts val="0"/>
+                        </a:spcBef>
+                        <a:spcAft>
+                          <a:spcPts val="0"/>
+                        </a:spcAft>
+                      </a:pPr>
+                    </a:p>
+                  </a:txBody>
+                  <a:tcPr marL="100584" marR="100584" marT="27432" marB="27432" anchor="ctr">
+                    <a:solidFill>
+                      <a:srgbClr val="12395B"/>
+                    </a:solidFill>
+                  </a:tcPr>
+                </a:tc>
+                <a:tc>
+                  <a:txBody>
+                    <a:bodyPr wrap="square"/>
+                    <a:lstStyle/>
+                    <a:p>
+                      <a:pPr algn="l">
+                        <a:lnSpc>
+                          <a:spcPct val="122000"/>
+                        </a:lnSpc>
+                        <a:spcBef>
+                          <a:spcPts val="0"/>
+                        </a:spcBef>
+                        <a:spcAft>
+                          <a:spcPts val="0"/>
+                        </a:spcAft>
+                      </a:pPr>
+                      <a:r>
+                        <a:rPr sz="1700" b="1" i="0">
+                          <a:solidFill>
+                            <a:srgbClr val="FFFFFF"/>
+                          </a:solidFill>
+                          <a:latin typeface="Segoe UI"/>
+                          <a:ea typeface="微软雅黑"/>
+                        </a:rPr>
+                        <a:t>是什么</a:t>
+                      </a:r>
+                    </a:p>
+                  </a:txBody>
+                  <a:tcPr marL="100584" marR="100584" marT="27432" marB="27432" anchor="ctr">
+                    <a:solidFill>
+                      <a:srgbClr val="12395B"/>
+                    </a:solidFill>
+                  </a:tcPr>
+                </a:tc>
+                <a:tc>
+                  <a:txBody>
+                    <a:bodyPr wrap="square"/>
+                    <a:lstStyle/>
+                    <a:p>
+                      <a:pPr algn="l">
+                        <a:lnSpc>
+                          <a:spcPct val="122000"/>
+                        </a:lnSpc>
+                        <a:spcBef>
+                          <a:spcPts val="0"/>
+                        </a:spcBef>
+                        <a:spcAft>
+                          <a:spcPts val="0"/>
+                        </a:spcAft>
+                      </a:pPr>
+                      <a:r>
+                        <a:rPr sz="1700" b="1" i="0">
+                          <a:solidFill>
+                            <a:srgbClr val="FFFFFF"/>
+                          </a:solidFill>
+                          <a:latin typeface="Segoe UI"/>
+                          <a:ea typeface="微软雅黑"/>
+                        </a:rPr>
+                        <a:t>撞上去会怎样</a:t>
+                      </a:r>
+                    </a:p>
+                  </a:txBody>
+                  <a:tcPr marL="100584" marR="100584" marT="27432" marB="27432" anchor="ctr">
+                    <a:solidFill>
+                      <a:srgbClr val="12395B"/>
+                    </a:solidFill>
+                  </a:tcPr>
+                </a:tc>
+                <a:tc>
+                  <a:txBody>
+                    <a:bodyPr wrap="square"/>
+                    <a:lstStyle/>
+                    <a:p>
+                      <a:pPr algn="l">
+                        <a:lnSpc>
+                          <a:spcPct val="122000"/>
+                        </a:lnSpc>
+                        <a:spcBef>
+                          <a:spcPts val="0"/>
+                        </a:spcBef>
+                        <a:spcAft>
+                          <a:spcPts val="0"/>
+                        </a:spcAft>
+                      </a:pPr>
+                      <a:r>
+                        <a:rPr sz="1597" b="1" i="0">
+                          <a:solidFill>
+                            <a:srgbClr val="FFFFFF"/>
+                          </a:solidFill>
+                          <a:latin typeface="Consolas"/>
+                          <a:ea typeface="Consolas"/>
+                        </a:rPr>
+                        <a:t>setrecursionlimit</a:t>
+                      </a:r>
+                      <a:r>
+                        <a:rPr sz="1700" b="1" i="0">
+                          <a:solidFill>
+                            <a:srgbClr val="FFFFFF"/>
+                          </a:solidFill>
+                          <a:latin typeface="Segoe UI"/>
+                          <a:ea typeface="微软雅黑"/>
+                        </a:rPr>
+                        <a:t> 管得到吗</a:t>
+                      </a:r>
+                    </a:p>
+                  </a:txBody>
+                  <a:tcPr marL="100584" marR="100584" marT="27432" marB="27432" anchor="ctr">
+                    <a:solidFill>
+                      <a:srgbClr val="12395B"/>
+                    </a:solidFill>
+                  </a:tcPr>
+                </a:tc>
+              </a:tr>
+              <a:tr h="439420">
+                <a:tc>
+                  <a:txBody>
+                    <a:bodyPr wrap="square"/>
+                    <a:lstStyle/>
+                    <a:p>
+                      <a:pPr algn="l">
+                        <a:lnSpc>
+                          <a:spcPct val="122000"/>
+                        </a:lnSpc>
+                        <a:spcBef>
+                          <a:spcPts val="0"/>
+                        </a:spcBef>
+                        <a:spcAft>
+                          <a:spcPts val="0"/>
+                        </a:spcAft>
+                      </a:pPr>
+                      <a:r>
+                        <a:rPr sz="1700" b="1" i="0">
+                          <a:solidFill>
+                            <a:srgbClr val="12395B"/>
+                          </a:solidFill>
+                          <a:latin typeface="Segoe UI"/>
+                          <a:ea typeface="微软雅黑"/>
+                        </a:rPr>
+                        <a:t>墙一</a:t>
+                      </a:r>
+                    </a:p>
+                  </a:txBody>
+                  <a:tcPr marL="100584" marR="100584" marT="27432" marB="27432" anchor="ctr">
+                    <a:solidFill>
+                      <a:srgbClr val="FFFFFF"/>
+                    </a:solidFill>
+                  </a:tcPr>
+                </a:tc>
+                <a:tc>
+                  <a:txBody>
+                    <a:bodyPr wrap="square"/>
+                    <a:lstStyle/>
+                    <a:p>
+                      <a:pPr algn="l">
+                        <a:lnSpc>
+                          <a:spcPct val="122000"/>
+                        </a:lnSpc>
+                        <a:spcBef>
+                          <a:spcPts val="0"/>
+                        </a:spcBef>
+                        <a:spcAft>
+                          <a:spcPts val="0"/>
+                        </a:spcAft>
+                      </a:pPr>
+                      <a:r>
+                        <a:rPr sz="1700" b="0" i="0">
+                          <a:solidFill>
+                            <a:srgbClr val="242A33"/>
+                          </a:solidFill>
+                          <a:latin typeface="Segoe UI"/>
+                          <a:ea typeface="微软雅黑"/>
+                        </a:rPr>
+                        <a:t>解释器自己数的嵌套层数</a:t>
+                      </a:r>
+                    </a:p>
+                  </a:txBody>
+                  <a:tcPr marL="100584" marR="100584" marT="27432" marB="27432" anchor="ctr">
+                    <a:solidFill>
+                      <a:srgbClr val="FFFFFF"/>
+                    </a:solidFill>
+                  </a:tcPr>
+                </a:tc>
+                <a:tc>
+                  <a:txBody>
+                    <a:bodyPr wrap="square"/>
+                    <a:lstStyle/>
+                    <a:p>
+                      <a:pPr algn="l">
+                        <a:lnSpc>
+                          <a:spcPct val="122000"/>
+                        </a:lnSpc>
+                        <a:spcBef>
+                          <a:spcPts val="0"/>
+                        </a:spcBef>
+                        <a:spcAft>
+                          <a:spcPts val="0"/>
+                        </a:spcAft>
+                      </a:pPr>
+                      <a:r>
+                        <a:rPr sz="1700" b="0" i="0">
+                          <a:solidFill>
+                            <a:srgbClr val="242A33"/>
+                          </a:solidFill>
+                          <a:latin typeface="Segoe UI"/>
+                          <a:ea typeface="微软雅黑"/>
+                        </a:rPr>
+                        <a:t>抛 </a:t>
+                      </a:r>
+                      <a:r>
+                        <a:rPr sz="1597" b="0" i="0">
+                          <a:solidFill>
+                            <a:srgbClr val="242A33"/>
+                          </a:solidFill>
+                          <a:latin typeface="Consolas"/>
+                          <a:ea typeface="Consolas"/>
+                        </a:rPr>
+                        <a:t>RecursionError</a:t>
+                      </a:r>
+                      <a:r>
+                        <a:rPr sz="1700" b="0" i="0">
+                          <a:solidFill>
+                            <a:srgbClr val="242A33"/>
+                          </a:solidFill>
+                          <a:latin typeface="Segoe UI"/>
+                          <a:ea typeface="微软雅黑"/>
+                        </a:rPr>
+                        <a:t>，</a:t>
+                      </a:r>
+                      <a:r>
+                        <a:rPr sz="1700" b="1" i="0">
+                          <a:solidFill>
+                            <a:srgbClr val="12395B"/>
+                          </a:solidFill>
+                          <a:latin typeface="Segoe UI"/>
+                          <a:ea typeface="微软雅黑"/>
+                        </a:rPr>
+                        <a:t>看得懂</a:t>
+                      </a:r>
+                    </a:p>
+                  </a:txBody>
+                  <a:tcPr marL="100584" marR="100584" marT="27432" marB="27432" anchor="ctr">
+                    <a:solidFill>
+                      <a:srgbClr val="FFFFFF"/>
+                    </a:solidFill>
+                  </a:tcPr>
+                </a:tc>
+                <a:tc>
+                  <a:txBody>
+                    <a:bodyPr wrap="square"/>
+                    <a:lstStyle/>
+                    <a:p>
+                      <a:pPr algn="l">
+                        <a:lnSpc>
+                          <a:spcPct val="122000"/>
+                        </a:lnSpc>
+                        <a:spcBef>
+                          <a:spcPts val="0"/>
+                        </a:spcBef>
+                        <a:spcAft>
+                          <a:spcPts val="0"/>
+                        </a:spcAft>
+                      </a:pPr>
+                      <a:r>
+                        <a:rPr sz="1700" b="0" i="0">
+                          <a:solidFill>
+                            <a:srgbClr val="242A33"/>
+                          </a:solidFill>
+                          <a:latin typeface="Segoe UI"/>
+                          <a:ea typeface="微软雅黑"/>
+                        </a:rPr>
+                        <a:t>✅ 管得到</a:t>
+                      </a:r>
+                    </a:p>
+                  </a:txBody>
+                  <a:tcPr marL="100584" marR="100584" marT="27432" marB="27432" anchor="ctr">
+                    <a:solidFill>
+                      <a:srgbClr val="FFFFFF"/>
+                    </a:solidFill>
+                  </a:tcPr>
+                </a:tc>
+              </a:tr>
+              <a:tr h="439420">
+                <a:tc>
+                  <a:txBody>
+                    <a:bodyPr wrap="square"/>
+                    <a:lstStyle/>
+                    <a:p>
+                      <a:pPr algn="l">
+                        <a:lnSpc>
+                          <a:spcPct val="122000"/>
+                        </a:lnSpc>
+                        <a:spcBef>
+                          <a:spcPts val="0"/>
+                        </a:spcBef>
+                        <a:spcAft>
+                          <a:spcPts val="0"/>
+                        </a:spcAft>
+                      </a:pPr>
+                      <a:r>
+                        <a:rPr sz="1700" b="1" i="0">
+                          <a:solidFill>
+                            <a:srgbClr val="12395B"/>
+                          </a:solidFill>
+                          <a:latin typeface="Segoe UI"/>
+                          <a:ea typeface="微软雅黑"/>
+                        </a:rPr>
+                        <a:t>墙二</a:t>
+                      </a:r>
+                    </a:p>
+                  </a:txBody>
+                  <a:tcPr marL="100584" marR="100584" marT="27432" marB="27432" anchor="ctr">
+                    <a:solidFill>
+                      <a:srgbClr val="F2F4F7"/>
+                    </a:solidFill>
+                  </a:tcPr>
+                </a:tc>
+                <a:tc>
+                  <a:txBody>
+                    <a:bodyPr wrap="square"/>
+                    <a:lstStyle/>
+                    <a:p>
+                      <a:pPr algn="l">
+                        <a:lnSpc>
+                          <a:spcPct val="122000"/>
+                        </a:lnSpc>
+                        <a:spcBef>
+                          <a:spcPts val="0"/>
+                        </a:spcBef>
+                        <a:spcAft>
+                          <a:spcPts val="0"/>
+                        </a:spcAft>
+                      </a:pPr>
+                      <a:r>
+                        <a:rPr sz="1700" b="1" i="0">
+                          <a:solidFill>
+                            <a:srgbClr val="12395B"/>
+                          </a:solidFill>
+                          <a:latin typeface="Segoe UI"/>
+                          <a:ea typeface="微软雅黑"/>
+                        </a:rPr>
+                        <a:t>C 调用栈</a:t>
+                      </a:r>
+                      <a:r>
+                        <a:rPr sz="1700" b="0" i="0">
+                          <a:solidFill>
+                            <a:srgbClr val="242A33"/>
+                          </a:solidFill>
+                          <a:latin typeface="Segoe UI"/>
+                          <a:ea typeface="微软雅黑"/>
+                        </a:rPr>
+                        <a:t>（主线程通常 8 MB）</a:t>
+                      </a:r>
+                    </a:p>
+                  </a:txBody>
+                  <a:tcPr marL="100584" marR="100584" marT="27432" marB="27432" anchor="ctr">
+                    <a:solidFill>
+                      <a:srgbClr val="F2F4F7"/>
+                    </a:solidFill>
+                  </a:tcPr>
+                </a:tc>
+                <a:tc>
+                  <a:txBody>
+                    <a:bodyPr wrap="square"/>
+                    <a:lstStyle/>
+                    <a:p>
+                      <a:pPr algn="l">
+                        <a:lnSpc>
+                          <a:spcPct val="122000"/>
+                        </a:lnSpc>
+                        <a:spcBef>
+                          <a:spcPts val="0"/>
+                        </a:spcBef>
+                        <a:spcAft>
+                          <a:spcPts val="0"/>
+                        </a:spcAft>
+                      </a:pPr>
+                      <a:r>
+                        <a:rPr sz="1700" b="1" i="0">
+                          <a:solidFill>
+                            <a:srgbClr val="12395B"/>
+                          </a:solidFill>
+                          <a:latin typeface="Segoe UI"/>
+                          <a:ea typeface="微软雅黑"/>
+                        </a:rPr>
+                        <a:t>段错误</a:t>
+                      </a:r>
+                      <a:r>
+                        <a:rPr sz="1700" b="0" i="0">
+                          <a:solidFill>
+                            <a:srgbClr val="242A33"/>
+                          </a:solidFill>
+                          <a:latin typeface="Segoe UI"/>
+                          <a:ea typeface="微软雅黑"/>
+                        </a:rPr>
+                        <a:t>，进程直接死</a:t>
+                      </a:r>
+                    </a:p>
+                  </a:txBody>
+                  <a:tcPr marL="100584" marR="100584" marT="27432" marB="27432" anchor="ctr">
+                    <a:solidFill>
+                      <a:srgbClr val="F2F4F7"/>
+                    </a:solidFill>
+                  </a:tcPr>
+                </a:tc>
+                <a:tc>
+                  <a:txBody>
+                    <a:bodyPr wrap="square"/>
+                    <a:lstStyle/>
+                    <a:p>
+                      <a:pPr algn="l">
+                        <a:lnSpc>
+                          <a:spcPct val="122000"/>
+                        </a:lnSpc>
+                        <a:spcBef>
+                          <a:spcPts val="0"/>
+                        </a:spcBef>
+                        <a:spcAft>
+                          <a:spcPts val="0"/>
+                        </a:spcAft>
+                      </a:pPr>
+                      <a:r>
+                        <a:rPr sz="1700" b="0" i="0">
+                          <a:solidFill>
+                            <a:srgbClr val="242A33"/>
+                          </a:solidFill>
+                          <a:latin typeface="Segoe UI"/>
+                          <a:ea typeface="微软雅黑"/>
+                        </a:rPr>
+                        <a:t>❌ 管不到</a:t>
+                      </a:r>
+                    </a:p>
+                  </a:txBody>
+                  <a:tcPr marL="100584" marR="100584" marT="27432" marB="27432" anchor="ctr">
+                    <a:solidFill>
+                      <a:srgbClr val="F2F4F7"/>
+                    </a:solidFill>
+                  </a:tcPr>
+                </a:tc>
+              </a:tr>
+            </a:tbl>
+          </a:graphicData>
+        </a:graphic>
+      </p:graphicFrame>
       <p:sp>
         <p:nvSpPr>
           <p:cNvPr id="5" name="TextBox 4"/>
@@ -16346,398 +18919,7 @@
         </p:nvSpPr>
         <p:spPr>
           <a:xfrm>
-            <a:off x="822960" y="1399032"/>
-            <a:ext cx="10545775" cy="4172712"/>
-          </a:xfrm>
-          <a:prstGeom prst="rect">
-            <a:avLst/>
-          </a:prstGeom>
-          <a:noFill/>
-        </p:spPr>
-        <p:txBody>
-          <a:bodyPr wrap="square" lIns="0" rIns="0" tIns="0" bIns="0">
-            <a:noAutofit/>
-          </a:bodyPr>
-          <a:lstStyle/>
-          <a:p>
-            <a:pPr algn="l">
-              <a:lnSpc>
-                <a:spcPts val="2015"/>
-              </a:lnSpc>
-              <a:spcBef>
-                <a:spcPts val="0"/>
-              </a:spcBef>
-              <a:spcAft>
-                <a:spcPts val="0"/>
-              </a:spcAft>
-            </a:pPr>
-            <a:r>
-              <a:rPr sz="1550" b="0" i="0">
-                <a:solidFill>
-                  <a:srgbClr val="242A33"/>
-                </a:solidFill>
-                <a:latin typeface="Consolas"/>
-                <a:ea typeface="Consolas"/>
-              </a:rPr>
-              <a:t>import sys</a:t>
-            </a:r>
-          </a:p>
-          <a:p>
-            <a:pPr algn="l">
-              <a:lnSpc>
-                <a:spcPts val="2015"/>
-              </a:lnSpc>
-              <a:spcBef>
-                <a:spcPts val="0"/>
-              </a:spcBef>
-              <a:spcAft>
-                <a:spcPts val="0"/>
-              </a:spcAft>
-            </a:pPr>
-            <a:r>
-              <a:rPr sz="1550" b="0" i="0">
-                <a:solidFill>
-                  <a:srgbClr val="242A33"/>
-                </a:solidFill>
-                <a:latin typeface="Consolas"/>
-                <a:ea typeface="Consolas"/>
-              </a:rPr>
-              <a:t>import threading</a:t>
-            </a:r>
-          </a:p>
-          <a:p>
-            <a:pPr algn="l">
-              <a:lnSpc>
-                <a:spcPts val="2015"/>
-              </a:lnSpc>
-              <a:spcBef>
-                <a:spcPts val="0"/>
-              </a:spcBef>
-              <a:spcAft>
-                <a:spcPts val="0"/>
-              </a:spcAft>
-            </a:pPr>
-            <a:r>
-              <a:rPr sz="1550" b="0" i="0">
-                <a:solidFill>
-                  <a:srgbClr val="242A33"/>
-                </a:solidFill>
-                <a:latin typeface="Consolas"/>
-                <a:ea typeface="Consolas"/>
-              </a:rPr>
-              <a:t> </a:t>
-            </a:r>
-          </a:p>
-          <a:p>
-            <a:pPr algn="l">
-              <a:lnSpc>
-                <a:spcPts val="2015"/>
-              </a:lnSpc>
-              <a:spcBef>
-                <a:spcPts val="0"/>
-              </a:spcBef>
-              <a:spcAft>
-                <a:spcPts val="0"/>
-              </a:spcAft>
-            </a:pPr>
-            <a:r>
-              <a:rPr sz="1550" b="0" i="0">
-                <a:solidFill>
-                  <a:srgbClr val="242A33"/>
-                </a:solidFill>
-                <a:latin typeface="Consolas"/>
-                <a:ea typeface="Consolas"/>
-              </a:rPr>
-              <a:t>print(sys.getrecursionlimit())      # 默认 1000</a:t>
-            </a:r>
-          </a:p>
-          <a:p>
-            <a:pPr algn="l">
-              <a:lnSpc>
-                <a:spcPts val="2015"/>
-              </a:lnSpc>
-              <a:spcBef>
-                <a:spcPts val="0"/>
-              </a:spcBef>
-              <a:spcAft>
-                <a:spcPts val="0"/>
-              </a:spcAft>
-            </a:pPr>
-            <a:r>
-              <a:rPr sz="1550" b="0" i="0">
-                <a:solidFill>
-                  <a:srgbClr val="242A33"/>
-                </a:solidFill>
-                <a:latin typeface="Consolas"/>
-                <a:ea typeface="Consolas"/>
-              </a:rPr>
-              <a:t>sys.setrecursionlimit(1 &lt;&lt; 20)      # OJ 上深递归的标准写法</a:t>
-            </a:r>
-          </a:p>
-          <a:p>
-            <a:pPr algn="l">
-              <a:lnSpc>
-                <a:spcPts val="2015"/>
-              </a:lnSpc>
-              <a:spcBef>
-                <a:spcPts val="0"/>
-              </a:spcBef>
-              <a:spcAft>
-                <a:spcPts val="0"/>
-              </a:spcAft>
-            </a:pPr>
-            <a:r>
-              <a:rPr sz="1550" b="0" i="0">
-                <a:solidFill>
-                  <a:srgbClr val="242A33"/>
-                </a:solidFill>
-                <a:latin typeface="Consolas"/>
-                <a:ea typeface="Consolas"/>
-              </a:rPr>
-              <a:t> </a:t>
-            </a:r>
-          </a:p>
-          <a:p>
-            <a:pPr algn="l">
-              <a:lnSpc>
-                <a:spcPts val="2015"/>
-              </a:lnSpc>
-              <a:spcBef>
-                <a:spcPts val="0"/>
-              </a:spcBef>
-              <a:spcAft>
-                <a:spcPts val="0"/>
-              </a:spcAft>
-            </a:pPr>
-            <a:r>
-              <a:rPr sz="1550" b="0" i="0">
-                <a:solidFill>
-                  <a:srgbClr val="242A33"/>
-                </a:solidFill>
-                <a:latin typeface="Consolas"/>
-                <a:ea typeface="Consolas"/>
-              </a:rPr>
-              <a:t> </a:t>
-            </a:r>
-          </a:p>
-          <a:p>
-            <a:pPr algn="l">
-              <a:lnSpc>
-                <a:spcPts val="2015"/>
-              </a:lnSpc>
-              <a:spcBef>
-                <a:spcPts val="0"/>
-              </a:spcBef>
-              <a:spcAft>
-                <a:spcPts val="0"/>
-              </a:spcAft>
-            </a:pPr>
-            <a:r>
-              <a:rPr sz="1550" b="0" i="0">
-                <a:solidFill>
-                  <a:srgbClr val="242A33"/>
-                </a:solidFill>
-                <a:latin typeface="Consolas"/>
-                <a:ea typeface="Consolas"/>
-              </a:rPr>
-              <a:t>def main():</a:t>
-            </a:r>
-          </a:p>
-          <a:p>
-            <a:pPr algn="l">
-              <a:lnSpc>
-                <a:spcPts val="2015"/>
-              </a:lnSpc>
-              <a:spcBef>
-                <a:spcPts val="0"/>
-              </a:spcBef>
-              <a:spcAft>
-                <a:spcPts val="0"/>
-              </a:spcAft>
-            </a:pPr>
-            <a:r>
-              <a:rPr sz="1550" b="0" i="0">
-                <a:solidFill>
-                  <a:srgbClr val="242A33"/>
-                </a:solidFill>
-                <a:latin typeface="Consolas"/>
-                <a:ea typeface="Consolas"/>
-              </a:rPr>
-              <a:t>    sys.setrecursionlimit(1 &lt;&lt; 20)</a:t>
-            </a:r>
-          </a:p>
-          <a:p>
-            <a:pPr algn="l">
-              <a:lnSpc>
-                <a:spcPts val="2015"/>
-              </a:lnSpc>
-              <a:spcBef>
-                <a:spcPts val="0"/>
-              </a:spcBef>
-              <a:spcAft>
-                <a:spcPts val="0"/>
-              </a:spcAft>
-            </a:pPr>
-            <a:r>
-              <a:rPr sz="1550" b="0" i="0">
-                <a:solidFill>
-                  <a:srgbClr val="242A33"/>
-                </a:solidFill>
-                <a:latin typeface="Consolas"/>
-                <a:ea typeface="Consolas"/>
-              </a:rPr>
-              <a:t>    # ... 深递归代码 ...</a:t>
-            </a:r>
-          </a:p>
-          <a:p>
-            <a:pPr algn="l">
-              <a:lnSpc>
-                <a:spcPts val="2015"/>
-              </a:lnSpc>
-              <a:spcBef>
-                <a:spcPts val="0"/>
-              </a:spcBef>
-              <a:spcAft>
-                <a:spcPts val="0"/>
-              </a:spcAft>
-            </a:pPr>
-            <a:r>
-              <a:rPr sz="1550" b="0" i="0">
-                <a:solidFill>
-                  <a:srgbClr val="242A33"/>
-                </a:solidFill>
-                <a:latin typeface="Consolas"/>
-                <a:ea typeface="Consolas"/>
-              </a:rPr>
-              <a:t>    print("done")</a:t>
-            </a:r>
-          </a:p>
-          <a:p>
-            <a:pPr algn="l">
-              <a:lnSpc>
-                <a:spcPts val="2015"/>
-              </a:lnSpc>
-              <a:spcBef>
-                <a:spcPts val="0"/>
-              </a:spcBef>
-              <a:spcAft>
-                <a:spcPts val="0"/>
-              </a:spcAft>
-            </a:pPr>
-            <a:r>
-              <a:rPr sz="1550" b="0" i="0">
-                <a:solidFill>
-                  <a:srgbClr val="242A33"/>
-                </a:solidFill>
-                <a:latin typeface="Consolas"/>
-                <a:ea typeface="Consolas"/>
-              </a:rPr>
-              <a:t> </a:t>
-            </a:r>
-          </a:p>
-          <a:p>
-            <a:pPr algn="l">
-              <a:lnSpc>
-                <a:spcPts val="2015"/>
-              </a:lnSpc>
-              <a:spcBef>
-                <a:spcPts val="0"/>
-              </a:spcBef>
-              <a:spcAft>
-                <a:spcPts val="0"/>
-              </a:spcAft>
-            </a:pPr>
-            <a:r>
-              <a:rPr sz="1550" b="0" i="0">
-                <a:solidFill>
-                  <a:srgbClr val="242A33"/>
-                </a:solidFill>
-                <a:latin typeface="Consolas"/>
-                <a:ea typeface="Consolas"/>
-              </a:rPr>
-              <a:t> </a:t>
-            </a:r>
-          </a:p>
-          <a:p>
-            <a:pPr algn="l">
-              <a:lnSpc>
-                <a:spcPts val="2015"/>
-              </a:lnSpc>
-              <a:spcBef>
-                <a:spcPts val="0"/>
-              </a:spcBef>
-              <a:spcAft>
-                <a:spcPts val="0"/>
-              </a:spcAft>
-            </a:pPr>
-            <a:r>
-              <a:rPr sz="1550" b="0" i="0">
-                <a:solidFill>
-                  <a:srgbClr val="242A33"/>
-                </a:solidFill>
-                <a:latin typeface="Consolas"/>
-                <a:ea typeface="Consolas"/>
-              </a:rPr>
-              <a:t>threading.stack_size(1 &lt;&lt; 26)       # 64 MB</a:t>
-            </a:r>
-          </a:p>
-          <a:p>
-            <a:pPr algn="l">
-              <a:lnSpc>
-                <a:spcPts val="2015"/>
-              </a:lnSpc>
-              <a:spcBef>
-                <a:spcPts val="0"/>
-              </a:spcBef>
-              <a:spcAft>
-                <a:spcPts val="0"/>
-              </a:spcAft>
-            </a:pPr>
-            <a:r>
-              <a:rPr sz="1550" b="0" i="0">
-                <a:solidFill>
-                  <a:srgbClr val="242A33"/>
-                </a:solidFill>
-                <a:latin typeface="Consolas"/>
-                <a:ea typeface="Consolas"/>
-              </a:rPr>
-              <a:t>t = threading.Thread(target=main)</a:t>
-            </a:r>
-          </a:p>
-          <a:p>
-            <a:pPr algn="l">
-              <a:lnSpc>
-                <a:spcPts val="2015"/>
-              </a:lnSpc>
-              <a:spcBef>
-                <a:spcPts val="0"/>
-              </a:spcBef>
-              <a:spcAft>
-                <a:spcPts val="0"/>
-              </a:spcAft>
-            </a:pPr>
-            <a:r>
-              <a:rPr sz="1550" b="0" i="0">
-                <a:solidFill>
-                  <a:srgbClr val="242A33"/>
-                </a:solidFill>
-                <a:latin typeface="Consolas"/>
-                <a:ea typeface="Consolas"/>
-              </a:rPr>
-              <a:t>t.start(); t.join()</a:t>
-            </a:r>
-          </a:p>
-        </p:txBody>
-      </p:sp>
-      <p:sp>
-        <p:nvSpPr>
-          <p:cNvPr id="6" name="TextBox 5"/>
-          <p:cNvSpPr txBox="1"/>
-          <p:nvPr/>
-        </p:nvSpPr>
-        <p:spPr>
-          <a:xfrm>
-            <a:off x="566928" y="5791200"/>
+            <a:off x="566928" y="2763012"/>
             <a:ext cx="11057839" cy="329184"/>
           </a:xfrm>
           <a:prstGeom prst="rect">
@@ -16767,14 +18949,14 @@
                 <a:latin typeface="Segoe UI"/>
                 <a:ea typeface="微软雅黑"/>
               </a:rPr>
-              <a:t>⚠️ 调大限制只解除了 Python 层的检查，C 栈仍有限。稳妥做法是改写成迭代</a:t>
-            </a:r>
-          </a:p>
-        </p:txBody>
-      </p:sp>
-      <p:sp>
-        <p:nvSpPr>
-          <p:cNvPr id="7" name="TextBox 6"/>
+              <a:t>墙一本是设在墙二前面的护栏。把护栏挪远、墙二没动 —— 于是「能看懂的异常」变成了「没有 traceback 的 RE」</a:t>
+            </a:r>
+          </a:p>
+        </p:txBody>
+      </p:sp>
+      <p:sp>
+        <p:nvSpPr>
+          <p:cNvPr id="6" name="TextBox 5"/>
           <p:cNvSpPr txBox="1"/>
           <p:nvPr/>
         </p:nvSpPr>
@@ -16817,7 +18999,7 @@
       </p:sp>
       <p:sp>
         <p:nvSpPr>
-          <p:cNvPr id="8" name="TextBox 7"/>
+          <p:cNvPr id="7" name="TextBox 6"/>
           <p:cNvSpPr txBox="1"/>
           <p:nvPr/>
         </p:nvSpPr>
